--- a/apresentacao/Apresentacao_MLP_Veiculos_V2_Com_Buscas.pptx
+++ b/apresentacao/Apresentacao_MLP_Veiculos_V2_Com_Buscas.pptx
@@ -5,28 +5,28 @@
     <p:sldMasterId id="2147483648" r:id="rId1"/>
   </p:sldMasterIdLst>
   <p:sldIdLst>
-    <p:sldId id="256" r:id="rId7"/>
-    <p:sldId id="257" r:id="rId8"/>
-    <p:sldId id="258" r:id="rId9"/>
-    <p:sldId id="259" r:id="rId10"/>
-    <p:sldId id="260" r:id="rId11"/>
-    <p:sldId id="261" r:id="rId12"/>
-    <p:sldId id="262" r:id="rId13"/>
-    <p:sldId id="263" r:id="rId14"/>
-    <p:sldId id="264" r:id="rId15"/>
-    <p:sldId id="265" r:id="rId16"/>
-    <p:sldId id="266" r:id="rId17"/>
-    <p:sldId id="267" r:id="rId18"/>
-    <p:sldId id="268" r:id="rId19"/>
-    <p:sldId id="269" r:id="rId20"/>
-    <p:sldId id="270" r:id="rId21"/>
-    <p:sldId id="271" r:id="rId22"/>
-    <p:sldId id="272" r:id="rId23"/>
-    <p:sldId id="273" r:id="rId24"/>
-    <p:sldId id="274" r:id="rId25"/>
-    <p:sldId id="275" r:id="rId26"/>
+    <p:sldId id="256" r:id="rId2"/>
+    <p:sldId id="257" r:id="rId3"/>
+    <p:sldId id="258" r:id="rId4"/>
+    <p:sldId id="259" r:id="rId5"/>
+    <p:sldId id="260" r:id="rId6"/>
+    <p:sldId id="261" r:id="rId7"/>
+    <p:sldId id="262" r:id="rId8"/>
+    <p:sldId id="263" r:id="rId9"/>
+    <p:sldId id="264" r:id="rId10"/>
+    <p:sldId id="265" r:id="rId11"/>
+    <p:sldId id="266" r:id="rId12"/>
+    <p:sldId id="267" r:id="rId13"/>
+    <p:sldId id="268" r:id="rId14"/>
+    <p:sldId id="269" r:id="rId15"/>
+    <p:sldId id="270" r:id="rId16"/>
+    <p:sldId id="271" r:id="rId17"/>
+    <p:sldId id="272" r:id="rId18"/>
+    <p:sldId id="273" r:id="rId19"/>
+    <p:sldId id="274" r:id="rId20"/>
+    <p:sldId id="275" r:id="rId21"/>
   </p:sldIdLst>
-  <p:sldSz cx="12191695" cy="6858000" type="screen4x3"/>
+  <p:sldSz cx="12192000" cy="6858000"/>
   <p:notesSz cx="6858000" cy="9144000"/>
   <p:defaultTextStyle>
     <a:defPPr>
@@ -123,6 +123,22 @@
       </a:defRPr>
     </a:lvl9pPr>
   </p:defaultTextStyle>
+  <p:extLst>
+    <p:ext uri="{EFAFB233-063F-42B5-8137-9DF3F51BA10A}">
+      <p15:sldGuideLst xmlns:p15="http://schemas.microsoft.com/office/powerpoint/2012/main">
+        <p15:guide id="1" orient="horz" pos="2160">
+          <p15:clr>
+            <a:srgbClr val="A4A3A4"/>
+          </p15:clr>
+        </p15:guide>
+        <p15:guide id="2" pos="2880">
+          <p15:clr>
+            <a:srgbClr val="A4A3A4"/>
+          </p15:clr>
+        </p15:guide>
+      </p15:sldGuideLst>
+    </p:ext>
+  </p:extLst>
 </p:presentation>
 </file>
 
@@ -164,10 +180,9 @@
           <a:lstStyle/>
           <a:p>
             <a:r>
-              <a:rPr lang="en-US" smtClean="0"/>
+              <a:rPr lang="en-US"/>
               <a:t>Click to edit Master title style</a:t>
             </a:r>
-            <a:endParaRPr lang="en-US"/>
           </a:p>
         </p:txBody>
       </p:sp>
@@ -283,10 +298,9 @@
           </a:lstStyle>
           <a:p>
             <a:r>
-              <a:rPr lang="en-US" smtClean="0"/>
+              <a:rPr lang="en-US"/>
               <a:t>Click to edit Master subtitle style</a:t>
             </a:r>
-            <a:endParaRPr lang="en-US"/>
           </a:p>
         </p:txBody>
       </p:sp>
@@ -307,7 +321,7 @@
           <a:p>
             <a:fld id="{5BCAD085-E8A6-8845-BD4E-CB4CCA059FC4}" type="datetimeFigureOut">
               <a:rPr lang="en-US" smtClean="0"/>
-              <a:t>1/27/13</a:t>
+              <a:t>9/27/2026</a:t>
             </a:fld>
             <a:endParaRPr lang="en-US"/>
           </a:p>
@@ -349,7 +363,7 @@
           <a:p>
             <a:fld id="{C1FF6DA9-008F-8B48-92A6-B652298478BF}" type="slidenum">
               <a:rPr lang="en-US" smtClean="0"/>
-              <a:t>‹#›</a:t>
+              <a:t>‹nº›</a:t>
             </a:fld>
             <a:endParaRPr lang="en-US"/>
           </a:p>
@@ -401,10 +415,9 @@
           <a:lstStyle/>
           <a:p>
             <a:r>
-              <a:rPr lang="en-US" smtClean="0"/>
+              <a:rPr lang="en-US"/>
               <a:t>Click to edit Master title style</a:t>
             </a:r>
-            <a:endParaRPr lang="en-US"/>
           </a:p>
         </p:txBody>
       </p:sp>
@@ -425,38 +438,37 @@
           <a:p>
             <a:pPr lvl="0"/>
             <a:r>
-              <a:rPr lang="en-US" smtClean="0"/>
+              <a:rPr lang="en-US"/>
               <a:t>Click to edit Master text styles</a:t>
             </a:r>
           </a:p>
           <a:p>
             <a:pPr lvl="1"/>
             <a:r>
-              <a:rPr lang="en-US" smtClean="0"/>
+              <a:rPr lang="en-US"/>
               <a:t>Second level</a:t>
             </a:r>
           </a:p>
           <a:p>
             <a:pPr lvl="2"/>
             <a:r>
-              <a:rPr lang="en-US" smtClean="0"/>
+              <a:rPr lang="en-US"/>
               <a:t>Third level</a:t>
             </a:r>
           </a:p>
           <a:p>
             <a:pPr lvl="3"/>
             <a:r>
-              <a:rPr lang="en-US" smtClean="0"/>
+              <a:rPr lang="en-US"/>
               <a:t>Fourth level</a:t>
             </a:r>
           </a:p>
           <a:p>
             <a:pPr lvl="4"/>
             <a:r>
-              <a:rPr lang="en-US" smtClean="0"/>
+              <a:rPr lang="en-US"/>
               <a:t>Fifth level</a:t>
             </a:r>
-            <a:endParaRPr lang="en-US"/>
           </a:p>
         </p:txBody>
       </p:sp>
@@ -477,7 +489,7 @@
           <a:p>
             <a:fld id="{5BCAD085-E8A6-8845-BD4E-CB4CCA059FC4}" type="datetimeFigureOut">
               <a:rPr lang="en-US" smtClean="0"/>
-              <a:t>1/27/13</a:t>
+              <a:t>9/27/2026</a:t>
             </a:fld>
             <a:endParaRPr lang="en-US"/>
           </a:p>
@@ -519,7 +531,7 @@
           <a:p>
             <a:fld id="{C1FF6DA9-008F-8B48-92A6-B652298478BF}" type="slidenum">
               <a:rPr lang="en-US" smtClean="0"/>
-              <a:t>‹#›</a:t>
+              <a:t>‹nº›</a:t>
             </a:fld>
             <a:endParaRPr lang="en-US"/>
           </a:p>
@@ -576,10 +588,9 @@
           <a:lstStyle/>
           <a:p>
             <a:r>
-              <a:rPr lang="en-US" smtClean="0"/>
+              <a:rPr lang="en-US"/>
               <a:t>Click to edit Master title style</a:t>
             </a:r>
-            <a:endParaRPr lang="en-US"/>
           </a:p>
         </p:txBody>
       </p:sp>
@@ -605,38 +616,37 @@
           <a:p>
             <a:pPr lvl="0"/>
             <a:r>
-              <a:rPr lang="en-US" smtClean="0"/>
+              <a:rPr lang="en-US"/>
               <a:t>Click to edit Master text styles</a:t>
             </a:r>
           </a:p>
           <a:p>
             <a:pPr lvl="1"/>
             <a:r>
-              <a:rPr lang="en-US" smtClean="0"/>
+              <a:rPr lang="en-US"/>
               <a:t>Second level</a:t>
             </a:r>
           </a:p>
           <a:p>
             <a:pPr lvl="2"/>
             <a:r>
-              <a:rPr lang="en-US" smtClean="0"/>
+              <a:rPr lang="en-US"/>
               <a:t>Third level</a:t>
             </a:r>
           </a:p>
           <a:p>
             <a:pPr lvl="3"/>
             <a:r>
-              <a:rPr lang="en-US" smtClean="0"/>
+              <a:rPr lang="en-US"/>
               <a:t>Fourth level</a:t>
             </a:r>
           </a:p>
           <a:p>
             <a:pPr lvl="4"/>
             <a:r>
-              <a:rPr lang="en-US" smtClean="0"/>
+              <a:rPr lang="en-US"/>
               <a:t>Fifth level</a:t>
             </a:r>
-            <a:endParaRPr lang="en-US"/>
           </a:p>
         </p:txBody>
       </p:sp>
@@ -657,7 +667,7 @@
           <a:p>
             <a:fld id="{5BCAD085-E8A6-8845-BD4E-CB4CCA059FC4}" type="datetimeFigureOut">
               <a:rPr lang="en-US" smtClean="0"/>
-              <a:t>1/27/13</a:t>
+              <a:t>9/27/2026</a:t>
             </a:fld>
             <a:endParaRPr lang="en-US"/>
           </a:p>
@@ -699,7 +709,7 @@
           <a:p>
             <a:fld id="{C1FF6DA9-008F-8B48-92A6-B652298478BF}" type="slidenum">
               <a:rPr lang="en-US" smtClean="0"/>
-              <a:t>‹#›</a:t>
+              <a:t>‹nº›</a:t>
             </a:fld>
             <a:endParaRPr lang="en-US"/>
           </a:p>
@@ -751,10 +761,9 @@
           <a:lstStyle/>
           <a:p>
             <a:r>
-              <a:rPr lang="en-US" smtClean="0"/>
+              <a:rPr lang="en-US"/>
               <a:t>Click to edit Master title style</a:t>
             </a:r>
-            <a:endParaRPr lang="en-US"/>
           </a:p>
         </p:txBody>
       </p:sp>
@@ -775,38 +784,37 @@
           <a:p>
             <a:pPr lvl="0"/>
             <a:r>
-              <a:rPr lang="en-US" smtClean="0"/>
+              <a:rPr lang="en-US"/>
               <a:t>Click to edit Master text styles</a:t>
             </a:r>
           </a:p>
           <a:p>
             <a:pPr lvl="1"/>
             <a:r>
-              <a:rPr lang="en-US" smtClean="0"/>
+              <a:rPr lang="en-US"/>
               <a:t>Second level</a:t>
             </a:r>
           </a:p>
           <a:p>
             <a:pPr lvl="2"/>
             <a:r>
-              <a:rPr lang="en-US" smtClean="0"/>
+              <a:rPr lang="en-US"/>
               <a:t>Third level</a:t>
             </a:r>
           </a:p>
           <a:p>
             <a:pPr lvl="3"/>
             <a:r>
-              <a:rPr lang="en-US" smtClean="0"/>
+              <a:rPr lang="en-US"/>
               <a:t>Fourth level</a:t>
             </a:r>
           </a:p>
           <a:p>
             <a:pPr lvl="4"/>
             <a:r>
-              <a:rPr lang="en-US" smtClean="0"/>
+              <a:rPr lang="en-US"/>
               <a:t>Fifth level</a:t>
             </a:r>
-            <a:endParaRPr lang="en-US"/>
           </a:p>
         </p:txBody>
       </p:sp>
@@ -827,7 +835,7 @@
           <a:p>
             <a:fld id="{5BCAD085-E8A6-8845-BD4E-CB4CCA059FC4}" type="datetimeFigureOut">
               <a:rPr lang="en-US" smtClean="0"/>
-              <a:t>1/27/13</a:t>
+              <a:t>9/27/2026</a:t>
             </a:fld>
             <a:endParaRPr lang="en-US"/>
           </a:p>
@@ -869,7 +877,7 @@
           <a:p>
             <a:fld id="{C1FF6DA9-008F-8B48-92A6-B652298478BF}" type="slidenum">
               <a:rPr lang="en-US" smtClean="0"/>
-              <a:t>‹#›</a:t>
+              <a:t>‹nº›</a:t>
             </a:fld>
             <a:endParaRPr lang="en-US"/>
           </a:p>
@@ -930,10 +938,9 @@
           </a:lstStyle>
           <a:p>
             <a:r>
-              <a:rPr lang="en-US" smtClean="0"/>
+              <a:rPr lang="en-US"/>
               <a:t>Click to edit Master title style</a:t>
             </a:r>
-            <a:endParaRPr lang="en-US"/>
           </a:p>
         </p:txBody>
       </p:sp>
@@ -1050,7 +1057,7 @@
           <a:p>
             <a:pPr lvl="0"/>
             <a:r>
-              <a:rPr lang="en-US" smtClean="0"/>
+              <a:rPr lang="en-US"/>
               <a:t>Click to edit Master text styles</a:t>
             </a:r>
           </a:p>
@@ -1073,7 +1080,7 @@
           <a:p>
             <a:fld id="{5BCAD085-E8A6-8845-BD4E-CB4CCA059FC4}" type="datetimeFigureOut">
               <a:rPr lang="en-US" smtClean="0"/>
-              <a:t>1/27/13</a:t>
+              <a:t>9/27/2026</a:t>
             </a:fld>
             <a:endParaRPr lang="en-US"/>
           </a:p>
@@ -1115,7 +1122,7 @@
           <a:p>
             <a:fld id="{C1FF6DA9-008F-8B48-92A6-B652298478BF}" type="slidenum">
               <a:rPr lang="en-US" smtClean="0"/>
-              <a:t>‹#›</a:t>
+              <a:t>‹nº›</a:t>
             </a:fld>
             <a:endParaRPr lang="en-US"/>
           </a:p>
@@ -1167,10 +1174,9 @@
           <a:lstStyle/>
           <a:p>
             <a:r>
-              <a:rPr lang="en-US" smtClean="0"/>
+              <a:rPr lang="en-US"/>
               <a:t>Click to edit Master title style</a:t>
             </a:r>
-            <a:endParaRPr lang="en-US"/>
           </a:p>
         </p:txBody>
       </p:sp>
@@ -1224,38 +1230,37 @@
           <a:p>
             <a:pPr lvl="0"/>
             <a:r>
-              <a:rPr lang="en-US" smtClean="0"/>
+              <a:rPr lang="en-US"/>
               <a:t>Click to edit Master text styles</a:t>
             </a:r>
           </a:p>
           <a:p>
             <a:pPr lvl="1"/>
             <a:r>
-              <a:rPr lang="en-US" smtClean="0"/>
+              <a:rPr lang="en-US"/>
               <a:t>Second level</a:t>
             </a:r>
           </a:p>
           <a:p>
             <a:pPr lvl="2"/>
             <a:r>
-              <a:rPr lang="en-US" smtClean="0"/>
+              <a:rPr lang="en-US"/>
               <a:t>Third level</a:t>
             </a:r>
           </a:p>
           <a:p>
             <a:pPr lvl="3"/>
             <a:r>
-              <a:rPr lang="en-US" smtClean="0"/>
+              <a:rPr lang="en-US"/>
               <a:t>Fourth level</a:t>
             </a:r>
           </a:p>
           <a:p>
             <a:pPr lvl="4"/>
             <a:r>
-              <a:rPr lang="en-US" smtClean="0"/>
+              <a:rPr lang="en-US"/>
               <a:t>Fifth level</a:t>
             </a:r>
-            <a:endParaRPr lang="en-US"/>
           </a:p>
         </p:txBody>
       </p:sp>
@@ -1309,38 +1314,37 @@
           <a:p>
             <a:pPr lvl="0"/>
             <a:r>
-              <a:rPr lang="en-US" smtClean="0"/>
+              <a:rPr lang="en-US"/>
               <a:t>Click to edit Master text styles</a:t>
             </a:r>
           </a:p>
           <a:p>
             <a:pPr lvl="1"/>
             <a:r>
-              <a:rPr lang="en-US" smtClean="0"/>
+              <a:rPr lang="en-US"/>
               <a:t>Second level</a:t>
             </a:r>
           </a:p>
           <a:p>
             <a:pPr lvl="2"/>
             <a:r>
-              <a:rPr lang="en-US" smtClean="0"/>
+              <a:rPr lang="en-US"/>
               <a:t>Third level</a:t>
             </a:r>
           </a:p>
           <a:p>
             <a:pPr lvl="3"/>
             <a:r>
-              <a:rPr lang="en-US" smtClean="0"/>
+              <a:rPr lang="en-US"/>
               <a:t>Fourth level</a:t>
             </a:r>
           </a:p>
           <a:p>
             <a:pPr lvl="4"/>
             <a:r>
-              <a:rPr lang="en-US" smtClean="0"/>
+              <a:rPr lang="en-US"/>
               <a:t>Fifth level</a:t>
             </a:r>
-            <a:endParaRPr lang="en-US"/>
           </a:p>
         </p:txBody>
       </p:sp>
@@ -1361,7 +1365,7 @@
           <a:p>
             <a:fld id="{5BCAD085-E8A6-8845-BD4E-CB4CCA059FC4}" type="datetimeFigureOut">
               <a:rPr lang="en-US" smtClean="0"/>
-              <a:t>1/27/13</a:t>
+              <a:t>9/27/2026</a:t>
             </a:fld>
             <a:endParaRPr lang="en-US"/>
           </a:p>
@@ -1403,7 +1407,7 @@
           <a:p>
             <a:fld id="{C1FF6DA9-008F-8B48-92A6-B652298478BF}" type="slidenum">
               <a:rPr lang="en-US" smtClean="0"/>
-              <a:t>‹#›</a:t>
+              <a:t>‹nº›</a:t>
             </a:fld>
             <a:endParaRPr lang="en-US"/>
           </a:p>
@@ -1459,10 +1463,9 @@
           </a:lstStyle>
           <a:p>
             <a:r>
-              <a:rPr lang="en-US" smtClean="0"/>
+              <a:rPr lang="en-US"/>
               <a:t>Click to edit Master title style</a:t>
             </a:r>
-            <a:endParaRPr lang="en-US"/>
           </a:p>
         </p:txBody>
       </p:sp>
@@ -1525,7 +1528,7 @@
           <a:p>
             <a:pPr lvl="0"/>
             <a:r>
-              <a:rPr lang="en-US" smtClean="0"/>
+              <a:rPr lang="en-US"/>
               <a:t>Click to edit Master text styles</a:t>
             </a:r>
           </a:p>
@@ -1581,38 +1584,37 @@
           <a:p>
             <a:pPr lvl="0"/>
             <a:r>
-              <a:rPr lang="en-US" smtClean="0"/>
+              <a:rPr lang="en-US"/>
               <a:t>Click to edit Master text styles</a:t>
             </a:r>
           </a:p>
           <a:p>
             <a:pPr lvl="1"/>
             <a:r>
-              <a:rPr lang="en-US" smtClean="0"/>
+              <a:rPr lang="en-US"/>
               <a:t>Second level</a:t>
             </a:r>
           </a:p>
           <a:p>
             <a:pPr lvl="2"/>
             <a:r>
-              <a:rPr lang="en-US" smtClean="0"/>
+              <a:rPr lang="en-US"/>
               <a:t>Third level</a:t>
             </a:r>
           </a:p>
           <a:p>
             <a:pPr lvl="3"/>
             <a:r>
-              <a:rPr lang="en-US" smtClean="0"/>
+              <a:rPr lang="en-US"/>
               <a:t>Fourth level</a:t>
             </a:r>
           </a:p>
           <a:p>
             <a:pPr lvl="4"/>
             <a:r>
-              <a:rPr lang="en-US" smtClean="0"/>
+              <a:rPr lang="en-US"/>
               <a:t>Fifth level</a:t>
             </a:r>
-            <a:endParaRPr lang="en-US"/>
           </a:p>
         </p:txBody>
       </p:sp>
@@ -1675,7 +1677,7 @@
           <a:p>
             <a:pPr lvl="0"/>
             <a:r>
-              <a:rPr lang="en-US" smtClean="0"/>
+              <a:rPr lang="en-US"/>
               <a:t>Click to edit Master text styles</a:t>
             </a:r>
           </a:p>
@@ -1731,38 +1733,37 @@
           <a:p>
             <a:pPr lvl="0"/>
             <a:r>
-              <a:rPr lang="en-US" smtClean="0"/>
+              <a:rPr lang="en-US"/>
               <a:t>Click to edit Master text styles</a:t>
             </a:r>
           </a:p>
           <a:p>
             <a:pPr lvl="1"/>
             <a:r>
-              <a:rPr lang="en-US" smtClean="0"/>
+              <a:rPr lang="en-US"/>
               <a:t>Second level</a:t>
             </a:r>
           </a:p>
           <a:p>
             <a:pPr lvl="2"/>
             <a:r>
-              <a:rPr lang="en-US" smtClean="0"/>
+              <a:rPr lang="en-US"/>
               <a:t>Third level</a:t>
             </a:r>
           </a:p>
           <a:p>
             <a:pPr lvl="3"/>
             <a:r>
-              <a:rPr lang="en-US" smtClean="0"/>
+              <a:rPr lang="en-US"/>
               <a:t>Fourth level</a:t>
             </a:r>
           </a:p>
           <a:p>
             <a:pPr lvl="4"/>
             <a:r>
-              <a:rPr lang="en-US" smtClean="0"/>
+              <a:rPr lang="en-US"/>
               <a:t>Fifth level</a:t>
             </a:r>
-            <a:endParaRPr lang="en-US"/>
           </a:p>
         </p:txBody>
       </p:sp>
@@ -1783,7 +1784,7 @@
           <a:p>
             <a:fld id="{5BCAD085-E8A6-8845-BD4E-CB4CCA059FC4}" type="datetimeFigureOut">
               <a:rPr lang="en-US" smtClean="0"/>
-              <a:t>1/27/13</a:t>
+              <a:t>9/27/2026</a:t>
             </a:fld>
             <a:endParaRPr lang="en-US"/>
           </a:p>
@@ -1825,7 +1826,7 @@
           <a:p>
             <a:fld id="{C1FF6DA9-008F-8B48-92A6-B652298478BF}" type="slidenum">
               <a:rPr lang="en-US" smtClean="0"/>
-              <a:t>‹#›</a:t>
+              <a:t>‹nº›</a:t>
             </a:fld>
             <a:endParaRPr lang="en-US"/>
           </a:p>
@@ -1877,10 +1878,9 @@
           <a:lstStyle/>
           <a:p>
             <a:r>
-              <a:rPr lang="en-US" smtClean="0"/>
+              <a:rPr lang="en-US"/>
               <a:t>Click to edit Master title style</a:t>
             </a:r>
-            <a:endParaRPr lang="en-US"/>
           </a:p>
         </p:txBody>
       </p:sp>
@@ -1901,7 +1901,7 @@
           <a:p>
             <a:fld id="{5BCAD085-E8A6-8845-BD4E-CB4CCA059FC4}" type="datetimeFigureOut">
               <a:rPr lang="en-US" smtClean="0"/>
-              <a:t>1/27/13</a:t>
+              <a:t>9/27/2026</a:t>
             </a:fld>
             <a:endParaRPr lang="en-US"/>
           </a:p>
@@ -1943,7 +1943,7 @@
           <a:p>
             <a:fld id="{C1FF6DA9-008F-8B48-92A6-B652298478BF}" type="slidenum">
               <a:rPr lang="en-US" smtClean="0"/>
-              <a:t>‹#›</a:t>
+              <a:t>‹nº›</a:t>
             </a:fld>
             <a:endParaRPr lang="en-US"/>
           </a:p>
@@ -1996,7 +1996,7 @@
           <a:p>
             <a:fld id="{5BCAD085-E8A6-8845-BD4E-CB4CCA059FC4}" type="datetimeFigureOut">
               <a:rPr lang="en-US" smtClean="0"/>
-              <a:t>1/27/13</a:t>
+              <a:t>9/27/2026</a:t>
             </a:fld>
             <a:endParaRPr lang="en-US"/>
           </a:p>
@@ -2038,7 +2038,7 @@
           <a:p>
             <a:fld id="{C1FF6DA9-008F-8B48-92A6-B652298478BF}" type="slidenum">
               <a:rPr lang="en-US" smtClean="0"/>
-              <a:t>‹#›</a:t>
+              <a:t>‹nº›</a:t>
             </a:fld>
             <a:endParaRPr lang="en-US"/>
           </a:p>
@@ -2099,10 +2099,9 @@
           </a:lstStyle>
           <a:p>
             <a:r>
-              <a:rPr lang="en-US" smtClean="0"/>
+              <a:rPr lang="en-US"/>
               <a:t>Click to edit Master title style</a:t>
             </a:r>
-            <a:endParaRPr lang="en-US"/>
           </a:p>
         </p:txBody>
       </p:sp>
@@ -2156,38 +2155,37 @@
           <a:p>
             <a:pPr lvl="0"/>
             <a:r>
-              <a:rPr lang="en-US" smtClean="0"/>
+              <a:rPr lang="en-US"/>
               <a:t>Click to edit Master text styles</a:t>
             </a:r>
           </a:p>
           <a:p>
             <a:pPr lvl="1"/>
             <a:r>
-              <a:rPr lang="en-US" smtClean="0"/>
+              <a:rPr lang="en-US"/>
               <a:t>Second level</a:t>
             </a:r>
           </a:p>
           <a:p>
             <a:pPr lvl="2"/>
             <a:r>
-              <a:rPr lang="en-US" smtClean="0"/>
+              <a:rPr lang="en-US"/>
               <a:t>Third level</a:t>
             </a:r>
           </a:p>
           <a:p>
             <a:pPr lvl="3"/>
             <a:r>
-              <a:rPr lang="en-US" smtClean="0"/>
+              <a:rPr lang="en-US"/>
               <a:t>Fourth level</a:t>
             </a:r>
           </a:p>
           <a:p>
             <a:pPr lvl="4"/>
             <a:r>
-              <a:rPr lang="en-US" smtClean="0"/>
+              <a:rPr lang="en-US"/>
               <a:t>Fifth level</a:t>
             </a:r>
-            <a:endParaRPr lang="en-US"/>
           </a:p>
         </p:txBody>
       </p:sp>
@@ -2250,7 +2248,7 @@
           <a:p>
             <a:pPr lvl="0"/>
             <a:r>
-              <a:rPr lang="en-US" smtClean="0"/>
+              <a:rPr lang="en-US"/>
               <a:t>Click to edit Master text styles</a:t>
             </a:r>
           </a:p>
@@ -2273,7 +2271,7 @@
           <a:p>
             <a:fld id="{5BCAD085-E8A6-8845-BD4E-CB4CCA059FC4}" type="datetimeFigureOut">
               <a:rPr lang="en-US" smtClean="0"/>
-              <a:t>1/27/13</a:t>
+              <a:t>9/27/2026</a:t>
             </a:fld>
             <a:endParaRPr lang="en-US"/>
           </a:p>
@@ -2315,7 +2313,7 @@
           <a:p>
             <a:fld id="{C1FF6DA9-008F-8B48-92A6-B652298478BF}" type="slidenum">
               <a:rPr lang="en-US" smtClean="0"/>
-              <a:t>‹#›</a:t>
+              <a:t>‹nº›</a:t>
             </a:fld>
             <a:endParaRPr lang="en-US"/>
           </a:p>
@@ -2376,10 +2374,9 @@
           </a:lstStyle>
           <a:p>
             <a:r>
-              <a:rPr lang="en-US" smtClean="0"/>
+              <a:rPr lang="en-US"/>
               <a:t>Click to edit Master title style</a:t>
             </a:r>
-            <a:endParaRPr lang="en-US"/>
           </a:p>
         </p:txBody>
       </p:sp>
@@ -2503,7 +2500,7 @@
           <a:p>
             <a:pPr lvl="0"/>
             <a:r>
-              <a:rPr lang="en-US" smtClean="0"/>
+              <a:rPr lang="en-US"/>
               <a:t>Click to edit Master text styles</a:t>
             </a:r>
           </a:p>
@@ -2526,7 +2523,7 @@
           <a:p>
             <a:fld id="{5BCAD085-E8A6-8845-BD4E-CB4CCA059FC4}" type="datetimeFigureOut">
               <a:rPr lang="en-US" smtClean="0"/>
-              <a:t>1/27/13</a:t>
+              <a:t>9/27/2026</a:t>
             </a:fld>
             <a:endParaRPr lang="en-US"/>
           </a:p>
@@ -2568,7 +2565,7 @@
           <a:p>
             <a:fld id="{C1FF6DA9-008F-8B48-92A6-B652298478BF}" type="slidenum">
               <a:rPr lang="en-US" smtClean="0"/>
-              <a:t>‹#›</a:t>
+              <a:t>‹nº›</a:t>
             </a:fld>
             <a:endParaRPr lang="en-US"/>
           </a:p>
@@ -2635,10 +2632,9 @@
           <a:lstStyle/>
           <a:p>
             <a:r>
-              <a:rPr lang="en-US" smtClean="0"/>
+              <a:rPr lang="en-US"/>
               <a:t>Click to edit Master title style</a:t>
             </a:r>
-            <a:endParaRPr lang="en-US"/>
           </a:p>
         </p:txBody>
       </p:sp>
@@ -2669,38 +2665,37 @@
           <a:p>
             <a:pPr lvl="0"/>
             <a:r>
-              <a:rPr lang="en-US" smtClean="0"/>
+              <a:rPr lang="en-US"/>
               <a:t>Click to edit Master text styles</a:t>
             </a:r>
           </a:p>
           <a:p>
             <a:pPr lvl="1"/>
             <a:r>
-              <a:rPr lang="en-US" smtClean="0"/>
+              <a:rPr lang="en-US"/>
               <a:t>Second level</a:t>
             </a:r>
           </a:p>
           <a:p>
             <a:pPr lvl="2"/>
             <a:r>
-              <a:rPr lang="en-US" smtClean="0"/>
+              <a:rPr lang="en-US"/>
               <a:t>Third level</a:t>
             </a:r>
           </a:p>
           <a:p>
             <a:pPr lvl="3"/>
             <a:r>
-              <a:rPr lang="en-US" smtClean="0"/>
+              <a:rPr lang="en-US"/>
               <a:t>Fourth level</a:t>
             </a:r>
           </a:p>
           <a:p>
             <a:pPr lvl="4"/>
             <a:r>
-              <a:rPr lang="en-US" smtClean="0"/>
+              <a:rPr lang="en-US"/>
               <a:t>Fifth level</a:t>
             </a:r>
-            <a:endParaRPr lang="en-US"/>
           </a:p>
         </p:txBody>
       </p:sp>
@@ -2739,7 +2734,7 @@
           <a:p>
             <a:fld id="{5BCAD085-E8A6-8845-BD4E-CB4CCA059FC4}" type="datetimeFigureOut">
               <a:rPr lang="en-US" smtClean="0"/>
-              <a:t>1/27/13</a:t>
+              <a:t>9/27/2026</a:t>
             </a:fld>
             <a:endParaRPr lang="en-US"/>
           </a:p>
@@ -2817,7 +2812,7 @@
           <a:p>
             <a:fld id="{C1FF6DA9-008F-8B48-92A6-B652298478BF}" type="slidenum">
               <a:rPr lang="en-US" smtClean="0"/>
-              <a:t>‹#›</a:t>
+              <a:t>‹nº›</a:t>
             </a:fld>
             <a:endParaRPr lang="en-US"/>
           </a:p>
@@ -3098,7 +3093,7 @@
 </file>
 
 <file path=ppt/slides/slide1.xml><?xml version="1.0" encoding="utf-8"?>
-<p:sld xmlns:a="http://schemas.openxmlformats.org/drawingml/2006/main" xmlns:p="http://schemas.openxmlformats.org/presentationml/2006/main" xmlns:r="http://schemas.openxmlformats.org/officeDocument/2006/relationships">
+<p:sld xmlns:a="http://schemas.openxmlformats.org/drawingml/2006/main" xmlns:r="http://schemas.openxmlformats.org/officeDocument/2006/relationships" xmlns:p="http://schemas.openxmlformats.org/presentationml/2006/main">
   <p:cSld>
     <p:bg>
       <p:bgPr>
@@ -3114,7 +3109,14 @@
         <p:cNvGrpSpPr/>
         <p:nvPr/>
       </p:nvGrpSpPr>
-      <p:grpSpPr/>
+      <p:grpSpPr>
+        <a:xfrm>
+          <a:off x="0" y="0"/>
+          <a:ext cx="0" cy="0"/>
+          <a:chOff x="0" y="0"/>
+          <a:chExt cx="0" cy="0"/>
+        </a:xfrm>
+      </p:grpSpPr>
       <p:sp>
         <p:nvSpPr>
           <p:cNvPr id="2" name="Rectangle 1"/>
@@ -3155,6 +3157,7 @@
           <a:lstStyle/>
           <a:p>
             <a:pPr algn="ctr"/>
+            <a:endParaRPr/>
           </a:p>
         </p:txBody>
       </p:sp>
@@ -3198,6 +3201,7 @@
           <a:lstStyle/>
           <a:p>
             <a:pPr algn="ctr"/>
+            <a:endParaRPr/>
           </a:p>
         </p:txBody>
       </p:sp>
@@ -3241,6 +3245,7 @@
           <a:lstStyle/>
           <a:p>
             <a:pPr algn="ctr"/>
+            <a:endParaRPr/>
           </a:p>
         </p:txBody>
       </p:sp>
@@ -3284,6 +3289,7 @@
           <a:lstStyle/>
           <a:p>
             <a:pPr algn="ctr"/>
+            <a:endParaRPr/>
           </a:p>
         </p:txBody>
       </p:sp>
@@ -3327,6 +3333,7 @@
           <a:lstStyle/>
           <a:p>
             <a:pPr algn="ctr"/>
+            <a:endParaRPr/>
           </a:p>
         </p:txBody>
       </p:sp>
@@ -3370,6 +3377,7 @@
           <a:lstStyle/>
           <a:p>
             <a:pPr algn="ctr"/>
+            <a:endParaRPr/>
           </a:p>
         </p:txBody>
       </p:sp>
@@ -3413,6 +3421,7 @@
           <a:lstStyle/>
           <a:p>
             <a:pPr algn="ctr"/>
+            <a:endParaRPr/>
           </a:p>
         </p:txBody>
       </p:sp>
@@ -3433,7 +3442,7 @@
           <a:noFill/>
         </p:spPr>
         <p:txBody>
-          <a:bodyPr wrap="square" lIns="0" rIns="0" tIns="0" bIns="0" anchor="ctr">
+          <a:bodyPr wrap="square" lIns="0" tIns="0" rIns="0" bIns="0" anchor="ctr">
             <a:spAutoFit/>
           </a:bodyPr>
           <a:lstStyle/>
@@ -3459,7 +3468,7 @@
         </p:nvSpPr>
         <p:spPr>
           <a:xfrm>
-            <a:off x="713232" y="1298448"/>
+            <a:off x="640081" y="1298448"/>
             <a:ext cx="7955279" cy="1719072"/>
           </a:xfrm>
           <a:prstGeom prst="rect">
@@ -3468,21 +3477,66 @@
           <a:noFill/>
         </p:spPr>
         <p:txBody>
-          <a:bodyPr wrap="square" lIns="0" rIns="0" tIns="0" bIns="0" anchor="t">
+          <a:bodyPr wrap="square" lIns="0" tIns="0" rIns="0" bIns="0" anchor="t">
             <a:spAutoFit/>
           </a:bodyPr>
           <a:lstStyle/>
           <a:p>
             <a:pPr algn="l"/>
             <a:r>
-              <a:rPr sz="3700" b="1">
+              <a:rPr sz="3700" b="1" dirty="0" err="1">
                 <a:solidFill>
                   <a:srgbClr val="FFFFFF"/>
                 </a:solidFill>
                 <a:latin typeface="Aptos"/>
               </a:rPr>
-              <a:t>Previsão de preços
-de veículos com MLP</a:t>
+              <a:t>Previsão</a:t>
+            </a:r>
+            <a:r>
+              <a:rPr sz="3700" b="1" dirty="0">
+                <a:solidFill>
+                  <a:srgbClr val="FFFFFF"/>
+                </a:solidFill>
+                <a:latin typeface="Aptos"/>
+              </a:rPr>
+              <a:t> de </a:t>
+            </a:r>
+            <a:r>
+              <a:rPr sz="3700" b="1" dirty="0" err="1">
+                <a:solidFill>
+                  <a:srgbClr val="FFFFFF"/>
+                </a:solidFill>
+                <a:latin typeface="Aptos"/>
+              </a:rPr>
+              <a:t>preços</a:t>
+            </a:r>
+            <a:r>
+              <a:rPr sz="3700" b="1" dirty="0">
+                <a:solidFill>
+                  <a:srgbClr val="FFFFFF"/>
+                </a:solidFill>
+                <a:latin typeface="Aptos"/>
+              </a:rPr>
+              <a:t>
+de </a:t>
+            </a:r>
+            <a:r>
+              <a:rPr sz="3700" b="1" dirty="0" err="1">
+                <a:solidFill>
+                  <a:srgbClr val="FFFFFF"/>
+                </a:solidFill>
+                <a:latin typeface="Aptos"/>
+              </a:rPr>
+              <a:t>veículos</a:t>
+            </a:r>
+            <a:r>
+              <a:rPr sz="3700" b="1" dirty="0">
+                <a:solidFill>
+                  <a:srgbClr val="FFFFFF"/>
+                </a:solidFill>
+                <a:latin typeface="Aptos"/>
+              </a:rPr>
+              <a:t> com MLP</a:t>
             </a:r>
           </a:p>
         </p:txBody>
@@ -3527,6 +3581,7 @@
           <a:lstStyle/>
           <a:p>
             <a:pPr algn="ctr"/>
+            <a:endParaRPr/>
           </a:p>
         </p:txBody>
       </p:sp>
@@ -3538,30 +3593,29 @@
         </p:nvSpPr>
         <p:spPr>
           <a:xfrm>
-            <a:off x="713232" y="3675887"/>
-            <a:ext cx="7498079" cy="822960"/>
-          </a:xfrm>
-          <a:prstGeom prst="rect">
-            <a:avLst/>
-          </a:prstGeom>
-          <a:noFill/>
-        </p:spPr>
-        <p:txBody>
-          <a:bodyPr wrap="square" lIns="0" rIns="0" tIns="0" bIns="0" anchor="ctr">
+            <a:off x="713232" y="3937045"/>
+            <a:ext cx="7498079" cy="276999"/>
+          </a:xfrm>
+          <a:prstGeom prst="rect">
+            <a:avLst/>
+          </a:prstGeom>
+          <a:noFill/>
+        </p:spPr>
+        <p:txBody>
+          <a:bodyPr wrap="square" lIns="0" tIns="0" rIns="0" bIns="0" anchor="ctr">
             <a:spAutoFit/>
           </a:bodyPr>
           <a:lstStyle/>
           <a:p>
             <a:pPr algn="l"/>
             <a:r>
-              <a:rPr sz="1800" b="0">
+              <a:rPr sz="1800" b="0" dirty="0">
                 <a:solidFill>
                   <a:srgbClr val="CDDCE5"/>
                 </a:solidFill>
                 <a:latin typeface="Aptos"/>
               </a:rPr>
-              <a:t>Random Search × TPE
-Modelo sem MMR e análise de sensibilidade</a:t>
+              <a:t>Random Search × TPE</a:t>
             </a:r>
           </a:p>
         </p:txBody>
@@ -3574,7 +3628,7 @@
         </p:nvSpPr>
         <p:spPr>
           <a:xfrm>
-            <a:off x="713232" y="5833872"/>
+            <a:off x="640081" y="5687568"/>
             <a:ext cx="8229600" cy="512064"/>
           </a:xfrm>
           <a:prstGeom prst="rect">
@@ -3583,20 +3637,38 @@
           <a:noFill/>
         </p:spPr>
         <p:txBody>
-          <a:bodyPr wrap="square" lIns="0" rIns="0" tIns="0" bIns="0" anchor="ctr">
+          <a:bodyPr wrap="square" lIns="0" tIns="0" rIns="0" bIns="0" anchor="ctr">
             <a:spAutoFit/>
           </a:bodyPr>
           <a:lstStyle/>
           <a:p>
             <a:pPr algn="l"/>
             <a:r>
-              <a:rPr sz="1100" b="0">
+              <a:rPr sz="1600" b="0" dirty="0">
                 <a:solidFill>
                   <a:srgbClr val="B9CDD8"/>
                 </a:solidFill>
                 <a:latin typeface="Aptos"/>
               </a:rPr>
-              <a:t>Andrey de Matos Gonçalves  ·  Felipe Gabriel Souza Libório
+              <a:t>Andrey de Matos Gonçalves  ·  Felipe Gabriel Souza </a:t>
+            </a:r>
+            <a:r>
+              <a:rPr sz="1600" b="0" dirty="0" err="1">
+                <a:solidFill>
+                  <a:srgbClr val="B9CDD8"/>
+                </a:solidFill>
+                <a:latin typeface="Aptos"/>
+              </a:rPr>
+              <a:t>Libório</a:t>
+            </a:r>
+            <a:r>
+              <a:rPr sz="1600" b="0" dirty="0">
+                <a:solidFill>
+                  <a:srgbClr val="B9CDD8"/>
+                </a:solidFill>
+                <a:latin typeface="Aptos"/>
+              </a:rPr>
+              <a:t>
 Felipe Vieira Brazão e Silva  ·  Gabriel Coelho Goes</a:t>
             </a:r>
           </a:p>
@@ -3611,7 +3683,7 @@
 </file>
 
 <file path=ppt/slides/slide10.xml><?xml version="1.0" encoding="utf-8"?>
-<p:sld xmlns:a="http://schemas.openxmlformats.org/drawingml/2006/main" xmlns:p="http://schemas.openxmlformats.org/presentationml/2006/main" xmlns:r="http://schemas.openxmlformats.org/officeDocument/2006/relationships">
+<p:sld xmlns:a="http://schemas.openxmlformats.org/drawingml/2006/main" xmlns:r="http://schemas.openxmlformats.org/officeDocument/2006/relationships" xmlns:p="http://schemas.openxmlformats.org/presentationml/2006/main">
   <p:cSld>
     <p:bg>
       <p:bgPr>
@@ -3627,7 +3699,14 @@
         <p:cNvGrpSpPr/>
         <p:nvPr/>
       </p:nvGrpSpPr>
-      <p:grpSpPr/>
+      <p:grpSpPr>
+        <a:xfrm>
+          <a:off x="0" y="0"/>
+          <a:ext cx="0" cy="0"/>
+          <a:chOff x="0" y="0"/>
+          <a:chExt cx="0" cy="0"/>
+        </a:xfrm>
+      </p:grpSpPr>
       <p:sp>
         <p:nvSpPr>
           <p:cNvPr id="2" name="Rectangle 1"/>
@@ -3668,6 +3747,7 @@
           <a:lstStyle/>
           <a:p>
             <a:pPr algn="ctr"/>
+            <a:endParaRPr/>
           </a:p>
         </p:txBody>
       </p:sp>
@@ -3688,7 +3768,7 @@
           <a:noFill/>
         </p:spPr>
         <p:txBody>
-          <a:bodyPr wrap="square" lIns="0" rIns="0" tIns="0" bIns="0" anchor="ctr">
+          <a:bodyPr wrap="square" lIns="0" tIns="0" rIns="0" bIns="0" anchor="ctr">
             <a:spAutoFit/>
           </a:bodyPr>
           <a:lstStyle/>
@@ -3723,7 +3803,7 @@
           <a:noFill/>
         </p:spPr>
         <p:txBody>
-          <a:bodyPr wrap="square" lIns="0" rIns="0" tIns="0" bIns="0" anchor="ctr">
+          <a:bodyPr wrap="square" lIns="0" tIns="0" rIns="0" bIns="0" anchor="ctr">
             <a:spAutoFit/>
           </a:bodyPr>
           <a:lstStyle/>
@@ -3758,7 +3838,7 @@
           <a:noFill/>
         </p:spPr>
         <p:txBody>
-          <a:bodyPr wrap="square" lIns="0" rIns="0" tIns="0" bIns="0" anchor="ctr">
+          <a:bodyPr wrap="square" lIns="0" tIns="0" rIns="0" bIns="0" anchor="ctr">
             <a:spAutoFit/>
           </a:bodyPr>
           <a:lstStyle/>
@@ -3816,6 +3896,7 @@
           <a:lstStyle/>
           <a:p>
             <a:pPr algn="ctr"/>
+            <a:endParaRPr/>
           </a:p>
         </p:txBody>
       </p:sp>
@@ -3836,7 +3917,7 @@
           <a:noFill/>
         </p:spPr>
         <p:txBody>
-          <a:bodyPr wrap="square" lIns="0" rIns="0" tIns="0" bIns="0" anchor="ctr">
+          <a:bodyPr wrap="square" lIns="0" tIns="0" rIns="0" bIns="0" anchor="ctr">
             <a:spAutoFit/>
           </a:bodyPr>
           <a:lstStyle/>
@@ -3871,7 +3952,7 @@
           <a:noFill/>
         </p:spPr>
         <p:txBody>
-          <a:bodyPr wrap="square" lIns="0" rIns="0" tIns="0" bIns="0" anchor="ctr">
+          <a:bodyPr wrap="square" lIns="0" tIns="0" rIns="0" bIns="0" anchor="ctr">
             <a:spAutoFit/>
           </a:bodyPr>
           <a:lstStyle/>
@@ -3906,7 +3987,7 @@
           <a:noFill/>
         </p:spPr>
         <p:txBody>
-          <a:bodyPr wrap="square" lIns="0" rIns="0" tIns="0" bIns="0" anchor="ctr">
+          <a:bodyPr wrap="square" lIns="0" tIns="0" rIns="0" bIns="0" anchor="ctr">
             <a:spAutoFit/>
           </a:bodyPr>
           <a:lstStyle/>
@@ -3964,6 +4045,7 @@
           <a:lstStyle/>
           <a:p>
             <a:pPr algn="ctr"/>
+            <a:endParaRPr/>
           </a:p>
         </p:txBody>
       </p:sp>
@@ -4007,6 +4089,7 @@
           <a:lstStyle/>
           <a:p>
             <a:pPr algn="ctr"/>
+            <a:endParaRPr/>
           </a:p>
         </p:txBody>
       </p:sp>
@@ -4027,7 +4110,7 @@
           <a:noFill/>
         </p:spPr>
         <p:txBody>
-          <a:bodyPr wrap="square" lIns="0" rIns="0" tIns="0" bIns="0" anchor="ctr">
+          <a:bodyPr wrap="square" lIns="0" tIns="0" rIns="0" bIns="0" anchor="ctr">
             <a:spAutoFit/>
           </a:bodyPr>
           <a:lstStyle/>
@@ -4062,7 +4145,7 @@
           <a:noFill/>
         </p:spPr>
         <p:txBody>
-          <a:bodyPr wrap="square" lIns="0" rIns="0" tIns="0" bIns="0" anchor="ctr">
+          <a:bodyPr wrap="square" lIns="0" tIns="0" rIns="0" bIns="0" anchor="ctr">
             <a:spAutoFit/>
           </a:bodyPr>
           <a:lstStyle/>
@@ -4120,6 +4203,7 @@
           <a:lstStyle/>
           <a:p>
             <a:pPr algn="ctr"/>
+            <a:endParaRPr/>
           </a:p>
         </p:txBody>
       </p:sp>
@@ -4163,6 +4247,7 @@
           <a:lstStyle/>
           <a:p>
             <a:pPr algn="ctr"/>
+            <a:endParaRPr/>
           </a:p>
         </p:txBody>
       </p:sp>
@@ -4183,7 +4268,7 @@
           <a:noFill/>
         </p:spPr>
         <p:txBody>
-          <a:bodyPr wrap="square" lIns="0" rIns="0" tIns="0" bIns="0" anchor="ctr">
+          <a:bodyPr wrap="square" lIns="0" tIns="0" rIns="0" bIns="0" anchor="ctr">
             <a:spAutoFit/>
           </a:bodyPr>
           <a:lstStyle/>
@@ -4218,7 +4303,7 @@
           <a:noFill/>
         </p:spPr>
         <p:txBody>
-          <a:bodyPr wrap="square" lIns="0" rIns="0" tIns="0" bIns="0" anchor="ctr">
+          <a:bodyPr wrap="square" lIns="0" tIns="0" rIns="0" bIns="0" anchor="ctr">
             <a:spAutoFit/>
           </a:bodyPr>
           <a:lstStyle/>
@@ -4276,6 +4361,7 @@
           <a:lstStyle/>
           <a:p>
             <a:pPr algn="ctr"/>
+            <a:endParaRPr/>
           </a:p>
         </p:txBody>
       </p:sp>
@@ -4319,6 +4405,7 @@
           <a:lstStyle/>
           <a:p>
             <a:pPr algn="ctr"/>
+            <a:endParaRPr/>
           </a:p>
         </p:txBody>
       </p:sp>
@@ -4339,7 +4426,7 @@
           <a:noFill/>
         </p:spPr>
         <p:txBody>
-          <a:bodyPr wrap="square" lIns="0" rIns="0" tIns="0" bIns="0" anchor="ctr">
+          <a:bodyPr wrap="square" lIns="0" tIns="0" rIns="0" bIns="0" anchor="ctr">
             <a:spAutoFit/>
           </a:bodyPr>
           <a:lstStyle/>
@@ -4401,6 +4488,7 @@
           <a:lstStyle/>
           <a:p>
             <a:pPr algn="ctr"/>
+            <a:endParaRPr/>
           </a:p>
         </p:txBody>
       </p:sp>
@@ -4421,7 +4509,7 @@
           <a:noFill/>
         </p:spPr>
         <p:txBody>
-          <a:bodyPr wrap="square" lIns="0" rIns="0" tIns="0" bIns="0" anchor="ctr">
+          <a:bodyPr wrap="square" lIns="0" tIns="0" rIns="0" bIns="0" anchor="ctr">
             <a:spAutoFit/>
           </a:bodyPr>
           <a:lstStyle/>
@@ -4456,7 +4544,7 @@
           <a:noFill/>
         </p:spPr>
         <p:txBody>
-          <a:bodyPr wrap="square" lIns="0" rIns="0" tIns="0" bIns="0" anchor="ctr">
+          <a:bodyPr wrap="square" lIns="0" tIns="0" rIns="0" bIns="0" anchor="ctr">
             <a:spAutoFit/>
           </a:bodyPr>
           <a:lstStyle/>
@@ -4514,6 +4602,7 @@
           <a:lstStyle/>
           <a:p>
             <a:pPr algn="ctr"/>
+            <a:endParaRPr/>
           </a:p>
         </p:txBody>
       </p:sp>
@@ -4557,6 +4646,7 @@
           <a:lstStyle/>
           <a:p>
             <a:pPr algn="ctr"/>
+            <a:endParaRPr/>
           </a:p>
         </p:txBody>
       </p:sp>
@@ -4577,7 +4667,7 @@
           <a:noFill/>
         </p:spPr>
         <p:txBody>
-          <a:bodyPr wrap="square" lIns="0" rIns="0" tIns="0" bIns="0" anchor="ctr">
+          <a:bodyPr wrap="square" lIns="0" tIns="0" rIns="0" bIns="0" anchor="ctr">
             <a:spAutoFit/>
           </a:bodyPr>
           <a:lstStyle/>
@@ -4612,7 +4702,7 @@
           <a:noFill/>
         </p:spPr>
         <p:txBody>
-          <a:bodyPr wrap="square" lIns="0" rIns="0" tIns="0" bIns="0" anchor="ctr">
+          <a:bodyPr wrap="square" lIns="0" tIns="0" rIns="0" bIns="0" anchor="ctr">
             <a:spAutoFit/>
           </a:bodyPr>
           <a:lstStyle/>
@@ -4639,7 +4729,7 @@
 </file>
 
 <file path=ppt/slides/slide11.xml><?xml version="1.0" encoding="utf-8"?>
-<p:sld xmlns:a="http://schemas.openxmlformats.org/drawingml/2006/main" xmlns:p="http://schemas.openxmlformats.org/presentationml/2006/main" xmlns:r="http://schemas.openxmlformats.org/officeDocument/2006/relationships">
+<p:sld xmlns:a="http://schemas.openxmlformats.org/drawingml/2006/main" xmlns:r="http://schemas.openxmlformats.org/officeDocument/2006/relationships" xmlns:p="http://schemas.openxmlformats.org/presentationml/2006/main">
   <p:cSld>
     <p:bg>
       <p:bgPr>
@@ -4655,7 +4745,14 @@
         <p:cNvGrpSpPr/>
         <p:nvPr/>
       </p:nvGrpSpPr>
-      <p:grpSpPr/>
+      <p:grpSpPr>
+        <a:xfrm>
+          <a:off x="0" y="0"/>
+          <a:ext cx="0" cy="0"/>
+          <a:chOff x="0" y="0"/>
+          <a:chExt cx="0" cy="0"/>
+        </a:xfrm>
+      </p:grpSpPr>
       <p:sp>
         <p:nvSpPr>
           <p:cNvPr id="2" name="Rectangle 1"/>
@@ -4696,6 +4793,7 @@
           <a:lstStyle/>
           <a:p>
             <a:pPr algn="ctr"/>
+            <a:endParaRPr/>
           </a:p>
         </p:txBody>
       </p:sp>
@@ -4716,7 +4814,7 @@
           <a:noFill/>
         </p:spPr>
         <p:txBody>
-          <a:bodyPr wrap="square" lIns="0" rIns="0" tIns="0" bIns="0" anchor="ctr">
+          <a:bodyPr wrap="square" lIns="0" tIns="0" rIns="0" bIns="0" anchor="ctr">
             <a:spAutoFit/>
           </a:bodyPr>
           <a:lstStyle/>
@@ -4751,7 +4849,7 @@
           <a:noFill/>
         </p:spPr>
         <p:txBody>
-          <a:bodyPr wrap="square" lIns="0" rIns="0" tIns="0" bIns="0" anchor="ctr">
+          <a:bodyPr wrap="square" lIns="0" tIns="0" rIns="0" bIns="0" anchor="ctr">
             <a:spAutoFit/>
           </a:bodyPr>
           <a:lstStyle/>
@@ -4786,7 +4884,7 @@
           <a:noFill/>
         </p:spPr>
         <p:txBody>
-          <a:bodyPr wrap="square" lIns="0" rIns="0" tIns="0" bIns="0" anchor="ctr">
+          <a:bodyPr wrap="square" lIns="0" tIns="0" rIns="0" bIns="0" anchor="ctr">
             <a:spAutoFit/>
           </a:bodyPr>
           <a:lstStyle/>
@@ -4844,6 +4942,7 @@
           <a:lstStyle/>
           <a:p>
             <a:pPr algn="ctr"/>
+            <a:endParaRPr/>
           </a:p>
         </p:txBody>
       </p:sp>
@@ -4864,7 +4963,7 @@
           <a:noFill/>
         </p:spPr>
         <p:txBody>
-          <a:bodyPr wrap="square" lIns="0" rIns="0" tIns="0" bIns="0" anchor="ctr">
+          <a:bodyPr wrap="square" lIns="0" tIns="0" rIns="0" bIns="0" anchor="ctr">
             <a:spAutoFit/>
           </a:bodyPr>
           <a:lstStyle/>
@@ -4899,7 +4998,7 @@
           <a:noFill/>
         </p:spPr>
         <p:txBody>
-          <a:bodyPr wrap="square" lIns="0" rIns="0" tIns="0" bIns="0" anchor="ctr">
+          <a:bodyPr wrap="square" lIns="0" tIns="0" rIns="0" bIns="0" anchor="ctr">
             <a:spAutoFit/>
           </a:bodyPr>
           <a:lstStyle/>
@@ -4961,6 +5060,7 @@
           <a:lstStyle/>
           <a:p>
             <a:pPr algn="ctr"/>
+            <a:endParaRPr/>
           </a:p>
         </p:txBody>
       </p:sp>
@@ -5028,6 +5128,7 @@
           <a:lstStyle/>
           <a:p>
             <a:pPr algn="ctr"/>
+            <a:endParaRPr/>
           </a:p>
         </p:txBody>
       </p:sp>
@@ -5071,6 +5172,7 @@
           <a:lstStyle/>
           <a:p>
             <a:pPr algn="ctr"/>
+            <a:endParaRPr/>
           </a:p>
         </p:txBody>
       </p:sp>
@@ -5091,7 +5193,7 @@
           <a:noFill/>
         </p:spPr>
         <p:txBody>
-          <a:bodyPr wrap="square" lIns="0" rIns="0" tIns="0" bIns="0" anchor="ctr">
+          <a:bodyPr wrap="square" lIns="0" tIns="0" rIns="0" bIns="0" anchor="ctr">
             <a:spAutoFit/>
           </a:bodyPr>
           <a:lstStyle/>
@@ -5126,7 +5228,7 @@
           <a:noFill/>
         </p:spPr>
         <p:txBody>
-          <a:bodyPr wrap="square" lIns="0" rIns="0" tIns="0" bIns="0" anchor="ctr">
+          <a:bodyPr wrap="square" lIns="0" tIns="0" rIns="0" bIns="0" anchor="ctr">
             <a:spAutoFit/>
           </a:bodyPr>
           <a:lstStyle/>
@@ -5153,7 +5255,7 @@
 </file>
 
 <file path=ppt/slides/slide12.xml><?xml version="1.0" encoding="utf-8"?>
-<p:sld xmlns:a="http://schemas.openxmlformats.org/drawingml/2006/main" xmlns:p="http://schemas.openxmlformats.org/presentationml/2006/main" xmlns:r="http://schemas.openxmlformats.org/officeDocument/2006/relationships">
+<p:sld xmlns:a="http://schemas.openxmlformats.org/drawingml/2006/main" xmlns:r="http://schemas.openxmlformats.org/officeDocument/2006/relationships" xmlns:p="http://schemas.openxmlformats.org/presentationml/2006/main">
   <p:cSld>
     <p:bg>
       <p:bgPr>
@@ -5169,7 +5271,14 @@
         <p:cNvGrpSpPr/>
         <p:nvPr/>
       </p:nvGrpSpPr>
-      <p:grpSpPr/>
+      <p:grpSpPr>
+        <a:xfrm>
+          <a:off x="0" y="0"/>
+          <a:ext cx="0" cy="0"/>
+          <a:chOff x="0" y="0"/>
+          <a:chExt cx="0" cy="0"/>
+        </a:xfrm>
+      </p:grpSpPr>
       <p:sp>
         <p:nvSpPr>
           <p:cNvPr id="2" name="Rectangle 1"/>
@@ -5210,6 +5319,7 @@
           <a:lstStyle/>
           <a:p>
             <a:pPr algn="ctr"/>
+            <a:endParaRPr/>
           </a:p>
         </p:txBody>
       </p:sp>
@@ -5230,7 +5340,7 @@
           <a:noFill/>
         </p:spPr>
         <p:txBody>
-          <a:bodyPr wrap="square" lIns="0" rIns="0" tIns="0" bIns="0" anchor="ctr">
+          <a:bodyPr wrap="square" lIns="0" tIns="0" rIns="0" bIns="0" anchor="ctr">
             <a:spAutoFit/>
           </a:bodyPr>
           <a:lstStyle/>
@@ -5265,7 +5375,7 @@
           <a:noFill/>
         </p:spPr>
         <p:txBody>
-          <a:bodyPr wrap="square" lIns="0" rIns="0" tIns="0" bIns="0" anchor="ctr">
+          <a:bodyPr wrap="square" lIns="0" tIns="0" rIns="0" bIns="0" anchor="ctr">
             <a:spAutoFit/>
           </a:bodyPr>
           <a:lstStyle/>
@@ -5300,7 +5410,7 @@
           <a:noFill/>
         </p:spPr>
         <p:txBody>
-          <a:bodyPr wrap="square" lIns="0" rIns="0" tIns="0" bIns="0" anchor="ctr">
+          <a:bodyPr wrap="square" lIns="0" tIns="0" rIns="0" bIns="0" anchor="ctr">
             <a:spAutoFit/>
           </a:bodyPr>
           <a:lstStyle/>
@@ -5358,6 +5468,7 @@
           <a:lstStyle/>
           <a:p>
             <a:pPr algn="ctr"/>
+            <a:endParaRPr/>
           </a:p>
         </p:txBody>
       </p:sp>
@@ -5378,7 +5489,7 @@
           <a:noFill/>
         </p:spPr>
         <p:txBody>
-          <a:bodyPr wrap="square" lIns="0" rIns="0" tIns="0" bIns="0" anchor="ctr">
+          <a:bodyPr wrap="square" lIns="0" tIns="0" rIns="0" bIns="0" anchor="ctr">
             <a:spAutoFit/>
           </a:bodyPr>
           <a:lstStyle/>
@@ -5413,7 +5524,7 @@
           <a:noFill/>
         </p:spPr>
         <p:txBody>
-          <a:bodyPr wrap="square" lIns="0" rIns="0" tIns="0" bIns="0" anchor="ctr">
+          <a:bodyPr wrap="square" lIns="0" tIns="0" rIns="0" bIns="0" anchor="ctr">
             <a:spAutoFit/>
           </a:bodyPr>
           <a:lstStyle/>
@@ -5475,6 +5586,7 @@
           <a:lstStyle/>
           <a:p>
             <a:pPr algn="ctr"/>
+            <a:endParaRPr/>
           </a:p>
         </p:txBody>
       </p:sp>
@@ -5546,6 +5658,7 @@
           <a:lstStyle/>
           <a:p>
             <a:pPr algn="ctr"/>
+            <a:endParaRPr/>
           </a:p>
         </p:txBody>
       </p:sp>
@@ -5589,6 +5702,7 @@
           <a:lstStyle/>
           <a:p>
             <a:pPr algn="ctr"/>
+            <a:endParaRPr/>
           </a:p>
         </p:txBody>
       </p:sp>
@@ -5609,7 +5723,7 @@
           <a:noFill/>
         </p:spPr>
         <p:txBody>
-          <a:bodyPr wrap="square" lIns="0" rIns="0" tIns="0" bIns="0" anchor="ctr">
+          <a:bodyPr wrap="square" lIns="0" tIns="0" rIns="0" bIns="0" anchor="ctr">
             <a:spAutoFit/>
           </a:bodyPr>
           <a:lstStyle/>
@@ -5636,30 +5750,147 @@
         <p:spPr>
           <a:xfrm>
             <a:off x="8275319" y="2487168"/>
-            <a:ext cx="3008376" cy="2468880"/>
-          </a:xfrm>
-          <a:prstGeom prst="rect">
-            <a:avLst/>
-          </a:prstGeom>
-          <a:noFill/>
-        </p:spPr>
-        <p:txBody>
-          <a:bodyPr wrap="square" lIns="0" rIns="0" tIns="0" bIns="0" anchor="t">
+            <a:ext cx="3008376" cy="1538883"/>
+          </a:xfrm>
+          <a:prstGeom prst="rect">
+            <a:avLst/>
+          </a:prstGeom>
+          <a:noFill/>
+        </p:spPr>
+        <p:txBody>
+          <a:bodyPr wrap="square" lIns="0" tIns="0" rIns="0" bIns="0" anchor="t">
             <a:spAutoFit/>
           </a:bodyPr>
           <a:lstStyle/>
           <a:p>
             <a:pPr algn="l"/>
             <a:r>
-              <a:rPr sz="1600" b="0">
+              <a:rPr sz="2000" b="0" dirty="0" err="1">
                 <a:solidFill>
                   <a:srgbClr val="15273B"/>
                 </a:solidFill>
                 <a:latin typeface="Aptos"/>
               </a:rPr>
-              <a:t>Melhor: 0,0001
+              <a:t>Melhor</a:t>
+            </a:r>
+            <a:r>
+              <a:rPr sz="2000" b="0" dirty="0">
+                <a:solidFill>
+                  <a:srgbClr val="15273B"/>
+                </a:solidFill>
+                <a:latin typeface="Aptos"/>
+              </a:rPr>
+              <a:t>: 0,0001
 MAE: US$ 2.377,48
-Taxas maiores elevaram o erro em até US$ 476,10.</a:t>
+</a:t>
+            </a:r>
+            <a:r>
+              <a:rPr sz="2000" b="0" dirty="0" err="1">
+                <a:solidFill>
+                  <a:srgbClr val="15273B"/>
+                </a:solidFill>
+                <a:latin typeface="Aptos"/>
+              </a:rPr>
+              <a:t>Taxas</a:t>
+            </a:r>
+            <a:r>
+              <a:rPr sz="2000" b="0" dirty="0">
+                <a:solidFill>
+                  <a:srgbClr val="15273B"/>
+                </a:solidFill>
+                <a:latin typeface="Aptos"/>
+              </a:rPr>
+              <a:t> </a:t>
+            </a:r>
+            <a:r>
+              <a:rPr sz="2000" b="0" dirty="0" err="1">
+                <a:solidFill>
+                  <a:srgbClr val="15273B"/>
+                </a:solidFill>
+                <a:latin typeface="Aptos"/>
+              </a:rPr>
+              <a:t>maiores</a:t>
+            </a:r>
+            <a:r>
+              <a:rPr sz="2000" b="0" dirty="0">
+                <a:solidFill>
+                  <a:srgbClr val="15273B"/>
+                </a:solidFill>
+                <a:latin typeface="Aptos"/>
+              </a:rPr>
+              <a:t> </a:t>
+            </a:r>
+            <a:r>
+              <a:rPr sz="2000" b="0" dirty="0" err="1">
+                <a:solidFill>
+                  <a:srgbClr val="15273B"/>
+                </a:solidFill>
+                <a:latin typeface="Aptos"/>
+              </a:rPr>
+              <a:t>elevaram</a:t>
+            </a:r>
+            <a:r>
+              <a:rPr sz="2000" b="0" dirty="0">
+                <a:solidFill>
+                  <a:srgbClr val="15273B"/>
+                </a:solidFill>
+                <a:latin typeface="Aptos"/>
+              </a:rPr>
+              <a:t> o </a:t>
+            </a:r>
+            <a:r>
+              <a:rPr sz="2000" b="0" dirty="0" err="1">
+                <a:solidFill>
+                  <a:srgbClr val="15273B"/>
+                </a:solidFill>
+                <a:latin typeface="Aptos"/>
+              </a:rPr>
+              <a:t>erro</a:t>
+            </a:r>
+            <a:r>
+              <a:rPr sz="2000" b="0" dirty="0">
+                <a:solidFill>
+                  <a:srgbClr val="15273B"/>
+                </a:solidFill>
+                <a:latin typeface="Aptos"/>
+              </a:rPr>
+              <a:t> </a:t>
+            </a:r>
+            <a:r>
+              <a:rPr sz="2000" b="0" dirty="0" err="1">
+                <a:solidFill>
+                  <a:srgbClr val="15273B"/>
+                </a:solidFill>
+                <a:latin typeface="Aptos"/>
+              </a:rPr>
+              <a:t>em</a:t>
+            </a:r>
+            <a:r>
+              <a:rPr sz="2000" b="0" dirty="0">
+                <a:solidFill>
+                  <a:srgbClr val="15273B"/>
+                </a:solidFill>
+                <a:latin typeface="Aptos"/>
+              </a:rPr>
+              <a:t> </a:t>
+            </a:r>
+            <a:r>
+              <a:rPr sz="2000" b="0" dirty="0" err="1">
+                <a:solidFill>
+                  <a:srgbClr val="15273B"/>
+                </a:solidFill>
+                <a:latin typeface="Aptos"/>
+              </a:rPr>
+              <a:t>até</a:t>
+            </a:r>
+            <a:r>
+              <a:rPr sz="2000" b="0" dirty="0">
+                <a:solidFill>
+                  <a:srgbClr val="15273B"/>
+                </a:solidFill>
+                <a:latin typeface="Aptos"/>
+              </a:rPr>
+              <a:t> US$ 476,10.</a:t>
             </a:r>
           </a:p>
         </p:txBody>
@@ -5704,6 +5935,7 @@
           <a:lstStyle/>
           <a:p>
             <a:pPr algn="ctr"/>
+            <a:endParaRPr/>
           </a:p>
         </p:txBody>
       </p:sp>
@@ -5747,6 +5979,7 @@
           <a:lstStyle/>
           <a:p>
             <a:pPr algn="ctr"/>
+            <a:endParaRPr/>
           </a:p>
         </p:txBody>
       </p:sp>
@@ -5767,7 +6000,7 @@
           <a:noFill/>
         </p:spPr>
         <p:txBody>
-          <a:bodyPr wrap="square" lIns="0" rIns="0" tIns="0" bIns="0" anchor="ctr">
+          <a:bodyPr wrap="square" lIns="0" tIns="0" rIns="0" bIns="0" anchor="ctr">
             <a:spAutoFit/>
           </a:bodyPr>
           <a:lstStyle/>
@@ -5802,7 +6035,7 @@
           <a:noFill/>
         </p:spPr>
         <p:txBody>
-          <a:bodyPr wrap="square" lIns="0" rIns="0" tIns="0" bIns="0" anchor="ctr">
+          <a:bodyPr wrap="square" lIns="0" tIns="0" rIns="0" bIns="0" anchor="ctr">
             <a:spAutoFit/>
           </a:bodyPr>
           <a:lstStyle/>
@@ -5829,7 +6062,7 @@
 </file>
 
 <file path=ppt/slides/slide13.xml><?xml version="1.0" encoding="utf-8"?>
-<p:sld xmlns:a="http://schemas.openxmlformats.org/drawingml/2006/main" xmlns:p="http://schemas.openxmlformats.org/presentationml/2006/main" xmlns:r="http://schemas.openxmlformats.org/officeDocument/2006/relationships">
+<p:sld xmlns:a="http://schemas.openxmlformats.org/drawingml/2006/main" xmlns:r="http://schemas.openxmlformats.org/officeDocument/2006/relationships" xmlns:p="http://schemas.openxmlformats.org/presentationml/2006/main">
   <p:cSld>
     <p:bg>
       <p:bgPr>
@@ -5845,7 +6078,14 @@
         <p:cNvGrpSpPr/>
         <p:nvPr/>
       </p:nvGrpSpPr>
-      <p:grpSpPr/>
+      <p:grpSpPr>
+        <a:xfrm>
+          <a:off x="0" y="0"/>
+          <a:ext cx="0" cy="0"/>
+          <a:chOff x="0" y="0"/>
+          <a:chExt cx="0" cy="0"/>
+        </a:xfrm>
+      </p:grpSpPr>
       <p:sp>
         <p:nvSpPr>
           <p:cNvPr id="2" name="Rectangle 1"/>
@@ -5886,6 +6126,7 @@
           <a:lstStyle/>
           <a:p>
             <a:pPr algn="ctr"/>
+            <a:endParaRPr/>
           </a:p>
         </p:txBody>
       </p:sp>
@@ -5906,7 +6147,7 @@
           <a:noFill/>
         </p:spPr>
         <p:txBody>
-          <a:bodyPr wrap="square" lIns="0" rIns="0" tIns="0" bIns="0" anchor="ctr">
+          <a:bodyPr wrap="square" lIns="0" tIns="0" rIns="0" bIns="0" anchor="ctr">
             <a:spAutoFit/>
           </a:bodyPr>
           <a:lstStyle/>
@@ -5941,7 +6182,7 @@
           <a:noFill/>
         </p:spPr>
         <p:txBody>
-          <a:bodyPr wrap="square" lIns="0" rIns="0" tIns="0" bIns="0" anchor="ctr">
+          <a:bodyPr wrap="square" lIns="0" tIns="0" rIns="0" bIns="0" anchor="ctr">
             <a:spAutoFit/>
           </a:bodyPr>
           <a:lstStyle/>
@@ -5976,7 +6217,7 @@
           <a:noFill/>
         </p:spPr>
         <p:txBody>
-          <a:bodyPr wrap="square" lIns="0" rIns="0" tIns="0" bIns="0" anchor="ctr">
+          <a:bodyPr wrap="square" lIns="0" tIns="0" rIns="0" bIns="0" anchor="ctr">
             <a:spAutoFit/>
           </a:bodyPr>
           <a:lstStyle/>
@@ -6034,6 +6275,7 @@
           <a:lstStyle/>
           <a:p>
             <a:pPr algn="ctr"/>
+            <a:endParaRPr/>
           </a:p>
         </p:txBody>
       </p:sp>
@@ -6054,7 +6296,7 @@
           <a:noFill/>
         </p:spPr>
         <p:txBody>
-          <a:bodyPr wrap="square" lIns="0" rIns="0" tIns="0" bIns="0" anchor="ctr">
+          <a:bodyPr wrap="square" lIns="0" tIns="0" rIns="0" bIns="0" anchor="ctr">
             <a:spAutoFit/>
           </a:bodyPr>
           <a:lstStyle/>
@@ -6089,7 +6331,7 @@
           <a:noFill/>
         </p:spPr>
         <p:txBody>
-          <a:bodyPr wrap="square" lIns="0" rIns="0" tIns="0" bIns="0" anchor="ctr">
+          <a:bodyPr wrap="square" lIns="0" tIns="0" rIns="0" bIns="0" anchor="ctr">
             <a:spAutoFit/>
           </a:bodyPr>
           <a:lstStyle/>
@@ -6151,6 +6393,7 @@
           <a:lstStyle/>
           <a:p>
             <a:pPr algn="ctr"/>
+            <a:endParaRPr/>
           </a:p>
         </p:txBody>
       </p:sp>
@@ -6218,6 +6461,7 @@
           <a:lstStyle/>
           <a:p>
             <a:pPr algn="ctr"/>
+            <a:endParaRPr/>
           </a:p>
         </p:txBody>
       </p:sp>
@@ -6261,6 +6505,7 @@
           <a:lstStyle/>
           <a:p>
             <a:pPr algn="ctr"/>
+            <a:endParaRPr/>
           </a:p>
         </p:txBody>
       </p:sp>
@@ -6281,7 +6526,7 @@
           <a:noFill/>
         </p:spPr>
         <p:txBody>
-          <a:bodyPr wrap="square" lIns="0" rIns="0" tIns="0" bIns="0" anchor="ctr">
+          <a:bodyPr wrap="square" lIns="0" tIns="0" rIns="0" bIns="0" anchor="ctr">
             <a:spAutoFit/>
           </a:bodyPr>
           <a:lstStyle/>
@@ -6316,7 +6561,7 @@
           <a:noFill/>
         </p:spPr>
         <p:txBody>
-          <a:bodyPr wrap="square" lIns="0" rIns="0" tIns="0" bIns="0" anchor="ctr">
+          <a:bodyPr wrap="square" lIns="0" tIns="0" rIns="0" bIns="0" anchor="ctr">
             <a:spAutoFit/>
           </a:bodyPr>
           <a:lstStyle/>
@@ -6343,7 +6588,7 @@
 </file>
 
 <file path=ppt/slides/slide14.xml><?xml version="1.0" encoding="utf-8"?>
-<p:sld xmlns:a="http://schemas.openxmlformats.org/drawingml/2006/main" xmlns:p="http://schemas.openxmlformats.org/presentationml/2006/main" xmlns:r="http://schemas.openxmlformats.org/officeDocument/2006/relationships">
+<p:sld xmlns:a="http://schemas.openxmlformats.org/drawingml/2006/main" xmlns:r="http://schemas.openxmlformats.org/officeDocument/2006/relationships" xmlns:p="http://schemas.openxmlformats.org/presentationml/2006/main">
   <p:cSld>
     <p:bg>
       <p:bgPr>
@@ -6359,7 +6604,14 @@
         <p:cNvGrpSpPr/>
         <p:nvPr/>
       </p:nvGrpSpPr>
-      <p:grpSpPr/>
+      <p:grpSpPr>
+        <a:xfrm>
+          <a:off x="0" y="0"/>
+          <a:ext cx="0" cy="0"/>
+          <a:chOff x="0" y="0"/>
+          <a:chExt cx="0" cy="0"/>
+        </a:xfrm>
+      </p:grpSpPr>
       <p:sp>
         <p:nvSpPr>
           <p:cNvPr id="2" name="Rectangle 1"/>
@@ -6400,6 +6652,7 @@
           <a:lstStyle/>
           <a:p>
             <a:pPr algn="ctr"/>
+            <a:endParaRPr/>
           </a:p>
         </p:txBody>
       </p:sp>
@@ -6420,7 +6673,7 @@
           <a:noFill/>
         </p:spPr>
         <p:txBody>
-          <a:bodyPr wrap="square" lIns="0" rIns="0" tIns="0" bIns="0" anchor="ctr">
+          <a:bodyPr wrap="square" lIns="0" tIns="0" rIns="0" bIns="0" anchor="ctr">
             <a:spAutoFit/>
           </a:bodyPr>
           <a:lstStyle/>
@@ -6455,7 +6708,7 @@
           <a:noFill/>
         </p:spPr>
         <p:txBody>
-          <a:bodyPr wrap="square" lIns="0" rIns="0" tIns="0" bIns="0" anchor="ctr">
+          <a:bodyPr wrap="square" lIns="0" tIns="0" rIns="0" bIns="0" anchor="ctr">
             <a:spAutoFit/>
           </a:bodyPr>
           <a:lstStyle/>
@@ -6490,7 +6743,7 @@
           <a:noFill/>
         </p:spPr>
         <p:txBody>
-          <a:bodyPr wrap="square" lIns="0" rIns="0" tIns="0" bIns="0" anchor="ctr">
+          <a:bodyPr wrap="square" lIns="0" tIns="0" rIns="0" bIns="0" anchor="ctr">
             <a:spAutoFit/>
           </a:bodyPr>
           <a:lstStyle/>
@@ -6548,6 +6801,7 @@
           <a:lstStyle/>
           <a:p>
             <a:pPr algn="ctr"/>
+            <a:endParaRPr/>
           </a:p>
         </p:txBody>
       </p:sp>
@@ -6568,7 +6822,7 @@
           <a:noFill/>
         </p:spPr>
         <p:txBody>
-          <a:bodyPr wrap="square" lIns="0" rIns="0" tIns="0" bIns="0" anchor="ctr">
+          <a:bodyPr wrap="square" lIns="0" tIns="0" rIns="0" bIns="0" anchor="ctr">
             <a:spAutoFit/>
           </a:bodyPr>
           <a:lstStyle/>
@@ -6603,7 +6857,7 @@
           <a:noFill/>
         </p:spPr>
         <p:txBody>
-          <a:bodyPr wrap="square" lIns="0" rIns="0" tIns="0" bIns="0" anchor="ctr">
+          <a:bodyPr wrap="square" lIns="0" tIns="0" rIns="0" bIns="0" anchor="ctr">
             <a:spAutoFit/>
           </a:bodyPr>
           <a:lstStyle/>
@@ -6665,6 +6919,7 @@
           <a:lstStyle/>
           <a:p>
             <a:pPr algn="ctr"/>
+            <a:endParaRPr/>
           </a:p>
         </p:txBody>
       </p:sp>
@@ -6732,6 +6987,7 @@
           <a:lstStyle/>
           <a:p>
             <a:pPr algn="ctr"/>
+            <a:endParaRPr/>
           </a:p>
         </p:txBody>
       </p:sp>
@@ -6775,6 +7031,7 @@
           <a:lstStyle/>
           <a:p>
             <a:pPr algn="ctr"/>
+            <a:endParaRPr/>
           </a:p>
         </p:txBody>
       </p:sp>
@@ -6795,7 +7052,7 @@
           <a:noFill/>
         </p:spPr>
         <p:txBody>
-          <a:bodyPr wrap="square" lIns="0" rIns="0" tIns="0" bIns="0" anchor="ctr">
+          <a:bodyPr wrap="square" lIns="0" tIns="0" rIns="0" bIns="0" anchor="ctr">
             <a:spAutoFit/>
           </a:bodyPr>
           <a:lstStyle/>
@@ -6830,7 +7087,7 @@
           <a:noFill/>
         </p:spPr>
         <p:txBody>
-          <a:bodyPr wrap="square" lIns="0" rIns="0" tIns="0" bIns="0" anchor="ctr">
+          <a:bodyPr wrap="square" lIns="0" tIns="0" rIns="0" bIns="0" anchor="ctr">
             <a:spAutoFit/>
           </a:bodyPr>
           <a:lstStyle/>
@@ -6857,7 +7114,7 @@
 </file>
 
 <file path=ppt/slides/slide15.xml><?xml version="1.0" encoding="utf-8"?>
-<p:sld xmlns:a="http://schemas.openxmlformats.org/drawingml/2006/main" xmlns:p="http://schemas.openxmlformats.org/presentationml/2006/main" xmlns:r="http://schemas.openxmlformats.org/officeDocument/2006/relationships">
+<p:sld xmlns:a="http://schemas.openxmlformats.org/drawingml/2006/main" xmlns:r="http://schemas.openxmlformats.org/officeDocument/2006/relationships" xmlns:p="http://schemas.openxmlformats.org/presentationml/2006/main">
   <p:cSld>
     <p:bg>
       <p:bgPr>
@@ -6873,7 +7130,14 @@
         <p:cNvGrpSpPr/>
         <p:nvPr/>
       </p:nvGrpSpPr>
-      <p:grpSpPr/>
+      <p:grpSpPr>
+        <a:xfrm>
+          <a:off x="0" y="0"/>
+          <a:ext cx="0" cy="0"/>
+          <a:chOff x="0" y="0"/>
+          <a:chExt cx="0" cy="0"/>
+        </a:xfrm>
+      </p:grpSpPr>
       <p:sp>
         <p:nvSpPr>
           <p:cNvPr id="2" name="Rectangle 1"/>
@@ -6914,6 +7178,7 @@
           <a:lstStyle/>
           <a:p>
             <a:pPr algn="ctr"/>
+            <a:endParaRPr/>
           </a:p>
         </p:txBody>
       </p:sp>
@@ -6934,7 +7199,7 @@
           <a:noFill/>
         </p:spPr>
         <p:txBody>
-          <a:bodyPr wrap="square" lIns="0" rIns="0" tIns="0" bIns="0" anchor="ctr">
+          <a:bodyPr wrap="square" lIns="0" tIns="0" rIns="0" bIns="0" anchor="ctr">
             <a:spAutoFit/>
           </a:bodyPr>
           <a:lstStyle/>
@@ -6969,7 +7234,7 @@
           <a:noFill/>
         </p:spPr>
         <p:txBody>
-          <a:bodyPr wrap="square" lIns="0" rIns="0" tIns="0" bIns="0" anchor="ctr">
+          <a:bodyPr wrap="square" lIns="0" tIns="0" rIns="0" bIns="0" anchor="ctr">
             <a:spAutoFit/>
           </a:bodyPr>
           <a:lstStyle/>
@@ -7004,7 +7269,7 @@
           <a:noFill/>
         </p:spPr>
         <p:txBody>
-          <a:bodyPr wrap="square" lIns="0" rIns="0" tIns="0" bIns="0" anchor="ctr">
+          <a:bodyPr wrap="square" lIns="0" tIns="0" rIns="0" bIns="0" anchor="ctr">
             <a:spAutoFit/>
           </a:bodyPr>
           <a:lstStyle/>
@@ -7062,6 +7327,7 @@
           <a:lstStyle/>
           <a:p>
             <a:pPr algn="ctr"/>
+            <a:endParaRPr/>
           </a:p>
         </p:txBody>
       </p:sp>
@@ -7082,7 +7348,7 @@
           <a:noFill/>
         </p:spPr>
         <p:txBody>
-          <a:bodyPr wrap="square" lIns="0" rIns="0" tIns="0" bIns="0" anchor="ctr">
+          <a:bodyPr wrap="square" lIns="0" tIns="0" rIns="0" bIns="0" anchor="ctr">
             <a:spAutoFit/>
           </a:bodyPr>
           <a:lstStyle/>
@@ -7117,7 +7383,7 @@
           <a:noFill/>
         </p:spPr>
         <p:txBody>
-          <a:bodyPr wrap="square" lIns="0" rIns="0" tIns="0" bIns="0" anchor="ctr">
+          <a:bodyPr wrap="square" lIns="0" tIns="0" rIns="0" bIns="0" anchor="ctr">
             <a:spAutoFit/>
           </a:bodyPr>
           <a:lstStyle/>
@@ -7179,6 +7445,7 @@
           <a:lstStyle/>
           <a:p>
             <a:pPr algn="ctr"/>
+            <a:endParaRPr/>
           </a:p>
         </p:txBody>
       </p:sp>
@@ -7246,6 +7513,7 @@
           <a:lstStyle/>
           <a:p>
             <a:pPr algn="ctr"/>
+            <a:endParaRPr/>
           </a:p>
         </p:txBody>
       </p:sp>
@@ -7289,6 +7557,7 @@
           <a:lstStyle/>
           <a:p>
             <a:pPr algn="ctr"/>
+            <a:endParaRPr/>
           </a:p>
         </p:txBody>
       </p:sp>
@@ -7309,7 +7578,7 @@
           <a:noFill/>
         </p:spPr>
         <p:txBody>
-          <a:bodyPr wrap="square" lIns="0" rIns="0" tIns="0" bIns="0" anchor="ctr">
+          <a:bodyPr wrap="square" lIns="0" tIns="0" rIns="0" bIns="0" anchor="ctr">
             <a:spAutoFit/>
           </a:bodyPr>
           <a:lstStyle/>
@@ -7344,7 +7613,7 @@
           <a:noFill/>
         </p:spPr>
         <p:txBody>
-          <a:bodyPr wrap="square" lIns="0" rIns="0" tIns="0" bIns="0" anchor="ctr">
+          <a:bodyPr wrap="square" lIns="0" tIns="0" rIns="0" bIns="0" anchor="ctr">
             <a:spAutoFit/>
           </a:bodyPr>
           <a:lstStyle/>
@@ -7371,7 +7640,7 @@
 </file>
 
 <file path=ppt/slides/slide16.xml><?xml version="1.0" encoding="utf-8"?>
-<p:sld xmlns:a="http://schemas.openxmlformats.org/drawingml/2006/main" xmlns:p="http://schemas.openxmlformats.org/presentationml/2006/main" xmlns:r="http://schemas.openxmlformats.org/officeDocument/2006/relationships">
+<p:sld xmlns:a="http://schemas.openxmlformats.org/drawingml/2006/main" xmlns:r="http://schemas.openxmlformats.org/officeDocument/2006/relationships" xmlns:p="http://schemas.openxmlformats.org/presentationml/2006/main">
   <p:cSld>
     <p:bg>
       <p:bgPr>
@@ -7387,7 +7656,14 @@
         <p:cNvGrpSpPr/>
         <p:nvPr/>
       </p:nvGrpSpPr>
-      <p:grpSpPr/>
+      <p:grpSpPr>
+        <a:xfrm>
+          <a:off x="0" y="0"/>
+          <a:ext cx="0" cy="0"/>
+          <a:chOff x="0" y="0"/>
+          <a:chExt cx="0" cy="0"/>
+        </a:xfrm>
+      </p:grpSpPr>
       <p:sp>
         <p:nvSpPr>
           <p:cNvPr id="2" name="Rectangle 1"/>
@@ -7428,6 +7704,7 @@
           <a:lstStyle/>
           <a:p>
             <a:pPr algn="ctr"/>
+            <a:endParaRPr/>
           </a:p>
         </p:txBody>
       </p:sp>
@@ -7448,7 +7725,7 @@
           <a:noFill/>
         </p:spPr>
         <p:txBody>
-          <a:bodyPr wrap="square" lIns="0" rIns="0" tIns="0" bIns="0" anchor="ctr">
+          <a:bodyPr wrap="square" lIns="0" tIns="0" rIns="0" bIns="0" anchor="ctr">
             <a:spAutoFit/>
           </a:bodyPr>
           <a:lstStyle/>
@@ -7483,7 +7760,7 @@
           <a:noFill/>
         </p:spPr>
         <p:txBody>
-          <a:bodyPr wrap="square" lIns="0" rIns="0" tIns="0" bIns="0" anchor="ctr">
+          <a:bodyPr wrap="square" lIns="0" tIns="0" rIns="0" bIns="0" anchor="ctr">
             <a:spAutoFit/>
           </a:bodyPr>
           <a:lstStyle/>
@@ -7518,7 +7795,7 @@
           <a:noFill/>
         </p:spPr>
         <p:txBody>
-          <a:bodyPr wrap="square" lIns="0" rIns="0" tIns="0" bIns="0" anchor="ctr">
+          <a:bodyPr wrap="square" lIns="0" tIns="0" rIns="0" bIns="0" anchor="ctr">
             <a:spAutoFit/>
           </a:bodyPr>
           <a:lstStyle/>
@@ -7576,6 +7853,7 @@
           <a:lstStyle/>
           <a:p>
             <a:pPr algn="ctr"/>
+            <a:endParaRPr/>
           </a:p>
         </p:txBody>
       </p:sp>
@@ -7596,7 +7874,7 @@
           <a:noFill/>
         </p:spPr>
         <p:txBody>
-          <a:bodyPr wrap="square" lIns="0" rIns="0" tIns="0" bIns="0" anchor="ctr">
+          <a:bodyPr wrap="square" lIns="0" tIns="0" rIns="0" bIns="0" anchor="ctr">
             <a:spAutoFit/>
           </a:bodyPr>
           <a:lstStyle/>
@@ -7631,7 +7909,7 @@
           <a:noFill/>
         </p:spPr>
         <p:txBody>
-          <a:bodyPr wrap="square" lIns="0" rIns="0" tIns="0" bIns="0" anchor="ctr">
+          <a:bodyPr wrap="square" lIns="0" tIns="0" rIns="0" bIns="0" anchor="ctr">
             <a:spAutoFit/>
           </a:bodyPr>
           <a:lstStyle/>
@@ -7693,6 +7971,7 @@
           <a:lstStyle/>
           <a:p>
             <a:pPr algn="ctr"/>
+            <a:endParaRPr/>
           </a:p>
         </p:txBody>
       </p:sp>
@@ -7736,6 +8015,7 @@
           <a:lstStyle/>
           <a:p>
             <a:pPr algn="ctr"/>
+            <a:endParaRPr/>
           </a:p>
         </p:txBody>
       </p:sp>
@@ -7756,7 +8036,7 @@
           <a:noFill/>
         </p:spPr>
         <p:txBody>
-          <a:bodyPr wrap="square" lIns="0" rIns="0" tIns="0" bIns="0" anchor="ctr">
+          <a:bodyPr wrap="square" lIns="0" tIns="0" rIns="0" bIns="0" anchor="ctr">
             <a:spAutoFit/>
           </a:bodyPr>
           <a:lstStyle/>
@@ -7791,7 +8071,7 @@
           <a:noFill/>
         </p:spPr>
         <p:txBody>
-          <a:bodyPr wrap="square" lIns="0" rIns="0" tIns="0" bIns="0" anchor="t">
+          <a:bodyPr wrap="square" lIns="0" tIns="0" rIns="0" bIns="0" anchor="t">
             <a:spAutoFit/>
           </a:bodyPr>
           <a:lstStyle/>
@@ -7856,6 +8136,7 @@
           <a:lstStyle/>
           <a:p>
             <a:pPr algn="ctr"/>
+            <a:endParaRPr/>
           </a:p>
         </p:txBody>
       </p:sp>
@@ -7899,6 +8180,7 @@
           <a:lstStyle/>
           <a:p>
             <a:pPr algn="ctr"/>
+            <a:endParaRPr/>
           </a:p>
         </p:txBody>
       </p:sp>
@@ -7919,7 +8201,7 @@
           <a:noFill/>
         </p:spPr>
         <p:txBody>
-          <a:bodyPr wrap="square" lIns="0" rIns="0" tIns="0" bIns="0" anchor="ctr">
+          <a:bodyPr wrap="square" lIns="0" tIns="0" rIns="0" bIns="0" anchor="ctr">
             <a:spAutoFit/>
           </a:bodyPr>
           <a:lstStyle/>
@@ -7954,7 +8236,7 @@
           <a:noFill/>
         </p:spPr>
         <p:txBody>
-          <a:bodyPr wrap="square" lIns="0" rIns="0" tIns="0" bIns="0" anchor="t">
+          <a:bodyPr wrap="square" lIns="0" tIns="0" rIns="0" bIns="0" anchor="t">
             <a:spAutoFit/>
           </a:bodyPr>
           <a:lstStyle/>
@@ -8014,6 +8296,7 @@
           <a:lstStyle/>
           <a:p>
             <a:pPr algn="ctr"/>
+            <a:endParaRPr/>
           </a:p>
         </p:txBody>
       </p:sp>
@@ -8057,6 +8340,7 @@
           <a:lstStyle/>
           <a:p>
             <a:pPr algn="ctr"/>
+            <a:endParaRPr/>
           </a:p>
         </p:txBody>
       </p:sp>
@@ -8077,7 +8361,7 @@
           <a:noFill/>
         </p:spPr>
         <p:txBody>
-          <a:bodyPr wrap="square" lIns="0" rIns="0" tIns="0" bIns="0" anchor="ctr">
+          <a:bodyPr wrap="square" lIns="0" tIns="0" rIns="0" bIns="0" anchor="ctr">
             <a:spAutoFit/>
           </a:bodyPr>
           <a:lstStyle/>
@@ -8112,7 +8396,7 @@
           <a:noFill/>
         </p:spPr>
         <p:txBody>
-          <a:bodyPr wrap="square" lIns="0" rIns="0" tIns="0" bIns="0" anchor="ctr">
+          <a:bodyPr wrap="square" lIns="0" tIns="0" rIns="0" bIns="0" anchor="ctr">
             <a:spAutoFit/>
           </a:bodyPr>
           <a:lstStyle/>
@@ -8139,7 +8423,7 @@
 </file>
 
 <file path=ppt/slides/slide17.xml><?xml version="1.0" encoding="utf-8"?>
-<p:sld xmlns:a="http://schemas.openxmlformats.org/drawingml/2006/main" xmlns:p="http://schemas.openxmlformats.org/presentationml/2006/main" xmlns:r="http://schemas.openxmlformats.org/officeDocument/2006/relationships">
+<p:sld xmlns:a="http://schemas.openxmlformats.org/drawingml/2006/main" xmlns:r="http://schemas.openxmlformats.org/officeDocument/2006/relationships" xmlns:p="http://schemas.openxmlformats.org/presentationml/2006/main">
   <p:cSld>
     <p:bg>
       <p:bgPr>
@@ -8155,7 +8439,14 @@
         <p:cNvGrpSpPr/>
         <p:nvPr/>
       </p:nvGrpSpPr>
-      <p:grpSpPr/>
+      <p:grpSpPr>
+        <a:xfrm>
+          <a:off x="0" y="0"/>
+          <a:ext cx="0" cy="0"/>
+          <a:chOff x="0" y="0"/>
+          <a:chExt cx="0" cy="0"/>
+        </a:xfrm>
+      </p:grpSpPr>
       <p:sp>
         <p:nvSpPr>
           <p:cNvPr id="2" name="Rectangle 1"/>
@@ -8196,6 +8487,7 @@
           <a:lstStyle/>
           <a:p>
             <a:pPr algn="ctr"/>
+            <a:endParaRPr/>
           </a:p>
         </p:txBody>
       </p:sp>
@@ -8216,7 +8508,7 @@
           <a:noFill/>
         </p:spPr>
         <p:txBody>
-          <a:bodyPr wrap="square" lIns="0" rIns="0" tIns="0" bIns="0" anchor="ctr">
+          <a:bodyPr wrap="square" lIns="0" tIns="0" rIns="0" bIns="0" anchor="ctr">
             <a:spAutoFit/>
           </a:bodyPr>
           <a:lstStyle/>
@@ -8251,7 +8543,7 @@
           <a:noFill/>
         </p:spPr>
         <p:txBody>
-          <a:bodyPr wrap="square" lIns="0" rIns="0" tIns="0" bIns="0" anchor="ctr">
+          <a:bodyPr wrap="square" lIns="0" tIns="0" rIns="0" bIns="0" anchor="ctr">
             <a:spAutoFit/>
           </a:bodyPr>
           <a:lstStyle/>
@@ -8286,7 +8578,7 @@
           <a:noFill/>
         </p:spPr>
         <p:txBody>
-          <a:bodyPr wrap="square" lIns="0" rIns="0" tIns="0" bIns="0" anchor="ctr">
+          <a:bodyPr wrap="square" lIns="0" tIns="0" rIns="0" bIns="0" anchor="ctr">
             <a:spAutoFit/>
           </a:bodyPr>
           <a:lstStyle/>
@@ -8344,6 +8636,7 @@
           <a:lstStyle/>
           <a:p>
             <a:pPr algn="ctr"/>
+            <a:endParaRPr/>
           </a:p>
         </p:txBody>
       </p:sp>
@@ -8364,7 +8657,7 @@
           <a:noFill/>
         </p:spPr>
         <p:txBody>
-          <a:bodyPr wrap="square" lIns="0" rIns="0" tIns="0" bIns="0" anchor="ctr">
+          <a:bodyPr wrap="square" lIns="0" tIns="0" rIns="0" bIns="0" anchor="ctr">
             <a:spAutoFit/>
           </a:bodyPr>
           <a:lstStyle/>
@@ -8399,7 +8692,7 @@
           <a:noFill/>
         </p:spPr>
         <p:txBody>
-          <a:bodyPr wrap="square" lIns="0" rIns="0" tIns="0" bIns="0" anchor="ctr">
+          <a:bodyPr wrap="square" lIns="0" tIns="0" rIns="0" bIns="0" anchor="ctr">
             <a:spAutoFit/>
           </a:bodyPr>
           <a:lstStyle/>
@@ -8461,6 +8754,7 @@
           <a:lstStyle/>
           <a:p>
             <a:pPr algn="ctr"/>
+            <a:endParaRPr/>
           </a:p>
         </p:txBody>
       </p:sp>
@@ -8481,7 +8775,7 @@
           <a:noFill/>
         </p:spPr>
         <p:txBody>
-          <a:bodyPr wrap="square" lIns="0" rIns="0" tIns="0" bIns="0" anchor="ctr">
+          <a:bodyPr wrap="square" lIns="0" tIns="0" rIns="0" bIns="0" anchor="ctr">
             <a:spAutoFit/>
           </a:bodyPr>
           <a:lstStyle/>
@@ -8516,7 +8810,7 @@
           <a:noFill/>
         </p:spPr>
         <p:txBody>
-          <a:bodyPr wrap="square" lIns="0" rIns="0" tIns="0" bIns="0" anchor="ctr">
+          <a:bodyPr wrap="square" lIns="0" tIns="0" rIns="0" bIns="0" anchor="ctr">
             <a:spAutoFit/>
           </a:bodyPr>
           <a:lstStyle/>
@@ -8551,7 +8845,7 @@
           <a:noFill/>
         </p:spPr>
         <p:txBody>
-          <a:bodyPr wrap="square" lIns="0" rIns="0" tIns="0" bIns="0" anchor="ctr">
+          <a:bodyPr wrap="square" lIns="0" tIns="0" rIns="0" bIns="0" anchor="ctr">
             <a:spAutoFit/>
           </a:bodyPr>
           <a:lstStyle/>
@@ -8613,6 +8907,7 @@
           <a:lstStyle/>
           <a:p>
             <a:pPr algn="ctr"/>
+            <a:endParaRPr/>
           </a:p>
         </p:txBody>
       </p:sp>
@@ -8633,7 +8928,7 @@
           <a:noFill/>
         </p:spPr>
         <p:txBody>
-          <a:bodyPr wrap="square" lIns="0" rIns="0" tIns="0" bIns="0" anchor="ctr">
+          <a:bodyPr wrap="square" lIns="0" tIns="0" rIns="0" bIns="0" anchor="ctr">
             <a:spAutoFit/>
           </a:bodyPr>
           <a:lstStyle/>
@@ -8668,7 +8963,7 @@
           <a:noFill/>
         </p:spPr>
         <p:txBody>
-          <a:bodyPr wrap="square" lIns="0" rIns="0" tIns="0" bIns="0" anchor="ctr">
+          <a:bodyPr wrap="square" lIns="0" tIns="0" rIns="0" bIns="0" anchor="ctr">
             <a:spAutoFit/>
           </a:bodyPr>
           <a:lstStyle/>
@@ -8703,7 +8998,7 @@
           <a:noFill/>
         </p:spPr>
         <p:txBody>
-          <a:bodyPr wrap="square" lIns="0" rIns="0" tIns="0" bIns="0" anchor="ctr">
+          <a:bodyPr wrap="square" lIns="0" tIns="0" rIns="0" bIns="0" anchor="ctr">
             <a:spAutoFit/>
           </a:bodyPr>
           <a:lstStyle/>
@@ -8765,6 +9060,7 @@
           <a:lstStyle/>
           <a:p>
             <a:pPr algn="ctr"/>
+            <a:endParaRPr/>
           </a:p>
         </p:txBody>
       </p:sp>
@@ -8785,7 +9081,7 @@
           <a:noFill/>
         </p:spPr>
         <p:txBody>
-          <a:bodyPr wrap="square" lIns="0" rIns="0" tIns="0" bIns="0" anchor="ctr">
+          <a:bodyPr wrap="square" lIns="0" tIns="0" rIns="0" bIns="0" anchor="ctr">
             <a:spAutoFit/>
           </a:bodyPr>
           <a:lstStyle/>
@@ -8820,7 +9116,7 @@
           <a:noFill/>
         </p:spPr>
         <p:txBody>
-          <a:bodyPr wrap="square" lIns="0" rIns="0" tIns="0" bIns="0" anchor="ctr">
+          <a:bodyPr wrap="square" lIns="0" tIns="0" rIns="0" bIns="0" anchor="ctr">
             <a:spAutoFit/>
           </a:bodyPr>
           <a:lstStyle/>
@@ -8855,7 +9151,7 @@
           <a:noFill/>
         </p:spPr>
         <p:txBody>
-          <a:bodyPr wrap="square" lIns="0" rIns="0" tIns="0" bIns="0" anchor="ctr">
+          <a:bodyPr wrap="square" lIns="0" tIns="0" rIns="0" bIns="0" anchor="ctr">
             <a:spAutoFit/>
           </a:bodyPr>
           <a:lstStyle/>
@@ -8917,6 +9213,7 @@
           <a:lstStyle/>
           <a:p>
             <a:pPr algn="ctr"/>
+            <a:endParaRPr/>
           </a:p>
         </p:txBody>
       </p:sp>
@@ -8960,6 +9257,7 @@
           <a:lstStyle/>
           <a:p>
             <a:pPr algn="ctr"/>
+            <a:endParaRPr/>
           </a:p>
         </p:txBody>
       </p:sp>
@@ -8980,7 +9278,7 @@
           <a:noFill/>
         </p:spPr>
         <p:txBody>
-          <a:bodyPr wrap="square" lIns="0" rIns="0" tIns="0" bIns="0" anchor="ctr">
+          <a:bodyPr wrap="square" lIns="0" tIns="0" rIns="0" bIns="0" anchor="ctr">
             <a:spAutoFit/>
           </a:bodyPr>
           <a:lstStyle/>
@@ -9006,23 +9304,23 @@
         </p:nvSpPr>
         <p:spPr>
           <a:xfrm>
-            <a:off x="914400" y="4041648"/>
-            <a:ext cx="4718304" cy="905256"/>
-          </a:xfrm>
-          <a:prstGeom prst="rect">
-            <a:avLst/>
-          </a:prstGeom>
-          <a:noFill/>
-        </p:spPr>
-        <p:txBody>
-          <a:bodyPr wrap="square" lIns="0" rIns="0" tIns="0" bIns="0" anchor="t">
+            <a:off x="886968" y="4110228"/>
+            <a:ext cx="4718304" cy="615553"/>
+          </a:xfrm>
+          <a:prstGeom prst="rect">
+            <a:avLst/>
+          </a:prstGeom>
+          <a:noFill/>
+        </p:spPr>
+        <p:txBody>
+          <a:bodyPr wrap="square" lIns="0" tIns="0" rIns="0" bIns="0" anchor="t">
             <a:spAutoFit/>
           </a:bodyPr>
           <a:lstStyle/>
           <a:p>
             <a:pPr algn="l"/>
             <a:r>
-              <a:rPr sz="1600" b="0">
+              <a:rPr sz="2000" b="0" dirty="0">
                 <a:solidFill>
                   <a:srgbClr val="15273B"/>
                 </a:solidFill>
@@ -9077,6 +9375,7 @@
           <a:lstStyle/>
           <a:p>
             <a:pPr algn="ctr"/>
+            <a:endParaRPr/>
           </a:p>
         </p:txBody>
       </p:sp>
@@ -9120,6 +9419,7 @@
           <a:lstStyle/>
           <a:p>
             <a:pPr algn="ctr"/>
+            <a:endParaRPr/>
           </a:p>
         </p:txBody>
       </p:sp>
@@ -9140,7 +9440,7 @@
           <a:noFill/>
         </p:spPr>
         <p:txBody>
-          <a:bodyPr wrap="square" lIns="0" rIns="0" tIns="0" bIns="0" anchor="ctr">
+          <a:bodyPr wrap="square" lIns="0" tIns="0" rIns="0" bIns="0" anchor="ctr">
             <a:spAutoFit/>
           </a:bodyPr>
           <a:lstStyle/>
@@ -9167,28 +9467,118 @@
         <p:spPr>
           <a:xfrm>
             <a:off x="6382512" y="4041648"/>
-            <a:ext cx="4901183" cy="905256"/>
-          </a:xfrm>
-          <a:prstGeom prst="rect">
-            <a:avLst/>
-          </a:prstGeom>
-          <a:noFill/>
-        </p:spPr>
-        <p:txBody>
-          <a:bodyPr wrap="square" lIns="0" rIns="0" tIns="0" bIns="0" anchor="t">
+            <a:ext cx="4901183" cy="615553"/>
+          </a:xfrm>
+          <a:prstGeom prst="rect">
+            <a:avLst/>
+          </a:prstGeom>
+          <a:noFill/>
+        </p:spPr>
+        <p:txBody>
+          <a:bodyPr wrap="square" lIns="0" tIns="0" rIns="0" bIns="0" anchor="t">
             <a:spAutoFit/>
           </a:bodyPr>
           <a:lstStyle/>
           <a:p>
             <a:pPr algn="l"/>
             <a:r>
-              <a:rPr sz="1600" b="0">
+              <a:rPr sz="2000" b="0" dirty="0">
                 <a:solidFill>
                   <a:srgbClr val="15273B"/>
                 </a:solidFill>
                 <a:latin typeface="Aptos"/>
               </a:rPr>
-              <a:t>49 épocas; melhor estado restaurado pelo Early Stopping.</a:t>
+              <a:t>49 </a:t>
+            </a:r>
+            <a:r>
+              <a:rPr sz="2000" b="0" dirty="0" err="1">
+                <a:solidFill>
+                  <a:srgbClr val="15273B"/>
+                </a:solidFill>
+                <a:latin typeface="Aptos"/>
+              </a:rPr>
+              <a:t>épocas</a:t>
+            </a:r>
+            <a:r>
+              <a:rPr sz="2000" b="0" dirty="0">
+                <a:solidFill>
+                  <a:srgbClr val="15273B"/>
+                </a:solidFill>
+                <a:latin typeface="Aptos"/>
+              </a:rPr>
+              <a:t>; </a:t>
+            </a:r>
+            <a:r>
+              <a:rPr sz="2000" b="0" dirty="0" err="1">
+                <a:solidFill>
+                  <a:srgbClr val="15273B"/>
+                </a:solidFill>
+                <a:latin typeface="Aptos"/>
+              </a:rPr>
+              <a:t>melhor</a:t>
+            </a:r>
+            <a:r>
+              <a:rPr sz="2000" b="0" dirty="0">
+                <a:solidFill>
+                  <a:srgbClr val="15273B"/>
+                </a:solidFill>
+                <a:latin typeface="Aptos"/>
+              </a:rPr>
+              <a:t> </a:t>
+            </a:r>
+            <a:r>
+              <a:rPr sz="2000" b="0" dirty="0" err="1">
+                <a:solidFill>
+                  <a:srgbClr val="15273B"/>
+                </a:solidFill>
+                <a:latin typeface="Aptos"/>
+              </a:rPr>
+              <a:t>estado</a:t>
+            </a:r>
+            <a:r>
+              <a:rPr sz="2000" b="0" dirty="0">
+                <a:solidFill>
+                  <a:srgbClr val="15273B"/>
+                </a:solidFill>
+                <a:latin typeface="Aptos"/>
+              </a:rPr>
+              <a:t> </a:t>
+            </a:r>
+            <a:r>
+              <a:rPr sz="2000" b="0" dirty="0" err="1">
+                <a:solidFill>
+                  <a:srgbClr val="15273B"/>
+                </a:solidFill>
+                <a:latin typeface="Aptos"/>
+              </a:rPr>
+              <a:t>restaurado</a:t>
+            </a:r>
+            <a:r>
+              <a:rPr sz="2000" b="0" dirty="0">
+                <a:solidFill>
+                  <a:srgbClr val="15273B"/>
+                </a:solidFill>
+                <a:latin typeface="Aptos"/>
+              </a:rPr>
+              <a:t> </a:t>
+            </a:r>
+            <a:r>
+              <a:rPr sz="2000" b="0" dirty="0" err="1">
+                <a:solidFill>
+                  <a:srgbClr val="15273B"/>
+                </a:solidFill>
+                <a:latin typeface="Aptos"/>
+              </a:rPr>
+              <a:t>pelo</a:t>
+            </a:r>
+            <a:r>
+              <a:rPr sz="2000" b="0" dirty="0">
+                <a:solidFill>
+                  <a:srgbClr val="15273B"/>
+                </a:solidFill>
+                <a:latin typeface="Aptos"/>
+              </a:rPr>
+              <a:t> Early Stopping.</a:t>
             </a:r>
           </a:p>
         </p:txBody>
@@ -9233,6 +9623,7 @@
           <a:lstStyle/>
           <a:p>
             <a:pPr algn="ctr"/>
+            <a:endParaRPr/>
           </a:p>
         </p:txBody>
       </p:sp>
@@ -9276,6 +9667,7 @@
           <a:lstStyle/>
           <a:p>
             <a:pPr algn="ctr"/>
+            <a:endParaRPr/>
           </a:p>
         </p:txBody>
       </p:sp>
@@ -9296,7 +9688,7 @@
           <a:noFill/>
         </p:spPr>
         <p:txBody>
-          <a:bodyPr wrap="square" lIns="0" rIns="0" tIns="0" bIns="0" anchor="ctr">
+          <a:bodyPr wrap="square" lIns="0" tIns="0" rIns="0" bIns="0" anchor="ctr">
             <a:spAutoFit/>
           </a:bodyPr>
           <a:lstStyle/>
@@ -9331,7 +9723,7 @@
           <a:noFill/>
         </p:spPr>
         <p:txBody>
-          <a:bodyPr wrap="square" lIns="0" rIns="0" tIns="0" bIns="0" anchor="ctr">
+          <a:bodyPr wrap="square" lIns="0" tIns="0" rIns="0" bIns="0" anchor="ctr">
             <a:spAutoFit/>
           </a:bodyPr>
           <a:lstStyle/>
@@ -9358,7 +9750,7 @@
 </file>
 
 <file path=ppt/slides/slide18.xml><?xml version="1.0" encoding="utf-8"?>
-<p:sld xmlns:a="http://schemas.openxmlformats.org/drawingml/2006/main" xmlns:p="http://schemas.openxmlformats.org/presentationml/2006/main" xmlns:r="http://schemas.openxmlformats.org/officeDocument/2006/relationships">
+<p:sld xmlns:a="http://schemas.openxmlformats.org/drawingml/2006/main" xmlns:r="http://schemas.openxmlformats.org/officeDocument/2006/relationships" xmlns:p="http://schemas.openxmlformats.org/presentationml/2006/main">
   <p:cSld>
     <p:bg>
       <p:bgPr>
@@ -9374,7 +9766,14 @@
         <p:cNvGrpSpPr/>
         <p:nvPr/>
       </p:nvGrpSpPr>
-      <p:grpSpPr/>
+      <p:grpSpPr>
+        <a:xfrm>
+          <a:off x="0" y="0"/>
+          <a:ext cx="0" cy="0"/>
+          <a:chOff x="0" y="0"/>
+          <a:chExt cx="0" cy="0"/>
+        </a:xfrm>
+      </p:grpSpPr>
       <p:sp>
         <p:nvSpPr>
           <p:cNvPr id="2" name="Rectangle 1"/>
@@ -9415,6 +9814,7 @@
           <a:lstStyle/>
           <a:p>
             <a:pPr algn="ctr"/>
+            <a:endParaRPr/>
           </a:p>
         </p:txBody>
       </p:sp>
@@ -9435,7 +9835,7 @@
           <a:noFill/>
         </p:spPr>
         <p:txBody>
-          <a:bodyPr wrap="square" lIns="0" rIns="0" tIns="0" bIns="0" anchor="ctr">
+          <a:bodyPr wrap="square" lIns="0" tIns="0" rIns="0" bIns="0" anchor="ctr">
             <a:spAutoFit/>
           </a:bodyPr>
           <a:lstStyle/>
@@ -9470,7 +9870,7 @@
           <a:noFill/>
         </p:spPr>
         <p:txBody>
-          <a:bodyPr wrap="square" lIns="0" rIns="0" tIns="0" bIns="0" anchor="ctr">
+          <a:bodyPr wrap="square" lIns="0" tIns="0" rIns="0" bIns="0" anchor="ctr">
             <a:spAutoFit/>
           </a:bodyPr>
           <a:lstStyle/>
@@ -9505,7 +9905,7 @@
           <a:noFill/>
         </p:spPr>
         <p:txBody>
-          <a:bodyPr wrap="square" lIns="0" rIns="0" tIns="0" bIns="0" anchor="ctr">
+          <a:bodyPr wrap="square" lIns="0" tIns="0" rIns="0" bIns="0" anchor="ctr">
             <a:spAutoFit/>
           </a:bodyPr>
           <a:lstStyle/>
@@ -9563,6 +9963,7 @@
           <a:lstStyle/>
           <a:p>
             <a:pPr algn="ctr"/>
+            <a:endParaRPr/>
           </a:p>
         </p:txBody>
       </p:sp>
@@ -9583,7 +9984,7 @@
           <a:noFill/>
         </p:spPr>
         <p:txBody>
-          <a:bodyPr wrap="square" lIns="0" rIns="0" tIns="0" bIns="0" anchor="ctr">
+          <a:bodyPr wrap="square" lIns="0" tIns="0" rIns="0" bIns="0" anchor="ctr">
             <a:spAutoFit/>
           </a:bodyPr>
           <a:lstStyle/>
@@ -9618,7 +10019,7 @@
           <a:noFill/>
         </p:spPr>
         <p:txBody>
-          <a:bodyPr wrap="square" lIns="0" rIns="0" tIns="0" bIns="0" anchor="ctr">
+          <a:bodyPr wrap="square" lIns="0" tIns="0" rIns="0" bIns="0" anchor="ctr">
             <a:spAutoFit/>
           </a:bodyPr>
           <a:lstStyle/>
@@ -9680,6 +10081,7 @@
           <a:lstStyle/>
           <a:p>
             <a:pPr algn="ctr"/>
+            <a:endParaRPr/>
           </a:p>
         </p:txBody>
       </p:sp>
@@ -9747,6 +10149,7 @@
           <a:lstStyle/>
           <a:p>
             <a:pPr algn="ctr"/>
+            <a:endParaRPr/>
           </a:p>
         </p:txBody>
       </p:sp>
@@ -9790,6 +10193,7 @@
           <a:lstStyle/>
           <a:p>
             <a:pPr algn="ctr"/>
+            <a:endParaRPr/>
           </a:p>
         </p:txBody>
       </p:sp>
@@ -9810,7 +10214,7 @@
           <a:noFill/>
         </p:spPr>
         <p:txBody>
-          <a:bodyPr wrap="square" lIns="0" rIns="0" tIns="0" bIns="0" anchor="ctr">
+          <a:bodyPr wrap="square" lIns="0" tIns="0" rIns="0" bIns="0" anchor="ctr">
             <a:spAutoFit/>
           </a:bodyPr>
           <a:lstStyle/>
@@ -9845,7 +10249,7 @@
           <a:noFill/>
         </p:spPr>
         <p:txBody>
-          <a:bodyPr wrap="square" lIns="0" rIns="0" tIns="0" bIns="0" anchor="ctr">
+          <a:bodyPr wrap="square" lIns="0" tIns="0" rIns="0" bIns="0" anchor="ctr">
             <a:spAutoFit/>
           </a:bodyPr>
           <a:lstStyle/>
@@ -9872,7 +10276,7 @@
 </file>
 
 <file path=ppt/slides/slide19.xml><?xml version="1.0" encoding="utf-8"?>
-<p:sld xmlns:a="http://schemas.openxmlformats.org/drawingml/2006/main" xmlns:p="http://schemas.openxmlformats.org/presentationml/2006/main" xmlns:r="http://schemas.openxmlformats.org/officeDocument/2006/relationships">
+<p:sld xmlns:a="http://schemas.openxmlformats.org/drawingml/2006/main" xmlns:r="http://schemas.openxmlformats.org/officeDocument/2006/relationships" xmlns:p="http://schemas.openxmlformats.org/presentationml/2006/main">
   <p:cSld>
     <p:bg>
       <p:bgPr>
@@ -9888,7 +10292,14 @@
         <p:cNvGrpSpPr/>
         <p:nvPr/>
       </p:nvGrpSpPr>
-      <p:grpSpPr/>
+      <p:grpSpPr>
+        <a:xfrm>
+          <a:off x="0" y="0"/>
+          <a:ext cx="0" cy="0"/>
+          <a:chOff x="0" y="0"/>
+          <a:chExt cx="0" cy="0"/>
+        </a:xfrm>
+      </p:grpSpPr>
       <p:sp>
         <p:nvSpPr>
           <p:cNvPr id="2" name="Rectangle 1"/>
@@ -9929,6 +10340,7 @@
           <a:lstStyle/>
           <a:p>
             <a:pPr algn="ctr"/>
+            <a:endParaRPr/>
           </a:p>
         </p:txBody>
       </p:sp>
@@ -9949,7 +10361,7 @@
           <a:noFill/>
         </p:spPr>
         <p:txBody>
-          <a:bodyPr wrap="square" lIns="0" rIns="0" tIns="0" bIns="0" anchor="ctr">
+          <a:bodyPr wrap="square" lIns="0" tIns="0" rIns="0" bIns="0" anchor="ctr">
             <a:spAutoFit/>
           </a:bodyPr>
           <a:lstStyle/>
@@ -9984,7 +10396,7 @@
           <a:noFill/>
         </p:spPr>
         <p:txBody>
-          <a:bodyPr wrap="square" lIns="0" rIns="0" tIns="0" bIns="0" anchor="t">
+          <a:bodyPr wrap="square" lIns="0" tIns="0" rIns="0" bIns="0" anchor="t">
             <a:spAutoFit/>
           </a:bodyPr>
           <a:lstStyle/>
@@ -10020,7 +10432,7 @@
           <a:noFill/>
         </p:spPr>
         <p:txBody>
-          <a:bodyPr wrap="square" lIns="0" rIns="0" tIns="0" bIns="0" anchor="ctr">
+          <a:bodyPr wrap="square" lIns="0" tIns="0" rIns="0" bIns="0" anchor="ctr">
             <a:spAutoFit/>
           </a:bodyPr>
           <a:lstStyle/>
@@ -10078,6 +10490,7 @@
           <a:lstStyle/>
           <a:p>
             <a:pPr algn="ctr"/>
+            <a:endParaRPr/>
           </a:p>
         </p:txBody>
       </p:sp>
@@ -10098,7 +10511,7 @@
           <a:noFill/>
         </p:spPr>
         <p:txBody>
-          <a:bodyPr wrap="square" lIns="0" rIns="0" tIns="0" bIns="0" anchor="ctr">
+          <a:bodyPr wrap="square" lIns="0" tIns="0" rIns="0" bIns="0" anchor="ctr">
             <a:spAutoFit/>
           </a:bodyPr>
           <a:lstStyle/>
@@ -10133,7 +10546,7 @@
           <a:noFill/>
         </p:spPr>
         <p:txBody>
-          <a:bodyPr wrap="square" lIns="0" rIns="0" tIns="0" bIns="0" anchor="ctr">
+          <a:bodyPr wrap="square" lIns="0" tIns="0" rIns="0" bIns="0" anchor="ctr">
             <a:spAutoFit/>
           </a:bodyPr>
           <a:lstStyle/>
@@ -10160,7 +10573,7 @@
 </file>
 
 <file path=ppt/slides/slide2.xml><?xml version="1.0" encoding="utf-8"?>
-<p:sld xmlns:a="http://schemas.openxmlformats.org/drawingml/2006/main" xmlns:p="http://schemas.openxmlformats.org/presentationml/2006/main" xmlns:r="http://schemas.openxmlformats.org/officeDocument/2006/relationships">
+<p:sld xmlns:a="http://schemas.openxmlformats.org/drawingml/2006/main" xmlns:r="http://schemas.openxmlformats.org/officeDocument/2006/relationships" xmlns:p="http://schemas.openxmlformats.org/presentationml/2006/main">
   <p:cSld>
     <p:bg>
       <p:bgPr>
@@ -10176,7 +10589,14 @@
         <p:cNvGrpSpPr/>
         <p:nvPr/>
       </p:nvGrpSpPr>
-      <p:grpSpPr/>
+      <p:grpSpPr>
+        <a:xfrm>
+          <a:off x="0" y="0"/>
+          <a:ext cx="0" cy="0"/>
+          <a:chOff x="0" y="0"/>
+          <a:chExt cx="0" cy="0"/>
+        </a:xfrm>
+      </p:grpSpPr>
       <p:sp>
         <p:nvSpPr>
           <p:cNvPr id="2" name="Rectangle 1"/>
@@ -10217,6 +10637,7 @@
           <a:lstStyle/>
           <a:p>
             <a:pPr algn="ctr"/>
+            <a:endParaRPr/>
           </a:p>
         </p:txBody>
       </p:sp>
@@ -10237,7 +10658,7 @@
           <a:noFill/>
         </p:spPr>
         <p:txBody>
-          <a:bodyPr wrap="square" lIns="0" rIns="0" tIns="0" bIns="0" anchor="ctr">
+          <a:bodyPr wrap="square" lIns="0" tIns="0" rIns="0" bIns="0" anchor="ctr">
             <a:spAutoFit/>
           </a:bodyPr>
           <a:lstStyle/>
@@ -10272,7 +10693,7 @@
           <a:noFill/>
         </p:spPr>
         <p:txBody>
-          <a:bodyPr wrap="square" lIns="0" rIns="0" tIns="0" bIns="0" anchor="ctr">
+          <a:bodyPr wrap="square" lIns="0" tIns="0" rIns="0" bIns="0" anchor="ctr">
             <a:spAutoFit/>
           </a:bodyPr>
           <a:lstStyle/>
@@ -10307,7 +10728,7 @@
           <a:noFill/>
         </p:spPr>
         <p:txBody>
-          <a:bodyPr wrap="square" lIns="0" rIns="0" tIns="0" bIns="0" anchor="ctr">
+          <a:bodyPr wrap="square" lIns="0" tIns="0" rIns="0" bIns="0" anchor="ctr">
             <a:spAutoFit/>
           </a:bodyPr>
           <a:lstStyle/>
@@ -10365,6 +10786,7 @@
           <a:lstStyle/>
           <a:p>
             <a:pPr algn="ctr"/>
+            <a:endParaRPr/>
           </a:p>
         </p:txBody>
       </p:sp>
@@ -10385,7 +10807,7 @@
           <a:noFill/>
         </p:spPr>
         <p:txBody>
-          <a:bodyPr wrap="square" lIns="0" rIns="0" tIns="0" bIns="0" anchor="ctr">
+          <a:bodyPr wrap="square" lIns="0" tIns="0" rIns="0" bIns="0" anchor="ctr">
             <a:spAutoFit/>
           </a:bodyPr>
           <a:lstStyle/>
@@ -10420,7 +10842,7 @@
           <a:noFill/>
         </p:spPr>
         <p:txBody>
-          <a:bodyPr wrap="square" lIns="0" rIns="0" tIns="0" bIns="0" anchor="ctr">
+          <a:bodyPr wrap="square" lIns="0" tIns="0" rIns="0" bIns="0" anchor="ctr">
             <a:spAutoFit/>
           </a:bodyPr>
           <a:lstStyle/>
@@ -10482,6 +10904,7 @@
           <a:lstStyle/>
           <a:p>
             <a:pPr algn="ctr"/>
+            <a:endParaRPr/>
           </a:p>
         </p:txBody>
       </p:sp>
@@ -10502,7 +10925,7 @@
           <a:noFill/>
         </p:spPr>
         <p:txBody>
-          <a:bodyPr wrap="square" lIns="0" rIns="0" tIns="0" bIns="0" anchor="ctr">
+          <a:bodyPr wrap="square" lIns="0" tIns="0" rIns="0" bIns="0" anchor="ctr">
             <a:spAutoFit/>
           </a:bodyPr>
           <a:lstStyle/>
@@ -10537,7 +10960,7 @@
           <a:noFill/>
         </p:spPr>
         <p:txBody>
-          <a:bodyPr wrap="square" lIns="0" rIns="0" tIns="0" bIns="0" anchor="ctr">
+          <a:bodyPr wrap="square" lIns="0" tIns="0" rIns="0" bIns="0" anchor="ctr">
             <a:spAutoFit/>
           </a:bodyPr>
           <a:lstStyle/>
@@ -10599,6 +11022,7 @@
           <a:lstStyle/>
           <a:p>
             <a:pPr algn="ctr"/>
+            <a:endParaRPr/>
           </a:p>
         </p:txBody>
       </p:sp>
@@ -10619,7 +11043,7 @@
           <a:noFill/>
         </p:spPr>
         <p:txBody>
-          <a:bodyPr wrap="square" lIns="0" rIns="0" tIns="0" bIns="0" anchor="ctr">
+          <a:bodyPr wrap="square" lIns="0" tIns="0" rIns="0" bIns="0" anchor="ctr">
             <a:spAutoFit/>
           </a:bodyPr>
           <a:lstStyle/>
@@ -10654,7 +11078,7 @@
           <a:noFill/>
         </p:spPr>
         <p:txBody>
-          <a:bodyPr wrap="square" lIns="0" rIns="0" tIns="0" bIns="0" anchor="ctr">
+          <a:bodyPr wrap="square" lIns="0" tIns="0" rIns="0" bIns="0" anchor="ctr">
             <a:spAutoFit/>
           </a:bodyPr>
           <a:lstStyle/>
@@ -10689,7 +11113,7 @@
           <a:noFill/>
         </p:spPr>
         <p:txBody>
-          <a:bodyPr wrap="square" lIns="0" rIns="0" tIns="0" bIns="0" anchor="ctr">
+          <a:bodyPr wrap="square" lIns="0" tIns="0" rIns="0" bIns="0" anchor="ctr">
             <a:spAutoFit/>
           </a:bodyPr>
           <a:lstStyle/>
@@ -10751,6 +11175,7 @@
           <a:lstStyle/>
           <a:p>
             <a:pPr algn="ctr"/>
+            <a:endParaRPr/>
           </a:p>
         </p:txBody>
       </p:sp>
@@ -10771,7 +11196,7 @@
           <a:noFill/>
         </p:spPr>
         <p:txBody>
-          <a:bodyPr wrap="square" lIns="0" rIns="0" tIns="0" bIns="0" anchor="ctr">
+          <a:bodyPr wrap="square" lIns="0" tIns="0" rIns="0" bIns="0" anchor="ctr">
             <a:spAutoFit/>
           </a:bodyPr>
           <a:lstStyle/>
@@ -10806,7 +11231,7 @@
           <a:noFill/>
         </p:spPr>
         <p:txBody>
-          <a:bodyPr wrap="square" lIns="0" rIns="0" tIns="0" bIns="0" anchor="ctr">
+          <a:bodyPr wrap="square" lIns="0" tIns="0" rIns="0" bIns="0" anchor="ctr">
             <a:spAutoFit/>
           </a:bodyPr>
           <a:lstStyle/>
@@ -10868,6 +11293,7 @@
           <a:lstStyle/>
           <a:p>
             <a:pPr algn="ctr"/>
+            <a:endParaRPr/>
           </a:p>
         </p:txBody>
       </p:sp>
@@ -10911,6 +11337,7 @@
           <a:lstStyle/>
           <a:p>
             <a:pPr algn="ctr"/>
+            <a:endParaRPr/>
           </a:p>
         </p:txBody>
       </p:sp>
@@ -10931,7 +11358,7 @@
           <a:noFill/>
         </p:spPr>
         <p:txBody>
-          <a:bodyPr wrap="square" lIns="0" rIns="0" tIns="0" bIns="0" anchor="ctr">
+          <a:bodyPr wrap="square" lIns="0" tIns="0" rIns="0" bIns="0" anchor="ctr">
             <a:spAutoFit/>
           </a:bodyPr>
           <a:lstStyle/>
@@ -10966,7 +11393,7 @@
           <a:noFill/>
         </p:spPr>
         <p:txBody>
-          <a:bodyPr wrap="square" lIns="0" rIns="0" tIns="0" bIns="0" anchor="t">
+          <a:bodyPr wrap="square" lIns="0" tIns="0" rIns="0" bIns="0" anchor="t">
             <a:spAutoFit/>
           </a:bodyPr>
           <a:lstStyle/>
@@ -11029,6 +11456,7 @@
           <a:lstStyle/>
           <a:p>
             <a:pPr algn="ctr"/>
+            <a:endParaRPr/>
           </a:p>
         </p:txBody>
       </p:sp>
@@ -11072,6 +11500,7 @@
           <a:lstStyle/>
           <a:p>
             <a:pPr algn="ctr"/>
+            <a:endParaRPr/>
           </a:p>
         </p:txBody>
       </p:sp>
@@ -11092,7 +11521,7 @@
           <a:noFill/>
         </p:spPr>
         <p:txBody>
-          <a:bodyPr wrap="square" lIns="0" rIns="0" tIns="0" bIns="0" anchor="ctr">
+          <a:bodyPr wrap="square" lIns="0" tIns="0" rIns="0" bIns="0" anchor="ctr">
             <a:spAutoFit/>
           </a:bodyPr>
           <a:lstStyle/>
@@ -11127,7 +11556,7 @@
           <a:noFill/>
         </p:spPr>
         <p:txBody>
-          <a:bodyPr wrap="square" lIns="0" rIns="0" tIns="0" bIns="0" anchor="t">
+          <a:bodyPr wrap="square" lIns="0" tIns="0" rIns="0" bIns="0" anchor="t">
             <a:spAutoFit/>
           </a:bodyPr>
           <a:lstStyle/>
@@ -11190,6 +11619,7 @@
           <a:lstStyle/>
           <a:p>
             <a:pPr algn="ctr"/>
+            <a:endParaRPr/>
           </a:p>
         </p:txBody>
       </p:sp>
@@ -11233,6 +11663,7 @@
           <a:lstStyle/>
           <a:p>
             <a:pPr algn="ctr"/>
+            <a:endParaRPr/>
           </a:p>
         </p:txBody>
       </p:sp>
@@ -11253,7 +11684,7 @@
           <a:noFill/>
         </p:spPr>
         <p:txBody>
-          <a:bodyPr wrap="square" lIns="0" rIns="0" tIns="0" bIns="0" anchor="ctr">
+          <a:bodyPr wrap="square" lIns="0" tIns="0" rIns="0" bIns="0" anchor="ctr">
             <a:spAutoFit/>
           </a:bodyPr>
           <a:lstStyle/>
@@ -11288,7 +11719,7 @@
           <a:noFill/>
         </p:spPr>
         <p:txBody>
-          <a:bodyPr wrap="square" lIns="0" rIns="0" tIns="0" bIns="0" anchor="t">
+          <a:bodyPr wrap="square" lIns="0" tIns="0" rIns="0" bIns="0" anchor="t">
             <a:spAutoFit/>
           </a:bodyPr>
           <a:lstStyle/>
@@ -11349,6 +11780,7 @@
           <a:lstStyle/>
           <a:p>
             <a:pPr algn="ctr"/>
+            <a:endParaRPr/>
           </a:p>
         </p:txBody>
       </p:sp>
@@ -11369,7 +11801,7 @@
           <a:noFill/>
         </p:spPr>
         <p:txBody>
-          <a:bodyPr wrap="square" lIns="0" rIns="0" tIns="0" bIns="0" anchor="ctr">
+          <a:bodyPr wrap="square" lIns="0" tIns="0" rIns="0" bIns="0" anchor="ctr">
             <a:spAutoFit/>
           </a:bodyPr>
           <a:lstStyle/>
@@ -11404,7 +11836,7 @@
           <a:noFill/>
         </p:spPr>
         <p:txBody>
-          <a:bodyPr wrap="square" lIns="0" rIns="0" tIns="0" bIns="0" anchor="ctr">
+          <a:bodyPr wrap="square" lIns="0" tIns="0" rIns="0" bIns="0" anchor="ctr">
             <a:spAutoFit/>
           </a:bodyPr>
           <a:lstStyle/>
@@ -11439,7 +11871,7 @@
           <a:noFill/>
         </p:spPr>
         <p:txBody>
-          <a:bodyPr wrap="square" lIns="0" rIns="0" tIns="0" bIns="0" anchor="ctr">
+          <a:bodyPr wrap="square" lIns="0" tIns="0" rIns="0" bIns="0" anchor="ctr">
             <a:spAutoFit/>
           </a:bodyPr>
           <a:lstStyle/>
@@ -11466,7 +11898,7 @@
 </file>
 
 <file path=ppt/slides/slide20.xml><?xml version="1.0" encoding="utf-8"?>
-<p:sld xmlns:a="http://schemas.openxmlformats.org/drawingml/2006/main" xmlns:p="http://schemas.openxmlformats.org/presentationml/2006/main" xmlns:r="http://schemas.openxmlformats.org/officeDocument/2006/relationships">
+<p:sld xmlns:a="http://schemas.openxmlformats.org/drawingml/2006/main" xmlns:r="http://schemas.openxmlformats.org/officeDocument/2006/relationships" xmlns:p="http://schemas.openxmlformats.org/presentationml/2006/main">
   <p:cSld>
     <p:bg>
       <p:bgPr>
@@ -11482,7 +11914,14 @@
         <p:cNvGrpSpPr/>
         <p:nvPr/>
       </p:nvGrpSpPr>
-      <p:grpSpPr/>
+      <p:grpSpPr>
+        <a:xfrm>
+          <a:off x="0" y="0"/>
+          <a:ext cx="0" cy="0"/>
+          <a:chOff x="0" y="0"/>
+          <a:chExt cx="0" cy="0"/>
+        </a:xfrm>
+      </p:grpSpPr>
       <p:sp>
         <p:nvSpPr>
           <p:cNvPr id="2" name="Rectangle 1"/>
@@ -11523,6 +11962,7 @@
           <a:lstStyle/>
           <a:p>
             <a:pPr algn="ctr"/>
+            <a:endParaRPr/>
           </a:p>
         </p:txBody>
       </p:sp>
@@ -11543,7 +11983,7 @@
           <a:noFill/>
         </p:spPr>
         <p:txBody>
-          <a:bodyPr wrap="square" lIns="0" rIns="0" tIns="0" bIns="0" anchor="ctr">
+          <a:bodyPr wrap="square" lIns="0" tIns="0" rIns="0" bIns="0" anchor="ctr">
             <a:spAutoFit/>
           </a:bodyPr>
           <a:lstStyle/>
@@ -11578,7 +12018,7 @@
           <a:noFill/>
         </p:spPr>
         <p:txBody>
-          <a:bodyPr wrap="square" lIns="0" rIns="0" tIns="0" bIns="0" anchor="ctr">
+          <a:bodyPr wrap="square" lIns="0" tIns="0" rIns="0" bIns="0" anchor="ctr">
             <a:spAutoFit/>
           </a:bodyPr>
           <a:lstStyle/>
@@ -11613,7 +12053,7 @@
           <a:noFill/>
         </p:spPr>
         <p:txBody>
-          <a:bodyPr wrap="square" lIns="0" rIns="0" tIns="0" bIns="0" anchor="ctr">
+          <a:bodyPr wrap="square" lIns="0" tIns="0" rIns="0" bIns="0" anchor="ctr">
             <a:spAutoFit/>
           </a:bodyPr>
           <a:lstStyle/>
@@ -11671,6 +12111,7 @@
           <a:lstStyle/>
           <a:p>
             <a:pPr algn="ctr"/>
+            <a:endParaRPr/>
           </a:p>
         </p:txBody>
       </p:sp>
@@ -11691,7 +12132,7 @@
           <a:noFill/>
         </p:spPr>
         <p:txBody>
-          <a:bodyPr wrap="square" lIns="0" rIns="0" tIns="0" bIns="0" anchor="ctr">
+          <a:bodyPr wrap="square" lIns="0" tIns="0" rIns="0" bIns="0" anchor="ctr">
             <a:spAutoFit/>
           </a:bodyPr>
           <a:lstStyle/>
@@ -11726,7 +12167,7 @@
           <a:noFill/>
         </p:spPr>
         <p:txBody>
-          <a:bodyPr wrap="square" lIns="0" rIns="0" tIns="0" bIns="0" anchor="ctr">
+          <a:bodyPr wrap="square" lIns="0" tIns="0" rIns="0" bIns="0" anchor="ctr">
             <a:spAutoFit/>
           </a:bodyPr>
           <a:lstStyle/>
@@ -11788,6 +12229,7 @@
           <a:lstStyle/>
           <a:p>
             <a:pPr algn="ctr"/>
+            <a:endParaRPr/>
           </a:p>
         </p:txBody>
       </p:sp>
@@ -11831,6 +12273,7 @@
           <a:lstStyle/>
           <a:p>
             <a:pPr algn="ctr"/>
+            <a:endParaRPr/>
           </a:p>
         </p:txBody>
       </p:sp>
@@ -11851,7 +12294,7 @@
           <a:noFill/>
         </p:spPr>
         <p:txBody>
-          <a:bodyPr wrap="square" lIns="0" rIns="0" tIns="0" bIns="0" anchor="ctr">
+          <a:bodyPr wrap="square" lIns="0" tIns="0" rIns="0" bIns="0" anchor="ctr">
             <a:spAutoFit/>
           </a:bodyPr>
           <a:lstStyle/>
@@ -11886,7 +12329,7 @@
           <a:noFill/>
         </p:spPr>
         <p:txBody>
-          <a:bodyPr wrap="square" lIns="0" rIns="0" tIns="0" bIns="0" anchor="t">
+          <a:bodyPr wrap="square" lIns="0" tIns="0" rIns="0" bIns="0" anchor="t">
             <a:spAutoFit/>
           </a:bodyPr>
           <a:lstStyle/>
@@ -11947,6 +12390,7 @@
           <a:lstStyle/>
           <a:p>
             <a:pPr algn="ctr"/>
+            <a:endParaRPr/>
           </a:p>
         </p:txBody>
       </p:sp>
@@ -11990,6 +12434,7 @@
           <a:lstStyle/>
           <a:p>
             <a:pPr algn="ctr"/>
+            <a:endParaRPr/>
           </a:p>
         </p:txBody>
       </p:sp>
@@ -12010,7 +12455,7 @@
           <a:noFill/>
         </p:spPr>
         <p:txBody>
-          <a:bodyPr wrap="square" lIns="0" rIns="0" tIns="0" bIns="0" anchor="ctr">
+          <a:bodyPr wrap="square" lIns="0" tIns="0" rIns="0" bIns="0" anchor="ctr">
             <a:spAutoFit/>
           </a:bodyPr>
           <a:lstStyle/>
@@ -12045,7 +12490,7 @@
           <a:noFill/>
         </p:spPr>
         <p:txBody>
-          <a:bodyPr wrap="square" lIns="0" rIns="0" tIns="0" bIns="0" anchor="ctr">
+          <a:bodyPr wrap="square" lIns="0" tIns="0" rIns="0" bIns="0" anchor="ctr">
             <a:spAutoFit/>
           </a:bodyPr>
           <a:lstStyle/>
@@ -12072,7 +12517,7 @@
 </file>
 
 <file path=ppt/slides/slide3.xml><?xml version="1.0" encoding="utf-8"?>
-<p:sld xmlns:a="http://schemas.openxmlformats.org/drawingml/2006/main" xmlns:p="http://schemas.openxmlformats.org/presentationml/2006/main" xmlns:r="http://schemas.openxmlformats.org/officeDocument/2006/relationships">
+<p:sld xmlns:a="http://schemas.openxmlformats.org/drawingml/2006/main" xmlns:r="http://schemas.openxmlformats.org/officeDocument/2006/relationships" xmlns:p="http://schemas.openxmlformats.org/presentationml/2006/main">
   <p:cSld>
     <p:bg>
       <p:bgPr>
@@ -12088,7 +12533,14 @@
         <p:cNvGrpSpPr/>
         <p:nvPr/>
       </p:nvGrpSpPr>
-      <p:grpSpPr/>
+      <p:grpSpPr>
+        <a:xfrm>
+          <a:off x="0" y="0"/>
+          <a:ext cx="0" cy="0"/>
+          <a:chOff x="0" y="0"/>
+          <a:chExt cx="0" cy="0"/>
+        </a:xfrm>
+      </p:grpSpPr>
       <p:sp>
         <p:nvSpPr>
           <p:cNvPr id="2" name="Rectangle 1"/>
@@ -12129,6 +12581,7 @@
           <a:lstStyle/>
           <a:p>
             <a:pPr algn="ctr"/>
+            <a:endParaRPr/>
           </a:p>
         </p:txBody>
       </p:sp>
@@ -12149,7 +12602,7 @@
           <a:noFill/>
         </p:spPr>
         <p:txBody>
-          <a:bodyPr wrap="square" lIns="0" rIns="0" tIns="0" bIns="0" anchor="ctr">
+          <a:bodyPr wrap="square" lIns="0" tIns="0" rIns="0" bIns="0" anchor="ctr">
             <a:spAutoFit/>
           </a:bodyPr>
           <a:lstStyle/>
@@ -12184,7 +12637,7 @@
           <a:noFill/>
         </p:spPr>
         <p:txBody>
-          <a:bodyPr wrap="square" lIns="0" rIns="0" tIns="0" bIns="0" anchor="ctr">
+          <a:bodyPr wrap="square" lIns="0" tIns="0" rIns="0" bIns="0" anchor="ctr">
             <a:spAutoFit/>
           </a:bodyPr>
           <a:lstStyle/>
@@ -12219,7 +12672,7 @@
           <a:noFill/>
         </p:spPr>
         <p:txBody>
-          <a:bodyPr wrap="square" lIns="0" rIns="0" tIns="0" bIns="0" anchor="ctr">
+          <a:bodyPr wrap="square" lIns="0" tIns="0" rIns="0" bIns="0" anchor="ctr">
             <a:spAutoFit/>
           </a:bodyPr>
           <a:lstStyle/>
@@ -12277,6 +12730,7 @@
           <a:lstStyle/>
           <a:p>
             <a:pPr algn="ctr"/>
+            <a:endParaRPr/>
           </a:p>
         </p:txBody>
       </p:sp>
@@ -12297,7 +12751,7 @@
           <a:noFill/>
         </p:spPr>
         <p:txBody>
-          <a:bodyPr wrap="square" lIns="0" rIns="0" tIns="0" bIns="0" anchor="ctr">
+          <a:bodyPr wrap="square" lIns="0" tIns="0" rIns="0" bIns="0" anchor="ctr">
             <a:spAutoFit/>
           </a:bodyPr>
           <a:lstStyle/>
@@ -12332,7 +12786,7 @@
           <a:noFill/>
         </p:spPr>
         <p:txBody>
-          <a:bodyPr wrap="square" lIns="0" rIns="0" tIns="0" bIns="0" anchor="ctr">
+          <a:bodyPr wrap="square" lIns="0" tIns="0" rIns="0" bIns="0" anchor="ctr">
             <a:spAutoFit/>
           </a:bodyPr>
           <a:lstStyle/>
@@ -12394,6 +12848,7 @@
           <a:lstStyle/>
           <a:p>
             <a:pPr algn="ctr"/>
+            <a:endParaRPr/>
           </a:p>
         </p:txBody>
       </p:sp>
@@ -12465,6 +12920,7 @@
           <a:lstStyle/>
           <a:p>
             <a:pPr algn="ctr"/>
+            <a:endParaRPr/>
           </a:p>
         </p:txBody>
       </p:sp>
@@ -12485,7 +12941,7 @@
           <a:noFill/>
         </p:spPr>
         <p:txBody>
-          <a:bodyPr wrap="square" lIns="0" rIns="0" tIns="0" bIns="0" anchor="ctr">
+          <a:bodyPr wrap="square" lIns="0" tIns="0" rIns="0" bIns="0" anchor="ctr">
             <a:spAutoFit/>
           </a:bodyPr>
           <a:lstStyle/>
@@ -12520,7 +12976,7 @@
           <a:noFill/>
         </p:spPr>
         <p:txBody>
-          <a:bodyPr wrap="square" lIns="0" rIns="0" tIns="0" bIns="0" anchor="ctr">
+          <a:bodyPr wrap="square" lIns="0" tIns="0" rIns="0" bIns="0" anchor="ctr">
             <a:spAutoFit/>
           </a:bodyPr>
           <a:lstStyle/>
@@ -12582,6 +13038,7 @@
           <a:lstStyle/>
           <a:p>
             <a:pPr algn="ctr"/>
+            <a:endParaRPr/>
           </a:p>
         </p:txBody>
       </p:sp>
@@ -12602,7 +13059,7 @@
           <a:noFill/>
         </p:spPr>
         <p:txBody>
-          <a:bodyPr wrap="square" lIns="0" rIns="0" tIns="0" bIns="0" anchor="ctr">
+          <a:bodyPr wrap="square" lIns="0" tIns="0" rIns="0" bIns="0" anchor="ctr">
             <a:spAutoFit/>
           </a:bodyPr>
           <a:lstStyle/>
@@ -12637,7 +13094,7 @@
           <a:noFill/>
         </p:spPr>
         <p:txBody>
-          <a:bodyPr wrap="square" lIns="0" rIns="0" tIns="0" bIns="0" anchor="ctr">
+          <a:bodyPr wrap="square" lIns="0" tIns="0" rIns="0" bIns="0" anchor="ctr">
             <a:spAutoFit/>
           </a:bodyPr>
           <a:lstStyle/>
@@ -12699,6 +13156,7 @@
           <a:lstStyle/>
           <a:p>
             <a:pPr algn="ctr"/>
+            <a:endParaRPr/>
           </a:p>
         </p:txBody>
       </p:sp>
@@ -12719,7 +13177,7 @@
           <a:noFill/>
         </p:spPr>
         <p:txBody>
-          <a:bodyPr wrap="square" lIns="0" rIns="0" tIns="0" bIns="0" anchor="ctr">
+          <a:bodyPr wrap="square" lIns="0" tIns="0" rIns="0" bIns="0" anchor="ctr">
             <a:spAutoFit/>
           </a:bodyPr>
           <a:lstStyle/>
@@ -12754,7 +13212,7 @@
           <a:noFill/>
         </p:spPr>
         <p:txBody>
-          <a:bodyPr wrap="square" lIns="0" rIns="0" tIns="0" bIns="0" anchor="ctr">
+          <a:bodyPr wrap="square" lIns="0" tIns="0" rIns="0" bIns="0" anchor="ctr">
             <a:spAutoFit/>
           </a:bodyPr>
           <a:lstStyle/>
@@ -12789,7 +13247,7 @@
           <a:noFill/>
         </p:spPr>
         <p:txBody>
-          <a:bodyPr wrap="square" lIns="0" rIns="0" tIns="0" bIns="0" anchor="ctr">
+          <a:bodyPr wrap="square" lIns="0" tIns="0" rIns="0" bIns="0" anchor="ctr">
             <a:spAutoFit/>
           </a:bodyPr>
           <a:lstStyle/>
@@ -12816,7 +13274,7 @@
 </file>
 
 <file path=ppt/slides/slide4.xml><?xml version="1.0" encoding="utf-8"?>
-<p:sld xmlns:a="http://schemas.openxmlformats.org/drawingml/2006/main" xmlns:p="http://schemas.openxmlformats.org/presentationml/2006/main" xmlns:r="http://schemas.openxmlformats.org/officeDocument/2006/relationships">
+<p:sld xmlns:a="http://schemas.openxmlformats.org/drawingml/2006/main" xmlns:r="http://schemas.openxmlformats.org/officeDocument/2006/relationships" xmlns:p="http://schemas.openxmlformats.org/presentationml/2006/main">
   <p:cSld>
     <p:bg>
       <p:bgPr>
@@ -12832,7 +13290,14 @@
         <p:cNvGrpSpPr/>
         <p:nvPr/>
       </p:nvGrpSpPr>
-      <p:grpSpPr/>
+      <p:grpSpPr>
+        <a:xfrm>
+          <a:off x="0" y="0"/>
+          <a:ext cx="0" cy="0"/>
+          <a:chOff x="0" y="0"/>
+          <a:chExt cx="0" cy="0"/>
+        </a:xfrm>
+      </p:grpSpPr>
       <p:sp>
         <p:nvSpPr>
           <p:cNvPr id="2" name="Rectangle 1"/>
@@ -12873,6 +13338,7 @@
           <a:lstStyle/>
           <a:p>
             <a:pPr algn="ctr"/>
+            <a:endParaRPr/>
           </a:p>
         </p:txBody>
       </p:sp>
@@ -12893,7 +13359,7 @@
           <a:noFill/>
         </p:spPr>
         <p:txBody>
-          <a:bodyPr wrap="square" lIns="0" rIns="0" tIns="0" bIns="0" anchor="ctr">
+          <a:bodyPr wrap="square" lIns="0" tIns="0" rIns="0" bIns="0" anchor="ctr">
             <a:spAutoFit/>
           </a:bodyPr>
           <a:lstStyle/>
@@ -12928,7 +13394,7 @@
           <a:noFill/>
         </p:spPr>
         <p:txBody>
-          <a:bodyPr wrap="square" lIns="0" rIns="0" tIns="0" bIns="0" anchor="ctr">
+          <a:bodyPr wrap="square" lIns="0" tIns="0" rIns="0" bIns="0" anchor="ctr">
             <a:spAutoFit/>
           </a:bodyPr>
           <a:lstStyle/>
@@ -12963,7 +13429,7 @@
           <a:noFill/>
         </p:spPr>
         <p:txBody>
-          <a:bodyPr wrap="square" lIns="0" rIns="0" tIns="0" bIns="0" anchor="ctr">
+          <a:bodyPr wrap="square" lIns="0" tIns="0" rIns="0" bIns="0" anchor="ctr">
             <a:spAutoFit/>
           </a:bodyPr>
           <a:lstStyle/>
@@ -13021,6 +13487,7 @@
           <a:lstStyle/>
           <a:p>
             <a:pPr algn="ctr"/>
+            <a:endParaRPr/>
           </a:p>
         </p:txBody>
       </p:sp>
@@ -13041,7 +13508,7 @@
           <a:noFill/>
         </p:spPr>
         <p:txBody>
-          <a:bodyPr wrap="square" lIns="0" rIns="0" tIns="0" bIns="0" anchor="ctr">
+          <a:bodyPr wrap="square" lIns="0" tIns="0" rIns="0" bIns="0" anchor="ctr">
             <a:spAutoFit/>
           </a:bodyPr>
           <a:lstStyle/>
@@ -13076,7 +13543,7 @@
           <a:noFill/>
         </p:spPr>
         <p:txBody>
-          <a:bodyPr wrap="square" lIns="0" rIns="0" tIns="0" bIns="0" anchor="ctr">
+          <a:bodyPr wrap="square" lIns="0" tIns="0" rIns="0" bIns="0" anchor="ctr">
             <a:spAutoFit/>
           </a:bodyPr>
           <a:lstStyle/>
@@ -13138,6 +13605,7 @@
           <a:lstStyle/>
           <a:p>
             <a:pPr algn="ctr"/>
+            <a:endParaRPr/>
           </a:p>
         </p:txBody>
       </p:sp>
@@ -13158,7 +13626,7 @@
           <a:noFill/>
         </p:spPr>
         <p:txBody>
-          <a:bodyPr wrap="square" lIns="0" rIns="0" tIns="0" bIns="0" anchor="ctr">
+          <a:bodyPr wrap="square" lIns="0" tIns="0" rIns="0" bIns="0" anchor="ctr">
             <a:spAutoFit/>
           </a:bodyPr>
           <a:lstStyle/>
@@ -13193,7 +13661,7 @@
           <a:noFill/>
         </p:spPr>
         <p:txBody>
-          <a:bodyPr wrap="square" lIns="0" rIns="0" tIns="0" bIns="0" anchor="ctr">
+          <a:bodyPr wrap="square" lIns="0" tIns="0" rIns="0" bIns="0" anchor="ctr">
             <a:spAutoFit/>
           </a:bodyPr>
           <a:lstStyle/>
@@ -13251,6 +13719,7 @@
           <a:lstStyle/>
           <a:p>
             <a:pPr algn="ctr"/>
+            <a:endParaRPr/>
           </a:p>
         </p:txBody>
       </p:sp>
@@ -13271,7 +13740,7 @@
           <a:noFill/>
         </p:spPr>
         <p:txBody>
-          <a:bodyPr wrap="square" lIns="0" rIns="0" tIns="0" bIns="0" anchor="ctr">
+          <a:bodyPr wrap="square" lIns="0" tIns="0" rIns="0" bIns="0" anchor="ctr">
             <a:spAutoFit/>
           </a:bodyPr>
           <a:lstStyle/>
@@ -13329,6 +13798,7 @@
           <a:lstStyle/>
           <a:p>
             <a:pPr algn="ctr"/>
+            <a:endParaRPr/>
           </a:p>
         </p:txBody>
       </p:sp>
@@ -13349,7 +13819,7 @@
           <a:noFill/>
         </p:spPr>
         <p:txBody>
-          <a:bodyPr wrap="square" lIns="0" rIns="0" tIns="0" bIns="0" anchor="ctr">
+          <a:bodyPr wrap="square" lIns="0" tIns="0" rIns="0" bIns="0" anchor="ctr">
             <a:spAutoFit/>
           </a:bodyPr>
           <a:lstStyle/>
@@ -13384,7 +13854,7 @@
           <a:noFill/>
         </p:spPr>
         <p:txBody>
-          <a:bodyPr wrap="square" lIns="0" rIns="0" tIns="0" bIns="0" anchor="ctr">
+          <a:bodyPr wrap="square" lIns="0" tIns="0" rIns="0" bIns="0" anchor="ctr">
             <a:spAutoFit/>
           </a:bodyPr>
           <a:lstStyle/>
@@ -13442,6 +13912,7 @@
           <a:lstStyle/>
           <a:p>
             <a:pPr algn="ctr"/>
+            <a:endParaRPr/>
           </a:p>
         </p:txBody>
       </p:sp>
@@ -13462,7 +13933,7 @@
           <a:noFill/>
         </p:spPr>
         <p:txBody>
-          <a:bodyPr wrap="square" lIns="0" rIns="0" tIns="0" bIns="0" anchor="ctr">
+          <a:bodyPr wrap="square" lIns="0" tIns="0" rIns="0" bIns="0" anchor="ctr">
             <a:spAutoFit/>
           </a:bodyPr>
           <a:lstStyle/>
@@ -13497,7 +13968,7 @@
           <a:noFill/>
         </p:spPr>
         <p:txBody>
-          <a:bodyPr wrap="square" lIns="0" rIns="0" tIns="0" bIns="0" anchor="ctr">
+          <a:bodyPr wrap="square" lIns="0" tIns="0" rIns="0" bIns="0" anchor="ctr">
             <a:spAutoFit/>
           </a:bodyPr>
           <a:lstStyle/>
@@ -13555,6 +14026,7 @@
           <a:lstStyle/>
           <a:p>
             <a:pPr algn="ctr"/>
+            <a:endParaRPr/>
           </a:p>
         </p:txBody>
       </p:sp>
@@ -13575,7 +14047,7 @@
           <a:noFill/>
         </p:spPr>
         <p:txBody>
-          <a:bodyPr wrap="square" lIns="0" rIns="0" tIns="0" bIns="0" anchor="ctr">
+          <a:bodyPr wrap="square" lIns="0" tIns="0" rIns="0" bIns="0" anchor="ctr">
             <a:spAutoFit/>
           </a:bodyPr>
           <a:lstStyle/>
@@ -13610,7 +14082,7 @@
           <a:noFill/>
         </p:spPr>
         <p:txBody>
-          <a:bodyPr wrap="square" lIns="0" rIns="0" tIns="0" bIns="0" anchor="ctr">
+          <a:bodyPr wrap="square" lIns="0" tIns="0" rIns="0" bIns="0" anchor="ctr">
             <a:spAutoFit/>
           </a:bodyPr>
           <a:lstStyle/>
@@ -13668,6 +14140,7 @@
           <a:lstStyle/>
           <a:p>
             <a:pPr algn="ctr"/>
+            <a:endParaRPr/>
           </a:p>
         </p:txBody>
       </p:sp>
@@ -13688,7 +14161,7 @@
           <a:noFill/>
         </p:spPr>
         <p:txBody>
-          <a:bodyPr wrap="square" lIns="0" rIns="0" tIns="0" bIns="0" anchor="ctr">
+          <a:bodyPr wrap="square" lIns="0" tIns="0" rIns="0" bIns="0" anchor="ctr">
             <a:spAutoFit/>
           </a:bodyPr>
           <a:lstStyle/>
@@ -13723,7 +14196,7 @@
           <a:noFill/>
         </p:spPr>
         <p:txBody>
-          <a:bodyPr wrap="square" lIns="0" rIns="0" tIns="0" bIns="0" anchor="ctr">
+          <a:bodyPr wrap="square" lIns="0" tIns="0" rIns="0" bIns="0" anchor="ctr">
             <a:spAutoFit/>
           </a:bodyPr>
           <a:lstStyle/>
@@ -13781,6 +14254,7 @@
           <a:lstStyle/>
           <a:p>
             <a:pPr algn="ctr"/>
+            <a:endParaRPr/>
           </a:p>
         </p:txBody>
       </p:sp>
@@ -13801,7 +14275,7 @@
           <a:noFill/>
         </p:spPr>
         <p:txBody>
-          <a:bodyPr wrap="square" lIns="0" rIns="0" tIns="0" bIns="0" anchor="ctr">
+          <a:bodyPr wrap="square" lIns="0" tIns="0" rIns="0" bIns="0" anchor="ctr">
             <a:spAutoFit/>
           </a:bodyPr>
           <a:lstStyle/>
@@ -13859,6 +14333,7 @@
           <a:lstStyle/>
           <a:p>
             <a:pPr algn="ctr"/>
+            <a:endParaRPr/>
           </a:p>
         </p:txBody>
       </p:sp>
@@ -13902,6 +14377,7 @@
           <a:lstStyle/>
           <a:p>
             <a:pPr algn="ctr"/>
+            <a:endParaRPr/>
           </a:p>
         </p:txBody>
       </p:sp>
@@ -13922,7 +14398,7 @@
           <a:noFill/>
         </p:spPr>
         <p:txBody>
-          <a:bodyPr wrap="square" lIns="0" rIns="0" tIns="0" bIns="0" anchor="ctr">
+          <a:bodyPr wrap="square" lIns="0" tIns="0" rIns="0" bIns="0" anchor="ctr">
             <a:spAutoFit/>
           </a:bodyPr>
           <a:lstStyle/>
@@ -13957,7 +14433,7 @@
           <a:noFill/>
         </p:spPr>
         <p:txBody>
-          <a:bodyPr wrap="square" lIns="0" rIns="0" tIns="0" bIns="0" anchor="ctr">
+          <a:bodyPr wrap="square" lIns="0" tIns="0" rIns="0" bIns="0" anchor="ctr">
             <a:spAutoFit/>
           </a:bodyPr>
           <a:lstStyle/>
@@ -13984,7 +14460,7 @@
 </file>
 
 <file path=ppt/slides/slide5.xml><?xml version="1.0" encoding="utf-8"?>
-<p:sld xmlns:a="http://schemas.openxmlformats.org/drawingml/2006/main" xmlns:p="http://schemas.openxmlformats.org/presentationml/2006/main" xmlns:r="http://schemas.openxmlformats.org/officeDocument/2006/relationships">
+<p:sld xmlns:a="http://schemas.openxmlformats.org/drawingml/2006/main" xmlns:r="http://schemas.openxmlformats.org/officeDocument/2006/relationships" xmlns:p="http://schemas.openxmlformats.org/presentationml/2006/main">
   <p:cSld>
     <p:bg>
       <p:bgPr>
@@ -14000,7 +14476,14 @@
         <p:cNvGrpSpPr/>
         <p:nvPr/>
       </p:nvGrpSpPr>
-      <p:grpSpPr/>
+      <p:grpSpPr>
+        <a:xfrm>
+          <a:off x="0" y="0"/>
+          <a:ext cx="0" cy="0"/>
+          <a:chOff x="0" y="0"/>
+          <a:chExt cx="0" cy="0"/>
+        </a:xfrm>
+      </p:grpSpPr>
       <p:sp>
         <p:nvSpPr>
           <p:cNvPr id="2" name="Rectangle 1"/>
@@ -14041,6 +14524,7 @@
           <a:lstStyle/>
           <a:p>
             <a:pPr algn="ctr"/>
+            <a:endParaRPr/>
           </a:p>
         </p:txBody>
       </p:sp>
@@ -14061,7 +14545,7 @@
           <a:noFill/>
         </p:spPr>
         <p:txBody>
-          <a:bodyPr wrap="square" lIns="0" rIns="0" tIns="0" bIns="0" anchor="ctr">
+          <a:bodyPr wrap="square" lIns="0" tIns="0" rIns="0" bIns="0" anchor="ctr">
             <a:spAutoFit/>
           </a:bodyPr>
           <a:lstStyle/>
@@ -14096,7 +14580,7 @@
           <a:noFill/>
         </p:spPr>
         <p:txBody>
-          <a:bodyPr wrap="square" lIns="0" rIns="0" tIns="0" bIns="0" anchor="ctr">
+          <a:bodyPr wrap="square" lIns="0" tIns="0" rIns="0" bIns="0" anchor="ctr">
             <a:spAutoFit/>
           </a:bodyPr>
           <a:lstStyle/>
@@ -14131,7 +14615,7 @@
           <a:noFill/>
         </p:spPr>
         <p:txBody>
-          <a:bodyPr wrap="square" lIns="0" rIns="0" tIns="0" bIns="0" anchor="ctr">
+          <a:bodyPr wrap="square" lIns="0" tIns="0" rIns="0" bIns="0" anchor="ctr">
             <a:spAutoFit/>
           </a:bodyPr>
           <a:lstStyle/>
@@ -14189,6 +14673,7 @@
           <a:lstStyle/>
           <a:p>
             <a:pPr algn="ctr"/>
+            <a:endParaRPr/>
           </a:p>
         </p:txBody>
       </p:sp>
@@ -14209,7 +14694,7 @@
           <a:noFill/>
         </p:spPr>
         <p:txBody>
-          <a:bodyPr wrap="square" lIns="0" rIns="0" tIns="0" bIns="0" anchor="ctr">
+          <a:bodyPr wrap="square" lIns="0" tIns="0" rIns="0" bIns="0" anchor="ctr">
             <a:spAutoFit/>
           </a:bodyPr>
           <a:lstStyle/>
@@ -14244,7 +14729,7 @@
           <a:noFill/>
         </p:spPr>
         <p:txBody>
-          <a:bodyPr wrap="square" lIns="0" rIns="0" tIns="0" bIns="0" anchor="ctr">
+          <a:bodyPr wrap="square" lIns="0" tIns="0" rIns="0" bIns="0" anchor="ctr">
             <a:spAutoFit/>
           </a:bodyPr>
           <a:lstStyle/>
@@ -14306,6 +14791,7 @@
           <a:lstStyle/>
           <a:p>
             <a:pPr algn="ctr"/>
+            <a:endParaRPr/>
           </a:p>
         </p:txBody>
       </p:sp>
@@ -14326,7 +14812,7 @@
           <a:noFill/>
         </p:spPr>
         <p:txBody>
-          <a:bodyPr wrap="square" lIns="0" rIns="0" tIns="0" bIns="0" anchor="ctr">
+          <a:bodyPr wrap="square" lIns="0" tIns="0" rIns="0" bIns="0" anchor="ctr">
             <a:spAutoFit/>
           </a:bodyPr>
           <a:lstStyle/>
@@ -14361,7 +14847,7 @@
           <a:noFill/>
         </p:spPr>
         <p:txBody>
-          <a:bodyPr wrap="square" lIns="0" rIns="0" tIns="0" bIns="0" anchor="ctr">
+          <a:bodyPr wrap="square" lIns="0" tIns="0" rIns="0" bIns="0" anchor="ctr">
             <a:spAutoFit/>
           </a:bodyPr>
           <a:lstStyle/>
@@ -14419,6 +14905,7 @@
           <a:lstStyle/>
           <a:p>
             <a:pPr algn="ctr"/>
+            <a:endParaRPr/>
           </a:p>
         </p:txBody>
       </p:sp>
@@ -14462,6 +14949,7 @@
           <a:lstStyle/>
           <a:p>
             <a:pPr algn="ctr"/>
+            <a:endParaRPr/>
           </a:p>
         </p:txBody>
       </p:sp>
@@ -14482,7 +14970,7 @@
           <a:noFill/>
         </p:spPr>
         <p:txBody>
-          <a:bodyPr wrap="square" lIns="0" rIns="0" tIns="0" bIns="0" anchor="ctr">
+          <a:bodyPr wrap="square" lIns="0" tIns="0" rIns="0" bIns="0" anchor="ctr">
             <a:spAutoFit/>
           </a:bodyPr>
           <a:lstStyle/>
@@ -14517,7 +15005,7 @@
           <a:noFill/>
         </p:spPr>
         <p:txBody>
-          <a:bodyPr wrap="square" lIns="0" rIns="0" tIns="0" bIns="0" anchor="ctr">
+          <a:bodyPr wrap="square" lIns="0" tIns="0" rIns="0" bIns="0" anchor="ctr">
             <a:spAutoFit/>
           </a:bodyPr>
           <a:lstStyle/>
@@ -14575,6 +15063,7 @@
           <a:lstStyle/>
           <a:p>
             <a:pPr algn="ctr"/>
+            <a:endParaRPr/>
           </a:p>
         </p:txBody>
       </p:sp>
@@ -14618,6 +15107,7 @@
           <a:lstStyle/>
           <a:p>
             <a:pPr algn="ctr"/>
+            <a:endParaRPr/>
           </a:p>
         </p:txBody>
       </p:sp>
@@ -14638,7 +15128,7 @@
           <a:noFill/>
         </p:spPr>
         <p:txBody>
-          <a:bodyPr wrap="square" lIns="0" rIns="0" tIns="0" bIns="0" anchor="ctr">
+          <a:bodyPr wrap="square" lIns="0" tIns="0" rIns="0" bIns="0" anchor="ctr">
             <a:spAutoFit/>
           </a:bodyPr>
           <a:lstStyle/>
@@ -14673,7 +15163,7 @@
           <a:noFill/>
         </p:spPr>
         <p:txBody>
-          <a:bodyPr wrap="square" lIns="0" rIns="0" tIns="0" bIns="0" anchor="ctr">
+          <a:bodyPr wrap="square" lIns="0" tIns="0" rIns="0" bIns="0" anchor="ctr">
             <a:spAutoFit/>
           </a:bodyPr>
           <a:lstStyle/>
@@ -14731,6 +15221,7 @@
           <a:lstStyle/>
           <a:p>
             <a:pPr algn="ctr"/>
+            <a:endParaRPr/>
           </a:p>
         </p:txBody>
       </p:sp>
@@ -14774,6 +15265,7 @@
           <a:lstStyle/>
           <a:p>
             <a:pPr algn="ctr"/>
+            <a:endParaRPr/>
           </a:p>
         </p:txBody>
       </p:sp>
@@ -14794,7 +15286,7 @@
           <a:noFill/>
         </p:spPr>
         <p:txBody>
-          <a:bodyPr wrap="square" lIns="0" rIns="0" tIns="0" bIns="0" anchor="ctr">
+          <a:bodyPr wrap="square" lIns="0" tIns="0" rIns="0" bIns="0" anchor="ctr">
             <a:spAutoFit/>
           </a:bodyPr>
           <a:lstStyle/>
@@ -14856,6 +15348,7 @@
           <a:lstStyle/>
           <a:p>
             <a:pPr algn="ctr"/>
+            <a:endParaRPr/>
           </a:p>
         </p:txBody>
       </p:sp>
@@ -14876,7 +15369,7 @@
           <a:noFill/>
         </p:spPr>
         <p:txBody>
-          <a:bodyPr wrap="square" lIns="0" rIns="0" tIns="0" bIns="0" anchor="ctr">
+          <a:bodyPr wrap="square" lIns="0" tIns="0" rIns="0" bIns="0" anchor="ctr">
             <a:spAutoFit/>
           </a:bodyPr>
           <a:lstStyle/>
@@ -14911,7 +15404,7 @@
           <a:noFill/>
         </p:spPr>
         <p:txBody>
-          <a:bodyPr wrap="square" lIns="0" rIns="0" tIns="0" bIns="0" anchor="ctr">
+          <a:bodyPr wrap="square" lIns="0" tIns="0" rIns="0" bIns="0" anchor="ctr">
             <a:spAutoFit/>
           </a:bodyPr>
           <a:lstStyle/>
@@ -14969,6 +15462,7 @@
           <a:lstStyle/>
           <a:p>
             <a:pPr algn="ctr"/>
+            <a:endParaRPr/>
           </a:p>
         </p:txBody>
       </p:sp>
@@ -15012,6 +15506,7 @@
           <a:lstStyle/>
           <a:p>
             <a:pPr algn="ctr"/>
+            <a:endParaRPr/>
           </a:p>
         </p:txBody>
       </p:sp>
@@ -15032,7 +15527,7 @@
           <a:noFill/>
         </p:spPr>
         <p:txBody>
-          <a:bodyPr wrap="square" lIns="0" rIns="0" tIns="0" bIns="0" anchor="ctr">
+          <a:bodyPr wrap="square" lIns="0" tIns="0" rIns="0" bIns="0" anchor="ctr">
             <a:spAutoFit/>
           </a:bodyPr>
           <a:lstStyle/>
@@ -15067,7 +15562,7 @@
           <a:noFill/>
         </p:spPr>
         <p:txBody>
-          <a:bodyPr wrap="square" lIns="0" rIns="0" tIns="0" bIns="0" anchor="ctr">
+          <a:bodyPr wrap="square" lIns="0" tIns="0" rIns="0" bIns="0" anchor="ctr">
             <a:spAutoFit/>
           </a:bodyPr>
           <a:lstStyle/>
@@ -15125,6 +15620,7 @@
           <a:lstStyle/>
           <a:p>
             <a:pPr algn="ctr"/>
+            <a:endParaRPr/>
           </a:p>
         </p:txBody>
       </p:sp>
@@ -15168,6 +15664,7 @@
           <a:lstStyle/>
           <a:p>
             <a:pPr algn="ctr"/>
+            <a:endParaRPr/>
           </a:p>
         </p:txBody>
       </p:sp>
@@ -15188,7 +15685,7 @@
           <a:noFill/>
         </p:spPr>
         <p:txBody>
-          <a:bodyPr wrap="square" lIns="0" rIns="0" tIns="0" bIns="0" anchor="ctr">
+          <a:bodyPr wrap="square" lIns="0" tIns="0" rIns="0" bIns="0" anchor="ctr">
             <a:spAutoFit/>
           </a:bodyPr>
           <a:lstStyle/>
@@ -15223,7 +15720,7 @@
           <a:noFill/>
         </p:spPr>
         <p:txBody>
-          <a:bodyPr wrap="square" lIns="0" rIns="0" tIns="0" bIns="0" anchor="ctr">
+          <a:bodyPr wrap="square" lIns="0" tIns="0" rIns="0" bIns="0" anchor="ctr">
             <a:spAutoFit/>
           </a:bodyPr>
           <a:lstStyle/>
@@ -15281,6 +15778,7 @@
           <a:lstStyle/>
           <a:p>
             <a:pPr algn="ctr"/>
+            <a:endParaRPr/>
           </a:p>
         </p:txBody>
       </p:sp>
@@ -15324,6 +15822,7 @@
           <a:lstStyle/>
           <a:p>
             <a:pPr algn="ctr"/>
+            <a:endParaRPr/>
           </a:p>
         </p:txBody>
       </p:sp>
@@ -15344,7 +15843,7 @@
           <a:noFill/>
         </p:spPr>
         <p:txBody>
-          <a:bodyPr wrap="square" lIns="0" rIns="0" tIns="0" bIns="0" anchor="ctr">
+          <a:bodyPr wrap="square" lIns="0" tIns="0" rIns="0" bIns="0" anchor="ctr">
             <a:spAutoFit/>
           </a:bodyPr>
           <a:lstStyle/>
@@ -15406,6 +15905,7 @@
           <a:lstStyle/>
           <a:p>
             <a:pPr algn="ctr"/>
+            <a:endParaRPr/>
           </a:p>
         </p:txBody>
       </p:sp>
@@ -15426,7 +15926,7 @@
           <a:noFill/>
         </p:spPr>
         <p:txBody>
-          <a:bodyPr wrap="square" lIns="0" rIns="0" tIns="0" bIns="0" anchor="ctr">
+          <a:bodyPr wrap="square" lIns="0" tIns="0" rIns="0" bIns="0" anchor="ctr">
             <a:spAutoFit/>
           </a:bodyPr>
           <a:lstStyle/>
@@ -15461,7 +15961,7 @@
           <a:noFill/>
         </p:spPr>
         <p:txBody>
-          <a:bodyPr wrap="square" lIns="0" rIns="0" tIns="0" bIns="0" anchor="ctr">
+          <a:bodyPr wrap="square" lIns="0" tIns="0" rIns="0" bIns="0" anchor="ctr">
             <a:spAutoFit/>
           </a:bodyPr>
           <a:lstStyle/>
@@ -15519,6 +16019,7 @@
           <a:lstStyle/>
           <a:p>
             <a:pPr algn="ctr"/>
+            <a:endParaRPr/>
           </a:p>
         </p:txBody>
       </p:sp>
@@ -15562,6 +16063,7 @@
           <a:lstStyle/>
           <a:p>
             <a:pPr algn="ctr"/>
+            <a:endParaRPr/>
           </a:p>
         </p:txBody>
       </p:sp>
@@ -15582,7 +16084,7 @@
           <a:noFill/>
         </p:spPr>
         <p:txBody>
-          <a:bodyPr wrap="square" lIns="0" rIns="0" tIns="0" bIns="0" anchor="ctr">
+          <a:bodyPr wrap="square" lIns="0" tIns="0" rIns="0" bIns="0" anchor="ctr">
             <a:spAutoFit/>
           </a:bodyPr>
           <a:lstStyle/>
@@ -15617,7 +16119,7 @@
           <a:noFill/>
         </p:spPr>
         <p:txBody>
-          <a:bodyPr wrap="square" lIns="0" rIns="0" tIns="0" bIns="0" anchor="ctr">
+          <a:bodyPr wrap="square" lIns="0" tIns="0" rIns="0" bIns="0" anchor="ctr">
             <a:spAutoFit/>
           </a:bodyPr>
           <a:lstStyle/>
@@ -15675,6 +16177,7 @@
           <a:lstStyle/>
           <a:p>
             <a:pPr algn="ctr"/>
+            <a:endParaRPr/>
           </a:p>
         </p:txBody>
       </p:sp>
@@ -15718,6 +16221,7 @@
           <a:lstStyle/>
           <a:p>
             <a:pPr algn="ctr"/>
+            <a:endParaRPr/>
           </a:p>
         </p:txBody>
       </p:sp>
@@ -15738,7 +16242,7 @@
           <a:noFill/>
         </p:spPr>
         <p:txBody>
-          <a:bodyPr wrap="square" lIns="0" rIns="0" tIns="0" bIns="0" anchor="ctr">
+          <a:bodyPr wrap="square" lIns="0" tIns="0" rIns="0" bIns="0" anchor="ctr">
             <a:spAutoFit/>
           </a:bodyPr>
           <a:lstStyle/>
@@ -15773,7 +16277,7 @@
           <a:noFill/>
         </p:spPr>
         <p:txBody>
-          <a:bodyPr wrap="square" lIns="0" rIns="0" tIns="0" bIns="0" anchor="ctr">
+          <a:bodyPr wrap="square" lIns="0" tIns="0" rIns="0" bIns="0" anchor="ctr">
             <a:spAutoFit/>
           </a:bodyPr>
           <a:lstStyle/>
@@ -15831,6 +16335,7 @@
           <a:lstStyle/>
           <a:p>
             <a:pPr algn="ctr"/>
+            <a:endParaRPr/>
           </a:p>
         </p:txBody>
       </p:sp>
@@ -15874,6 +16379,7 @@
           <a:lstStyle/>
           <a:p>
             <a:pPr algn="ctr"/>
+            <a:endParaRPr/>
           </a:p>
         </p:txBody>
       </p:sp>
@@ -15894,7 +16400,7 @@
           <a:noFill/>
         </p:spPr>
         <p:txBody>
-          <a:bodyPr wrap="square" lIns="0" rIns="0" tIns="0" bIns="0" anchor="ctr">
+          <a:bodyPr wrap="square" lIns="0" tIns="0" rIns="0" bIns="0" anchor="ctr">
             <a:spAutoFit/>
           </a:bodyPr>
           <a:lstStyle/>
@@ -15952,6 +16458,7 @@
           <a:lstStyle/>
           <a:p>
             <a:pPr algn="ctr"/>
+            <a:endParaRPr/>
           </a:p>
         </p:txBody>
       </p:sp>
@@ -15995,6 +16502,7 @@
           <a:lstStyle/>
           <a:p>
             <a:pPr algn="ctr"/>
+            <a:endParaRPr/>
           </a:p>
         </p:txBody>
       </p:sp>
@@ -16015,7 +16523,7 @@
           <a:noFill/>
         </p:spPr>
         <p:txBody>
-          <a:bodyPr wrap="square" lIns="0" rIns="0" tIns="0" bIns="0" anchor="ctr">
+          <a:bodyPr wrap="square" lIns="0" tIns="0" rIns="0" bIns="0" anchor="ctr">
             <a:spAutoFit/>
           </a:bodyPr>
           <a:lstStyle/>
@@ -16050,7 +16558,7 @@
           <a:noFill/>
         </p:spPr>
         <p:txBody>
-          <a:bodyPr wrap="square" lIns="0" rIns="0" tIns="0" bIns="0" anchor="ctr">
+          <a:bodyPr wrap="square" lIns="0" tIns="0" rIns="0" bIns="0" anchor="ctr">
             <a:spAutoFit/>
           </a:bodyPr>
           <a:lstStyle/>
@@ -16077,7 +16585,7 @@
 </file>
 
 <file path=ppt/slides/slide6.xml><?xml version="1.0" encoding="utf-8"?>
-<p:sld xmlns:a="http://schemas.openxmlformats.org/drawingml/2006/main" xmlns:p="http://schemas.openxmlformats.org/presentationml/2006/main" xmlns:r="http://schemas.openxmlformats.org/officeDocument/2006/relationships">
+<p:sld xmlns:a="http://schemas.openxmlformats.org/drawingml/2006/main" xmlns:r="http://schemas.openxmlformats.org/officeDocument/2006/relationships" xmlns:p="http://schemas.openxmlformats.org/presentationml/2006/main">
   <p:cSld>
     <p:bg>
       <p:bgPr>
@@ -16093,7 +16601,14 @@
         <p:cNvGrpSpPr/>
         <p:nvPr/>
       </p:nvGrpSpPr>
-      <p:grpSpPr/>
+      <p:grpSpPr>
+        <a:xfrm>
+          <a:off x="0" y="0"/>
+          <a:ext cx="0" cy="0"/>
+          <a:chOff x="0" y="0"/>
+          <a:chExt cx="0" cy="0"/>
+        </a:xfrm>
+      </p:grpSpPr>
       <p:sp>
         <p:nvSpPr>
           <p:cNvPr id="2" name="Rectangle 1"/>
@@ -16134,6 +16649,7 @@
           <a:lstStyle/>
           <a:p>
             <a:pPr algn="ctr"/>
+            <a:endParaRPr/>
           </a:p>
         </p:txBody>
       </p:sp>
@@ -16154,7 +16670,7 @@
           <a:noFill/>
         </p:spPr>
         <p:txBody>
-          <a:bodyPr wrap="square" lIns="0" rIns="0" tIns="0" bIns="0" anchor="ctr">
+          <a:bodyPr wrap="square" lIns="0" tIns="0" rIns="0" bIns="0" anchor="ctr">
             <a:spAutoFit/>
           </a:bodyPr>
           <a:lstStyle/>
@@ -16189,7 +16705,7 @@
           <a:noFill/>
         </p:spPr>
         <p:txBody>
-          <a:bodyPr wrap="square" lIns="0" rIns="0" tIns="0" bIns="0" anchor="ctr">
+          <a:bodyPr wrap="square" lIns="0" tIns="0" rIns="0" bIns="0" anchor="ctr">
             <a:spAutoFit/>
           </a:bodyPr>
           <a:lstStyle/>
@@ -16224,7 +16740,7 @@
           <a:noFill/>
         </p:spPr>
         <p:txBody>
-          <a:bodyPr wrap="square" lIns="0" rIns="0" tIns="0" bIns="0" anchor="ctr">
+          <a:bodyPr wrap="square" lIns="0" tIns="0" rIns="0" bIns="0" anchor="ctr">
             <a:spAutoFit/>
           </a:bodyPr>
           <a:lstStyle/>
@@ -16282,6 +16798,7 @@
           <a:lstStyle/>
           <a:p>
             <a:pPr algn="ctr"/>
+            <a:endParaRPr/>
           </a:p>
         </p:txBody>
       </p:sp>
@@ -16302,7 +16819,7 @@
           <a:noFill/>
         </p:spPr>
         <p:txBody>
-          <a:bodyPr wrap="square" lIns="0" rIns="0" tIns="0" bIns="0" anchor="ctr">
+          <a:bodyPr wrap="square" lIns="0" tIns="0" rIns="0" bIns="0" anchor="ctr">
             <a:spAutoFit/>
           </a:bodyPr>
           <a:lstStyle/>
@@ -16337,7 +16854,7 @@
           <a:noFill/>
         </p:spPr>
         <p:txBody>
-          <a:bodyPr wrap="square" lIns="0" rIns="0" tIns="0" bIns="0" anchor="ctr">
+          <a:bodyPr wrap="square" lIns="0" tIns="0" rIns="0" bIns="0" anchor="ctr">
             <a:spAutoFit/>
           </a:bodyPr>
           <a:lstStyle/>
@@ -16399,6 +16916,7 @@
           <a:lstStyle/>
           <a:p>
             <a:pPr algn="ctr"/>
+            <a:endParaRPr/>
           </a:p>
         </p:txBody>
       </p:sp>
@@ -16442,6 +16960,7 @@
           <a:lstStyle/>
           <a:p>
             <a:pPr algn="ctr"/>
+            <a:endParaRPr/>
           </a:p>
         </p:txBody>
       </p:sp>
@@ -16462,7 +16981,7 @@
           <a:noFill/>
         </p:spPr>
         <p:txBody>
-          <a:bodyPr wrap="square" lIns="0" rIns="0" tIns="0" bIns="0" anchor="ctr">
+          <a:bodyPr wrap="square" lIns="0" tIns="0" rIns="0" bIns="0" anchor="ctr">
             <a:spAutoFit/>
           </a:bodyPr>
           <a:lstStyle/>
@@ -16497,7 +17016,7 @@
           <a:noFill/>
         </p:spPr>
         <p:txBody>
-          <a:bodyPr wrap="square" lIns="0" rIns="0" tIns="0" bIns="0" anchor="t">
+          <a:bodyPr wrap="square" lIns="0" tIns="0" rIns="0" bIns="0" anchor="t">
             <a:spAutoFit/>
           </a:bodyPr>
           <a:lstStyle/>
@@ -16561,6 +17080,7 @@
           <a:lstStyle/>
           <a:p>
             <a:pPr algn="ctr"/>
+            <a:endParaRPr/>
           </a:p>
         </p:txBody>
       </p:sp>
@@ -16604,6 +17124,7 @@
           <a:lstStyle/>
           <a:p>
             <a:pPr algn="ctr"/>
+            <a:endParaRPr/>
           </a:p>
         </p:txBody>
       </p:sp>
@@ -16624,7 +17145,7 @@
           <a:noFill/>
         </p:spPr>
         <p:txBody>
-          <a:bodyPr wrap="square" lIns="0" rIns="0" tIns="0" bIns="0" anchor="ctr">
+          <a:bodyPr wrap="square" lIns="0" tIns="0" rIns="0" bIns="0" anchor="ctr">
             <a:spAutoFit/>
           </a:bodyPr>
           <a:lstStyle/>
@@ -16659,7 +17180,7 @@
           <a:noFill/>
         </p:spPr>
         <p:txBody>
-          <a:bodyPr wrap="square" lIns="0" rIns="0" tIns="0" bIns="0" anchor="t">
+          <a:bodyPr wrap="square" lIns="0" tIns="0" rIns="0" bIns="0" anchor="t">
             <a:spAutoFit/>
           </a:bodyPr>
           <a:lstStyle/>
@@ -16719,6 +17240,7 @@
           <a:lstStyle/>
           <a:p>
             <a:pPr algn="ctr"/>
+            <a:endParaRPr/>
           </a:p>
         </p:txBody>
       </p:sp>
@@ -16762,6 +17284,7 @@
           <a:lstStyle/>
           <a:p>
             <a:pPr algn="ctr"/>
+            <a:endParaRPr/>
           </a:p>
         </p:txBody>
       </p:sp>
@@ -16782,7 +17305,7 @@
           <a:noFill/>
         </p:spPr>
         <p:txBody>
-          <a:bodyPr wrap="square" lIns="0" rIns="0" tIns="0" bIns="0" anchor="ctr">
+          <a:bodyPr wrap="square" lIns="0" tIns="0" rIns="0" bIns="0" anchor="ctr">
             <a:spAutoFit/>
           </a:bodyPr>
           <a:lstStyle/>
@@ -16817,7 +17340,7 @@
           <a:noFill/>
         </p:spPr>
         <p:txBody>
-          <a:bodyPr wrap="square" lIns="0" rIns="0" tIns="0" bIns="0" anchor="ctr">
+          <a:bodyPr wrap="square" lIns="0" tIns="0" rIns="0" bIns="0" anchor="ctr">
             <a:spAutoFit/>
           </a:bodyPr>
           <a:lstStyle/>
@@ -16844,7 +17367,7 @@
 </file>
 
 <file path=ppt/slides/slide7.xml><?xml version="1.0" encoding="utf-8"?>
-<p:sld xmlns:a="http://schemas.openxmlformats.org/drawingml/2006/main" xmlns:p="http://schemas.openxmlformats.org/presentationml/2006/main" xmlns:r="http://schemas.openxmlformats.org/officeDocument/2006/relationships">
+<p:sld xmlns:a="http://schemas.openxmlformats.org/drawingml/2006/main" xmlns:r="http://schemas.openxmlformats.org/officeDocument/2006/relationships" xmlns:p="http://schemas.openxmlformats.org/presentationml/2006/main">
   <p:cSld>
     <p:bg>
       <p:bgPr>
@@ -16860,7 +17383,14 @@
         <p:cNvGrpSpPr/>
         <p:nvPr/>
       </p:nvGrpSpPr>
-      <p:grpSpPr/>
+      <p:grpSpPr>
+        <a:xfrm>
+          <a:off x="0" y="0"/>
+          <a:ext cx="0" cy="0"/>
+          <a:chOff x="0" y="0"/>
+          <a:chExt cx="0" cy="0"/>
+        </a:xfrm>
+      </p:grpSpPr>
       <p:sp>
         <p:nvSpPr>
           <p:cNvPr id="2" name="Rectangle 1"/>
@@ -16901,6 +17431,7 @@
           <a:lstStyle/>
           <a:p>
             <a:pPr algn="ctr"/>
+            <a:endParaRPr/>
           </a:p>
         </p:txBody>
       </p:sp>
@@ -16921,7 +17452,7 @@
           <a:noFill/>
         </p:spPr>
         <p:txBody>
-          <a:bodyPr wrap="square" lIns="0" rIns="0" tIns="0" bIns="0" anchor="ctr">
+          <a:bodyPr wrap="square" lIns="0" tIns="0" rIns="0" bIns="0" anchor="ctr">
             <a:spAutoFit/>
           </a:bodyPr>
           <a:lstStyle/>
@@ -16956,7 +17487,7 @@
           <a:noFill/>
         </p:spPr>
         <p:txBody>
-          <a:bodyPr wrap="square" lIns="0" rIns="0" tIns="0" bIns="0" anchor="ctr">
+          <a:bodyPr wrap="square" lIns="0" tIns="0" rIns="0" bIns="0" anchor="ctr">
             <a:spAutoFit/>
           </a:bodyPr>
           <a:lstStyle/>
@@ -16991,7 +17522,7 @@
           <a:noFill/>
         </p:spPr>
         <p:txBody>
-          <a:bodyPr wrap="square" lIns="0" rIns="0" tIns="0" bIns="0" anchor="ctr">
+          <a:bodyPr wrap="square" lIns="0" tIns="0" rIns="0" bIns="0" anchor="ctr">
             <a:spAutoFit/>
           </a:bodyPr>
           <a:lstStyle/>
@@ -17049,6 +17580,7 @@
           <a:lstStyle/>
           <a:p>
             <a:pPr algn="ctr"/>
+            <a:endParaRPr/>
           </a:p>
         </p:txBody>
       </p:sp>
@@ -17069,7 +17601,7 @@
           <a:noFill/>
         </p:spPr>
         <p:txBody>
-          <a:bodyPr wrap="square" lIns="0" rIns="0" tIns="0" bIns="0" anchor="ctr">
+          <a:bodyPr wrap="square" lIns="0" tIns="0" rIns="0" bIns="0" anchor="ctr">
             <a:spAutoFit/>
           </a:bodyPr>
           <a:lstStyle/>
@@ -17104,7 +17636,7 @@
           <a:noFill/>
         </p:spPr>
         <p:txBody>
-          <a:bodyPr wrap="square" lIns="0" rIns="0" tIns="0" bIns="0" anchor="ctr">
+          <a:bodyPr wrap="square" lIns="0" tIns="0" rIns="0" bIns="0" anchor="ctr">
             <a:spAutoFit/>
           </a:bodyPr>
           <a:lstStyle/>
@@ -17166,6 +17698,7 @@
           <a:lstStyle/>
           <a:p>
             <a:pPr algn="ctr"/>
+            <a:endParaRPr/>
           </a:p>
         </p:txBody>
       </p:sp>
@@ -17186,7 +17719,7 @@
           <a:noFill/>
         </p:spPr>
         <p:txBody>
-          <a:bodyPr wrap="square" lIns="0" rIns="0" tIns="0" bIns="0" anchor="ctr">
+          <a:bodyPr wrap="square" lIns="0" tIns="0" rIns="0" bIns="0" anchor="ctr">
             <a:spAutoFit/>
           </a:bodyPr>
           <a:lstStyle/>
@@ -17221,7 +17754,7 @@
           <a:noFill/>
         </p:spPr>
         <p:txBody>
-          <a:bodyPr wrap="square" lIns="0" rIns="0" tIns="0" bIns="0" anchor="ctr">
+          <a:bodyPr wrap="square" lIns="0" tIns="0" rIns="0" bIns="0" anchor="ctr">
             <a:spAutoFit/>
           </a:bodyPr>
           <a:lstStyle/>
@@ -17283,6 +17816,7 @@
           <a:lstStyle/>
           <a:p>
             <a:pPr algn="ctr"/>
+            <a:endParaRPr/>
           </a:p>
         </p:txBody>
       </p:sp>
@@ -17303,7 +17837,7 @@
           <a:noFill/>
         </p:spPr>
         <p:txBody>
-          <a:bodyPr wrap="square" lIns="0" rIns="0" tIns="0" bIns="0" anchor="ctr">
+          <a:bodyPr wrap="square" lIns="0" tIns="0" rIns="0" bIns="0" anchor="ctr">
             <a:spAutoFit/>
           </a:bodyPr>
           <a:lstStyle/>
@@ -17338,7 +17872,7 @@
           <a:noFill/>
         </p:spPr>
         <p:txBody>
-          <a:bodyPr wrap="square" lIns="0" rIns="0" tIns="0" bIns="0" anchor="ctr">
+          <a:bodyPr wrap="square" lIns="0" tIns="0" rIns="0" bIns="0" anchor="ctr">
             <a:spAutoFit/>
           </a:bodyPr>
           <a:lstStyle/>
@@ -17400,6 +17934,7 @@
           <a:lstStyle/>
           <a:p>
             <a:pPr algn="ctr"/>
+            <a:endParaRPr/>
           </a:p>
         </p:txBody>
       </p:sp>
@@ -17420,7 +17955,7 @@
           <a:noFill/>
         </p:spPr>
         <p:txBody>
-          <a:bodyPr wrap="square" lIns="0" rIns="0" tIns="0" bIns="0" anchor="ctr">
+          <a:bodyPr wrap="square" lIns="0" tIns="0" rIns="0" bIns="0" anchor="ctr">
             <a:spAutoFit/>
           </a:bodyPr>
           <a:lstStyle/>
@@ -17455,7 +17990,7 @@
           <a:noFill/>
         </p:spPr>
         <p:txBody>
-          <a:bodyPr wrap="square" lIns="0" rIns="0" tIns="0" bIns="0" anchor="ctr">
+          <a:bodyPr wrap="square" lIns="0" tIns="0" rIns="0" bIns="0" anchor="ctr">
             <a:spAutoFit/>
           </a:bodyPr>
           <a:lstStyle/>
@@ -17517,6 +18052,7 @@
           <a:lstStyle/>
           <a:p>
             <a:pPr algn="ctr"/>
+            <a:endParaRPr/>
           </a:p>
         </p:txBody>
       </p:sp>
@@ -17560,6 +18096,7 @@
           <a:lstStyle/>
           <a:p>
             <a:pPr algn="ctr"/>
+            <a:endParaRPr/>
           </a:p>
         </p:txBody>
       </p:sp>
@@ -17580,7 +18117,7 @@
           <a:noFill/>
         </p:spPr>
         <p:txBody>
-          <a:bodyPr wrap="square" lIns="0" rIns="0" tIns="0" bIns="0" anchor="ctr">
+          <a:bodyPr wrap="square" lIns="0" tIns="0" rIns="0" bIns="0" anchor="ctr">
             <a:spAutoFit/>
           </a:bodyPr>
           <a:lstStyle/>
@@ -17615,7 +18152,7 @@
           <a:noFill/>
         </p:spPr>
         <p:txBody>
-          <a:bodyPr wrap="square" lIns="0" rIns="0" tIns="0" bIns="0" anchor="t">
+          <a:bodyPr wrap="square" lIns="0" tIns="0" rIns="0" bIns="0" anchor="t">
             <a:spAutoFit/>
           </a:bodyPr>
           <a:lstStyle/>
@@ -17677,6 +18214,7 @@
           <a:lstStyle/>
           <a:p>
             <a:pPr algn="ctr"/>
+            <a:endParaRPr/>
           </a:p>
         </p:txBody>
       </p:sp>
@@ -17720,6 +18258,7 @@
           <a:lstStyle/>
           <a:p>
             <a:pPr algn="ctr"/>
+            <a:endParaRPr/>
           </a:p>
         </p:txBody>
       </p:sp>
@@ -17740,7 +18279,7 @@
           <a:noFill/>
         </p:spPr>
         <p:txBody>
-          <a:bodyPr wrap="square" lIns="0" rIns="0" tIns="0" bIns="0" anchor="ctr">
+          <a:bodyPr wrap="square" lIns="0" tIns="0" rIns="0" bIns="0" anchor="ctr">
             <a:spAutoFit/>
           </a:bodyPr>
           <a:lstStyle/>
@@ -17775,7 +18314,7 @@
           <a:noFill/>
         </p:spPr>
         <p:txBody>
-          <a:bodyPr wrap="square" lIns="0" rIns="0" tIns="0" bIns="0" anchor="t">
+          <a:bodyPr wrap="square" lIns="0" tIns="0" rIns="0" bIns="0" anchor="t">
             <a:spAutoFit/>
           </a:bodyPr>
           <a:lstStyle/>
@@ -17833,6 +18372,7 @@
           <a:lstStyle/>
           <a:p>
             <a:pPr algn="ctr"/>
+            <a:endParaRPr/>
           </a:p>
         </p:txBody>
       </p:sp>
@@ -17876,6 +18416,7 @@
           <a:lstStyle/>
           <a:p>
             <a:pPr algn="ctr"/>
+            <a:endParaRPr/>
           </a:p>
         </p:txBody>
       </p:sp>
@@ -17896,7 +18437,7 @@
           <a:noFill/>
         </p:spPr>
         <p:txBody>
-          <a:bodyPr wrap="square" lIns="0" rIns="0" tIns="0" bIns="0" anchor="ctr">
+          <a:bodyPr wrap="square" lIns="0" tIns="0" rIns="0" bIns="0" anchor="ctr">
             <a:spAutoFit/>
           </a:bodyPr>
           <a:lstStyle/>
@@ -17931,7 +18472,7 @@
           <a:noFill/>
         </p:spPr>
         <p:txBody>
-          <a:bodyPr wrap="square" lIns="0" rIns="0" tIns="0" bIns="0" anchor="ctr">
+          <a:bodyPr wrap="square" lIns="0" tIns="0" rIns="0" bIns="0" anchor="ctr">
             <a:spAutoFit/>
           </a:bodyPr>
           <a:lstStyle/>
@@ -17958,7 +18499,7 @@
 </file>
 
 <file path=ppt/slides/slide8.xml><?xml version="1.0" encoding="utf-8"?>
-<p:sld xmlns:a="http://schemas.openxmlformats.org/drawingml/2006/main" xmlns:p="http://schemas.openxmlformats.org/presentationml/2006/main" xmlns:r="http://schemas.openxmlformats.org/officeDocument/2006/relationships">
+<p:sld xmlns:a="http://schemas.openxmlformats.org/drawingml/2006/main" xmlns:r="http://schemas.openxmlformats.org/officeDocument/2006/relationships" xmlns:p="http://schemas.openxmlformats.org/presentationml/2006/main">
   <p:cSld>
     <p:bg>
       <p:bgPr>
@@ -17974,7 +18515,14 @@
         <p:cNvGrpSpPr/>
         <p:nvPr/>
       </p:nvGrpSpPr>
-      <p:grpSpPr/>
+      <p:grpSpPr>
+        <a:xfrm>
+          <a:off x="0" y="0"/>
+          <a:ext cx="0" cy="0"/>
+          <a:chOff x="0" y="0"/>
+          <a:chExt cx="0" cy="0"/>
+        </a:xfrm>
+      </p:grpSpPr>
       <p:sp>
         <p:nvSpPr>
           <p:cNvPr id="2" name="Rectangle 1"/>
@@ -18015,6 +18563,7 @@
           <a:lstStyle/>
           <a:p>
             <a:pPr algn="ctr"/>
+            <a:endParaRPr/>
           </a:p>
         </p:txBody>
       </p:sp>
@@ -18035,7 +18584,7 @@
           <a:noFill/>
         </p:spPr>
         <p:txBody>
-          <a:bodyPr wrap="square" lIns="0" rIns="0" tIns="0" bIns="0" anchor="ctr">
+          <a:bodyPr wrap="square" lIns="0" tIns="0" rIns="0" bIns="0" anchor="ctr">
             <a:spAutoFit/>
           </a:bodyPr>
           <a:lstStyle/>
@@ -18070,7 +18619,7 @@
           <a:noFill/>
         </p:spPr>
         <p:txBody>
-          <a:bodyPr wrap="square" lIns="0" rIns="0" tIns="0" bIns="0" anchor="ctr">
+          <a:bodyPr wrap="square" lIns="0" tIns="0" rIns="0" bIns="0" anchor="ctr">
             <a:spAutoFit/>
           </a:bodyPr>
           <a:lstStyle/>
@@ -18105,7 +18654,7 @@
           <a:noFill/>
         </p:spPr>
         <p:txBody>
-          <a:bodyPr wrap="square" lIns="0" rIns="0" tIns="0" bIns="0" anchor="ctr">
+          <a:bodyPr wrap="square" lIns="0" tIns="0" rIns="0" bIns="0" anchor="ctr">
             <a:spAutoFit/>
           </a:bodyPr>
           <a:lstStyle/>
@@ -18163,6 +18712,7 @@
           <a:lstStyle/>
           <a:p>
             <a:pPr algn="ctr"/>
+            <a:endParaRPr/>
           </a:p>
         </p:txBody>
       </p:sp>
@@ -18183,7 +18733,7 @@
           <a:noFill/>
         </p:spPr>
         <p:txBody>
-          <a:bodyPr wrap="square" lIns="0" rIns="0" tIns="0" bIns="0" anchor="ctr">
+          <a:bodyPr wrap="square" lIns="0" tIns="0" rIns="0" bIns="0" anchor="ctr">
             <a:spAutoFit/>
           </a:bodyPr>
           <a:lstStyle/>
@@ -18218,7 +18768,7 @@
           <a:noFill/>
         </p:spPr>
         <p:txBody>
-          <a:bodyPr wrap="square" lIns="0" rIns="0" tIns="0" bIns="0" anchor="ctr">
+          <a:bodyPr wrap="square" lIns="0" tIns="0" rIns="0" bIns="0" anchor="ctr">
             <a:spAutoFit/>
           </a:bodyPr>
           <a:lstStyle/>
@@ -18280,6 +18830,7 @@
           <a:lstStyle/>
           <a:p>
             <a:pPr algn="ctr"/>
+            <a:endParaRPr/>
           </a:p>
         </p:txBody>
       </p:sp>
@@ -18323,6 +18874,7 @@
           <a:lstStyle/>
           <a:p>
             <a:pPr algn="ctr"/>
+            <a:endParaRPr/>
           </a:p>
         </p:txBody>
       </p:sp>
@@ -18343,14 +18895,14 @@
           <a:noFill/>
         </p:spPr>
         <p:txBody>
-          <a:bodyPr wrap="square" lIns="0" rIns="0" tIns="0" bIns="0" anchor="ctr">
+          <a:bodyPr wrap="square" lIns="0" tIns="0" rIns="0" bIns="0" anchor="ctr">
             <a:spAutoFit/>
           </a:bodyPr>
           <a:lstStyle/>
           <a:p>
             <a:pPr algn="l"/>
             <a:r>
-              <a:rPr sz="1200" b="1">
+              <a:rPr sz="1200" b="1" dirty="0">
                 <a:solidFill>
                   <a:srgbClr val="008B8B"/>
                 </a:solidFill>
@@ -18369,32 +18921,89 @@
         </p:nvSpPr>
         <p:spPr>
           <a:xfrm>
-            <a:off x="914400" y="2478024"/>
-            <a:ext cx="4718304" cy="2423160"/>
-          </a:xfrm>
-          <a:prstGeom prst="rect">
-            <a:avLst/>
-          </a:prstGeom>
-          <a:noFill/>
-        </p:spPr>
-        <p:txBody>
-          <a:bodyPr wrap="square" lIns="0" rIns="0" tIns="0" bIns="0" anchor="t">
+            <a:off x="859536" y="2690336"/>
+            <a:ext cx="4718304" cy="1477328"/>
+          </a:xfrm>
+          <a:prstGeom prst="rect">
+            <a:avLst/>
+          </a:prstGeom>
+          <a:noFill/>
+        </p:spPr>
+        <p:txBody>
+          <a:bodyPr wrap="square" lIns="0" tIns="0" rIns="0" bIns="0" anchor="t">
             <a:spAutoFit/>
           </a:bodyPr>
           <a:lstStyle/>
           <a:p>
             <a:pPr algn="l"/>
             <a:r>
-              <a:rPr sz="1700" b="0">
-                <a:solidFill>
-                  <a:srgbClr val="15273B"/>
-                </a:solidFill>
-                <a:latin typeface="Aptos"/>
-              </a:rPr>
-              <a:t>64 → 32 neurônios · ReLU
+              <a:rPr sz="2400" b="0" dirty="0">
+                <a:latin typeface="Aptos"/>
+              </a:rPr>
+              <a:t>64 → 32 </a:t>
+            </a:r>
+            <a:r>
+              <a:rPr sz="2400" b="0" dirty="0" err="1">
+                <a:latin typeface="Aptos"/>
+              </a:rPr>
+              <a:t>neurônios</a:t>
+            </a:r>
+            <a:r>
+              <a:rPr sz="2400" b="0" dirty="0">
+                <a:latin typeface="Aptos"/>
+              </a:rPr>
+              <a:t> · </a:t>
+            </a:r>
+            <a:r>
+              <a:rPr sz="2400" b="0" dirty="0" err="1">
+                <a:latin typeface="Aptos"/>
+              </a:rPr>
+              <a:t>ReLU</a:t>
+            </a:r>
+            <a:r>
+              <a:rPr sz="2400" b="0" dirty="0">
+                <a:latin typeface="Aptos"/>
+              </a:rPr>
+              <a:t>
 Adam · learning rate 0,001
-Lote 128 · até 80 épocas
-Early Stopping: paciência 12</a:t>
+Lote 128 · </a:t>
+            </a:r>
+            <a:r>
+              <a:rPr sz="2400" b="0" dirty="0" err="1">
+                <a:latin typeface="Aptos"/>
+              </a:rPr>
+              <a:t>até</a:t>
+            </a:r>
+            <a:r>
+              <a:rPr sz="2400" b="0" dirty="0">
+                <a:latin typeface="Aptos"/>
+              </a:rPr>
+              <a:t> 80 </a:t>
+            </a:r>
+            <a:r>
+              <a:rPr sz="2400" b="0" dirty="0" err="1">
+                <a:latin typeface="Aptos"/>
+              </a:rPr>
+              <a:t>épocas</a:t>
+            </a:r>
+            <a:r>
+              <a:rPr sz="2400" b="0" dirty="0">
+                <a:latin typeface="Aptos"/>
+              </a:rPr>
+              <a:t>
+Early Stopping: </a:t>
+            </a:r>
+            <a:r>
+              <a:rPr sz="2400" b="0" dirty="0" err="1">
+                <a:latin typeface="Aptos"/>
+              </a:rPr>
+              <a:t>paciência</a:t>
+            </a:r>
+            <a:r>
+              <a:rPr sz="2400" b="0" dirty="0">
+                <a:latin typeface="Aptos"/>
+              </a:rPr>
+              <a:t> 12</a:t>
             </a:r>
           </a:p>
         </p:txBody>
@@ -18443,6 +19052,7 @@
           <a:lstStyle/>
           <a:p>
             <a:pPr algn="ctr"/>
+            <a:endParaRPr/>
           </a:p>
         </p:txBody>
       </p:sp>
@@ -18463,7 +19073,7 @@
           <a:noFill/>
         </p:spPr>
         <p:txBody>
-          <a:bodyPr wrap="square" lIns="0" rIns="0" tIns="0" bIns="0" anchor="ctr">
+          <a:bodyPr wrap="square" lIns="0" tIns="0" rIns="0" bIns="0" anchor="ctr">
             <a:spAutoFit/>
           </a:bodyPr>
           <a:lstStyle/>
@@ -18498,7 +19108,7 @@
           <a:noFill/>
         </p:spPr>
         <p:txBody>
-          <a:bodyPr wrap="square" lIns="0" rIns="0" tIns="0" bIns="0" anchor="ctr">
+          <a:bodyPr wrap="square" lIns="0" tIns="0" rIns="0" bIns="0" anchor="ctr">
             <a:spAutoFit/>
           </a:bodyPr>
           <a:lstStyle/>
@@ -18560,6 +19170,7 @@
           <a:lstStyle/>
           <a:p>
             <a:pPr algn="ctr"/>
+            <a:endParaRPr/>
           </a:p>
         </p:txBody>
       </p:sp>
@@ -18580,7 +19191,7 @@
           <a:noFill/>
         </p:spPr>
         <p:txBody>
-          <a:bodyPr wrap="square" lIns="0" rIns="0" tIns="0" bIns="0" anchor="ctr">
+          <a:bodyPr wrap="square" lIns="0" tIns="0" rIns="0" bIns="0" anchor="ctr">
             <a:spAutoFit/>
           </a:bodyPr>
           <a:lstStyle/>
@@ -18615,7 +19226,7 @@
           <a:noFill/>
         </p:spPr>
         <p:txBody>
-          <a:bodyPr wrap="square" lIns="0" rIns="0" tIns="0" bIns="0" anchor="ctr">
+          <a:bodyPr wrap="square" lIns="0" tIns="0" rIns="0" bIns="0" anchor="ctr">
             <a:spAutoFit/>
           </a:bodyPr>
           <a:lstStyle/>
@@ -18673,6 +19284,7 @@
           <a:lstStyle/>
           <a:p>
             <a:pPr algn="ctr"/>
+            <a:endParaRPr/>
           </a:p>
         </p:txBody>
       </p:sp>
@@ -18716,6 +19328,7 @@
           <a:lstStyle/>
           <a:p>
             <a:pPr algn="ctr"/>
+            <a:endParaRPr/>
           </a:p>
         </p:txBody>
       </p:sp>
@@ -18736,7 +19349,7 @@
           <a:noFill/>
         </p:spPr>
         <p:txBody>
-          <a:bodyPr wrap="square" lIns="0" rIns="0" tIns="0" bIns="0" anchor="ctr">
+          <a:bodyPr wrap="square" lIns="0" tIns="0" rIns="0" bIns="0" anchor="ctr">
             <a:spAutoFit/>
           </a:bodyPr>
           <a:lstStyle/>
@@ -18771,7 +19384,7 @@
           <a:noFill/>
         </p:spPr>
         <p:txBody>
-          <a:bodyPr wrap="square" lIns="0" rIns="0" tIns="0" bIns="0" anchor="ctr">
+          <a:bodyPr wrap="square" lIns="0" tIns="0" rIns="0" bIns="0" anchor="ctr">
             <a:spAutoFit/>
           </a:bodyPr>
           <a:lstStyle/>
@@ -18798,7 +19411,7 @@
 </file>
 
 <file path=ppt/slides/slide9.xml><?xml version="1.0" encoding="utf-8"?>
-<p:sld xmlns:a="http://schemas.openxmlformats.org/drawingml/2006/main" xmlns:p="http://schemas.openxmlformats.org/presentationml/2006/main" xmlns:r="http://schemas.openxmlformats.org/officeDocument/2006/relationships">
+<p:sld xmlns:a="http://schemas.openxmlformats.org/drawingml/2006/main" xmlns:r="http://schemas.openxmlformats.org/officeDocument/2006/relationships" xmlns:p="http://schemas.openxmlformats.org/presentationml/2006/main">
   <p:cSld>
     <p:bg>
       <p:bgPr>
@@ -18814,7 +19427,14 @@
         <p:cNvGrpSpPr/>
         <p:nvPr/>
       </p:nvGrpSpPr>
-      <p:grpSpPr/>
+      <p:grpSpPr>
+        <a:xfrm>
+          <a:off x="0" y="0"/>
+          <a:ext cx="0" cy="0"/>
+          <a:chOff x="0" y="0"/>
+          <a:chExt cx="0" cy="0"/>
+        </a:xfrm>
+      </p:grpSpPr>
       <p:sp>
         <p:nvSpPr>
           <p:cNvPr id="2" name="Rectangle 1"/>
@@ -18855,6 +19475,7 @@
           <a:lstStyle/>
           <a:p>
             <a:pPr algn="ctr"/>
+            <a:endParaRPr/>
           </a:p>
         </p:txBody>
       </p:sp>
@@ -18875,7 +19496,7 @@
           <a:noFill/>
         </p:spPr>
         <p:txBody>
-          <a:bodyPr wrap="square" lIns="0" rIns="0" tIns="0" bIns="0" anchor="ctr">
+          <a:bodyPr wrap="square" lIns="0" tIns="0" rIns="0" bIns="0" anchor="ctr">
             <a:spAutoFit/>
           </a:bodyPr>
           <a:lstStyle/>
@@ -18910,7 +19531,7 @@
           <a:noFill/>
         </p:spPr>
         <p:txBody>
-          <a:bodyPr wrap="square" lIns="0" rIns="0" tIns="0" bIns="0" anchor="ctr">
+          <a:bodyPr wrap="square" lIns="0" tIns="0" rIns="0" bIns="0" anchor="ctr">
             <a:spAutoFit/>
           </a:bodyPr>
           <a:lstStyle/>
@@ -18945,7 +19566,7 @@
           <a:noFill/>
         </p:spPr>
         <p:txBody>
-          <a:bodyPr wrap="square" lIns="0" rIns="0" tIns="0" bIns="0" anchor="ctr">
+          <a:bodyPr wrap="square" lIns="0" tIns="0" rIns="0" bIns="0" anchor="ctr">
             <a:spAutoFit/>
           </a:bodyPr>
           <a:lstStyle/>
@@ -19003,6 +19624,7 @@
           <a:lstStyle/>
           <a:p>
             <a:pPr algn="ctr"/>
+            <a:endParaRPr/>
           </a:p>
         </p:txBody>
       </p:sp>
@@ -19023,7 +19645,7 @@
           <a:noFill/>
         </p:spPr>
         <p:txBody>
-          <a:bodyPr wrap="square" lIns="0" rIns="0" tIns="0" bIns="0" anchor="ctr">
+          <a:bodyPr wrap="square" lIns="0" tIns="0" rIns="0" bIns="0" anchor="ctr">
             <a:spAutoFit/>
           </a:bodyPr>
           <a:lstStyle/>
@@ -19058,7 +19680,7 @@
           <a:noFill/>
         </p:spPr>
         <p:txBody>
-          <a:bodyPr wrap="square" lIns="0" rIns="0" tIns="0" bIns="0" anchor="ctr">
+          <a:bodyPr wrap="square" lIns="0" tIns="0" rIns="0" bIns="0" anchor="ctr">
             <a:spAutoFit/>
           </a:bodyPr>
           <a:lstStyle/>
@@ -19120,6 +19742,7 @@
           <a:lstStyle/>
           <a:p>
             <a:pPr algn="ctr"/>
+            <a:endParaRPr/>
           </a:p>
         </p:txBody>
       </p:sp>
@@ -19163,6 +19786,7 @@
           <a:lstStyle/>
           <a:p>
             <a:pPr algn="ctr"/>
+            <a:endParaRPr/>
           </a:p>
         </p:txBody>
       </p:sp>
@@ -19183,7 +19807,7 @@
           <a:noFill/>
         </p:spPr>
         <p:txBody>
-          <a:bodyPr wrap="square" lIns="0" rIns="0" tIns="0" bIns="0" anchor="ctr">
+          <a:bodyPr wrap="square" lIns="0" tIns="0" rIns="0" bIns="0" anchor="ctr">
             <a:spAutoFit/>
           </a:bodyPr>
           <a:lstStyle/>
@@ -19210,29 +19834,200 @@
         <p:spPr>
           <a:xfrm>
             <a:off x="914400" y="2478024"/>
-            <a:ext cx="4718304" cy="2441448"/>
-          </a:xfrm>
-          <a:prstGeom prst="rect">
-            <a:avLst/>
-          </a:prstGeom>
-          <a:noFill/>
-        </p:spPr>
-        <p:txBody>
-          <a:bodyPr wrap="square" lIns="0" rIns="0" tIns="0" bIns="0" anchor="t">
+            <a:ext cx="4718304" cy="1846659"/>
+          </a:xfrm>
+          <a:prstGeom prst="rect">
+            <a:avLst/>
+          </a:prstGeom>
+          <a:noFill/>
+        </p:spPr>
+        <p:txBody>
+          <a:bodyPr wrap="square" lIns="0" tIns="0" rIns="0" bIns="0" anchor="t">
             <a:spAutoFit/>
           </a:bodyPr>
           <a:lstStyle/>
           <a:p>
             <a:pPr algn="l"/>
             <a:r>
-              <a:rPr sz="1500" b="0">
+              <a:rPr sz="2000" b="0" dirty="0" err="1">
                 <a:solidFill>
                   <a:srgbClr val="15273B"/>
                 </a:solidFill>
                 <a:latin typeface="Aptos"/>
               </a:rPr>
-              <a:t>Sorteia combinações independentes no espaço definido.
-Explora 1–3 camadas, 32–256 neurônios, ReLU/tanh, Adam/RMSprop, lote, learning rate e paciência.</a:t>
+              <a:t>Sorteia</a:t>
+            </a:r>
+            <a:r>
+              <a:rPr sz="2000" b="0" dirty="0">
+                <a:solidFill>
+                  <a:srgbClr val="15273B"/>
+                </a:solidFill>
+                <a:latin typeface="Aptos"/>
+              </a:rPr>
+              <a:t> </a:t>
+            </a:r>
+            <a:r>
+              <a:rPr sz="2000" b="0" dirty="0" err="1">
+                <a:solidFill>
+                  <a:srgbClr val="15273B"/>
+                </a:solidFill>
+                <a:latin typeface="Aptos"/>
+              </a:rPr>
+              <a:t>combinações</a:t>
+            </a:r>
+            <a:r>
+              <a:rPr sz="2000" b="0" dirty="0">
+                <a:solidFill>
+                  <a:srgbClr val="15273B"/>
+                </a:solidFill>
+                <a:latin typeface="Aptos"/>
+              </a:rPr>
+              <a:t> </a:t>
+            </a:r>
+            <a:r>
+              <a:rPr sz="2000" b="0" dirty="0" err="1">
+                <a:solidFill>
+                  <a:srgbClr val="15273B"/>
+                </a:solidFill>
+                <a:latin typeface="Aptos"/>
+              </a:rPr>
+              <a:t>independentes</a:t>
+            </a:r>
+            <a:r>
+              <a:rPr sz="2000" b="0" dirty="0">
+                <a:solidFill>
+                  <a:srgbClr val="15273B"/>
+                </a:solidFill>
+                <a:latin typeface="Aptos"/>
+              </a:rPr>
+              <a:t> no </a:t>
+            </a:r>
+            <a:r>
+              <a:rPr sz="2000" b="0" dirty="0" err="1">
+                <a:solidFill>
+                  <a:srgbClr val="15273B"/>
+                </a:solidFill>
+                <a:latin typeface="Aptos"/>
+              </a:rPr>
+              <a:t>espaço</a:t>
+            </a:r>
+            <a:r>
+              <a:rPr sz="2000" b="0" dirty="0">
+                <a:solidFill>
+                  <a:srgbClr val="15273B"/>
+                </a:solidFill>
+                <a:latin typeface="Aptos"/>
+              </a:rPr>
+              <a:t> </a:t>
+            </a:r>
+            <a:r>
+              <a:rPr sz="2000" b="0" dirty="0" err="1">
+                <a:solidFill>
+                  <a:srgbClr val="15273B"/>
+                </a:solidFill>
+                <a:latin typeface="Aptos"/>
+              </a:rPr>
+              <a:t>definido</a:t>
+            </a:r>
+            <a:r>
+              <a:rPr sz="2000" b="0" dirty="0">
+                <a:solidFill>
+                  <a:srgbClr val="15273B"/>
+                </a:solidFill>
+                <a:latin typeface="Aptos"/>
+              </a:rPr>
+              <a:t>.
+Explora 1–3 </a:t>
+            </a:r>
+            <a:r>
+              <a:rPr sz="2000" b="0" dirty="0" err="1">
+                <a:solidFill>
+                  <a:srgbClr val="15273B"/>
+                </a:solidFill>
+                <a:latin typeface="Aptos"/>
+              </a:rPr>
+              <a:t>camadas</a:t>
+            </a:r>
+            <a:r>
+              <a:rPr sz="2000" b="0" dirty="0">
+                <a:solidFill>
+                  <a:srgbClr val="15273B"/>
+                </a:solidFill>
+                <a:latin typeface="Aptos"/>
+              </a:rPr>
+              <a:t>, 32–256 </a:t>
+            </a:r>
+            <a:r>
+              <a:rPr sz="2000" b="0" dirty="0" err="1">
+                <a:solidFill>
+                  <a:srgbClr val="15273B"/>
+                </a:solidFill>
+                <a:latin typeface="Aptos"/>
+              </a:rPr>
+              <a:t>neurônios</a:t>
+            </a:r>
+            <a:r>
+              <a:rPr sz="2000" b="0" dirty="0">
+                <a:solidFill>
+                  <a:srgbClr val="15273B"/>
+                </a:solidFill>
+                <a:latin typeface="Aptos"/>
+              </a:rPr>
+              <a:t>, </a:t>
+            </a:r>
+            <a:r>
+              <a:rPr sz="2000" b="0" dirty="0" err="1">
+                <a:solidFill>
+                  <a:srgbClr val="15273B"/>
+                </a:solidFill>
+                <a:latin typeface="Aptos"/>
+              </a:rPr>
+              <a:t>ReLU</a:t>
+            </a:r>
+            <a:r>
+              <a:rPr sz="2000" b="0" dirty="0">
+                <a:solidFill>
+                  <a:srgbClr val="15273B"/>
+                </a:solidFill>
+                <a:latin typeface="Aptos"/>
+              </a:rPr>
+              <a:t>/tanh, Adam/RMSprop, </a:t>
+            </a:r>
+            <a:r>
+              <a:rPr sz="2000" b="0" dirty="0" err="1">
+                <a:solidFill>
+                  <a:srgbClr val="15273B"/>
+                </a:solidFill>
+                <a:latin typeface="Aptos"/>
+              </a:rPr>
+              <a:t>lote</a:t>
+            </a:r>
+            <a:r>
+              <a:rPr sz="2000" b="0" dirty="0">
+                <a:solidFill>
+                  <a:srgbClr val="15273B"/>
+                </a:solidFill>
+                <a:latin typeface="Aptos"/>
+              </a:rPr>
+              <a:t>, learning rate e </a:t>
+            </a:r>
+            <a:r>
+              <a:rPr sz="2000" b="0" dirty="0" err="1">
+                <a:solidFill>
+                  <a:srgbClr val="15273B"/>
+                </a:solidFill>
+                <a:latin typeface="Aptos"/>
+              </a:rPr>
+              <a:t>paciência</a:t>
+            </a:r>
+            <a:r>
+              <a:rPr sz="2000" b="0" dirty="0">
+                <a:solidFill>
+                  <a:srgbClr val="15273B"/>
+                </a:solidFill>
+                <a:latin typeface="Aptos"/>
+              </a:rPr>
+              <a:t>.</a:t>
             </a:r>
           </a:p>
         </p:txBody>
@@ -19281,6 +20076,7 @@
           <a:lstStyle/>
           <a:p>
             <a:pPr algn="ctr"/>
+            <a:endParaRPr/>
           </a:p>
         </p:txBody>
       </p:sp>
@@ -19324,6 +20120,7 @@
           <a:lstStyle/>
           <a:p>
             <a:pPr algn="ctr"/>
+            <a:endParaRPr/>
           </a:p>
         </p:txBody>
       </p:sp>
@@ -19344,7 +20141,7 @@
           <a:noFill/>
         </p:spPr>
         <p:txBody>
-          <a:bodyPr wrap="square" lIns="0" rIns="0" tIns="0" bIns="0" anchor="ctr">
+          <a:bodyPr wrap="square" lIns="0" tIns="0" rIns="0" bIns="0" anchor="ctr">
             <a:spAutoFit/>
           </a:bodyPr>
           <a:lstStyle/>
@@ -19371,29 +20168,299 @@
         <p:spPr>
           <a:xfrm>
             <a:off x="6382512" y="2478024"/>
-            <a:ext cx="4901183" cy="2441448"/>
-          </a:xfrm>
-          <a:prstGeom prst="rect">
-            <a:avLst/>
-          </a:prstGeom>
-          <a:noFill/>
-        </p:spPr>
-        <p:txBody>
-          <a:bodyPr wrap="square" lIns="0" rIns="0" tIns="0" bIns="0" anchor="t">
+            <a:ext cx="4901183" cy="1846659"/>
+          </a:xfrm>
+          <a:prstGeom prst="rect">
+            <a:avLst/>
+          </a:prstGeom>
+          <a:noFill/>
+        </p:spPr>
+        <p:txBody>
+          <a:bodyPr wrap="square" lIns="0" tIns="0" rIns="0" bIns="0" anchor="t">
             <a:spAutoFit/>
           </a:bodyPr>
           <a:lstStyle/>
           <a:p>
             <a:pPr algn="l"/>
             <a:r>
-              <a:rPr sz="1500" b="0">
+              <a:rPr sz="2000" b="0" dirty="0">
                 <a:solidFill>
                   <a:srgbClr val="15273B"/>
                 </a:solidFill>
                 <a:latin typeface="Aptos"/>
               </a:rPr>
-              <a:t>Usa os resultados das próprias tentativas anteriores para sugerir as próximas.
-Recebe o mesmo espaço de busca, a mesma amostra e o mesmo critério: MAE médio.</a:t>
+              <a:t>Usa </a:t>
+            </a:r>
+            <a:r>
+              <a:rPr sz="2000" b="0" dirty="0" err="1">
+                <a:solidFill>
+                  <a:srgbClr val="15273B"/>
+                </a:solidFill>
+                <a:latin typeface="Aptos"/>
+              </a:rPr>
+              <a:t>os</a:t>
+            </a:r>
+            <a:r>
+              <a:rPr sz="2000" b="0" dirty="0">
+                <a:solidFill>
+                  <a:srgbClr val="15273B"/>
+                </a:solidFill>
+                <a:latin typeface="Aptos"/>
+              </a:rPr>
+              <a:t> </a:t>
+            </a:r>
+            <a:r>
+              <a:rPr sz="2000" b="0" dirty="0" err="1">
+                <a:solidFill>
+                  <a:srgbClr val="15273B"/>
+                </a:solidFill>
+                <a:latin typeface="Aptos"/>
+              </a:rPr>
+              <a:t>resultados</a:t>
+            </a:r>
+            <a:r>
+              <a:rPr sz="2000" b="0" dirty="0">
+                <a:solidFill>
+                  <a:srgbClr val="15273B"/>
+                </a:solidFill>
+                <a:latin typeface="Aptos"/>
+              </a:rPr>
+              <a:t> das </a:t>
+            </a:r>
+            <a:r>
+              <a:rPr sz="2000" b="0" dirty="0" err="1">
+                <a:solidFill>
+                  <a:srgbClr val="15273B"/>
+                </a:solidFill>
+                <a:latin typeface="Aptos"/>
+              </a:rPr>
+              <a:t>próprias</a:t>
+            </a:r>
+            <a:r>
+              <a:rPr sz="2000" b="0" dirty="0">
+                <a:solidFill>
+                  <a:srgbClr val="15273B"/>
+                </a:solidFill>
+                <a:latin typeface="Aptos"/>
+              </a:rPr>
+              <a:t> </a:t>
+            </a:r>
+            <a:r>
+              <a:rPr sz="2000" b="0" dirty="0" err="1">
+                <a:solidFill>
+                  <a:srgbClr val="15273B"/>
+                </a:solidFill>
+                <a:latin typeface="Aptos"/>
+              </a:rPr>
+              <a:t>tentativas</a:t>
+            </a:r>
+            <a:r>
+              <a:rPr sz="2000" b="0" dirty="0">
+                <a:solidFill>
+                  <a:srgbClr val="15273B"/>
+                </a:solidFill>
+                <a:latin typeface="Aptos"/>
+              </a:rPr>
+              <a:t> </a:t>
+            </a:r>
+            <a:r>
+              <a:rPr sz="2000" b="0" dirty="0" err="1">
+                <a:solidFill>
+                  <a:srgbClr val="15273B"/>
+                </a:solidFill>
+                <a:latin typeface="Aptos"/>
+              </a:rPr>
+              <a:t>anteriores</a:t>
+            </a:r>
+            <a:r>
+              <a:rPr sz="2000" b="0" dirty="0">
+                <a:solidFill>
+                  <a:srgbClr val="15273B"/>
+                </a:solidFill>
+                <a:latin typeface="Aptos"/>
+              </a:rPr>
+              <a:t> para </a:t>
+            </a:r>
+            <a:r>
+              <a:rPr sz="2000" b="0" dirty="0" err="1">
+                <a:solidFill>
+                  <a:srgbClr val="15273B"/>
+                </a:solidFill>
+                <a:latin typeface="Aptos"/>
+              </a:rPr>
+              <a:t>sugerir</a:t>
+            </a:r>
+            <a:r>
+              <a:rPr sz="2000" b="0" dirty="0">
+                <a:solidFill>
+                  <a:srgbClr val="15273B"/>
+                </a:solidFill>
+                <a:latin typeface="Aptos"/>
+              </a:rPr>
+              <a:t> as </a:t>
+            </a:r>
+            <a:r>
+              <a:rPr sz="2000" b="0" dirty="0" err="1">
+                <a:solidFill>
+                  <a:srgbClr val="15273B"/>
+                </a:solidFill>
+                <a:latin typeface="Aptos"/>
+              </a:rPr>
+              <a:t>próximas</a:t>
+            </a:r>
+            <a:r>
+              <a:rPr sz="2000" b="0" dirty="0">
+                <a:solidFill>
+                  <a:srgbClr val="15273B"/>
+                </a:solidFill>
+                <a:latin typeface="Aptos"/>
+              </a:rPr>
+              <a:t>.
+Recebe o </a:t>
+            </a:r>
+            <a:r>
+              <a:rPr sz="2000" b="0" dirty="0" err="1">
+                <a:solidFill>
+                  <a:srgbClr val="15273B"/>
+                </a:solidFill>
+                <a:latin typeface="Aptos"/>
+              </a:rPr>
+              <a:t>mesmo</a:t>
+            </a:r>
+            <a:r>
+              <a:rPr sz="2000" b="0" dirty="0">
+                <a:solidFill>
+                  <a:srgbClr val="15273B"/>
+                </a:solidFill>
+                <a:latin typeface="Aptos"/>
+              </a:rPr>
+              <a:t> </a:t>
+            </a:r>
+            <a:r>
+              <a:rPr sz="2000" b="0" dirty="0" err="1">
+                <a:solidFill>
+                  <a:srgbClr val="15273B"/>
+                </a:solidFill>
+                <a:latin typeface="Aptos"/>
+              </a:rPr>
+              <a:t>espaço</a:t>
+            </a:r>
+            <a:r>
+              <a:rPr sz="2000" b="0" dirty="0">
+                <a:solidFill>
+                  <a:srgbClr val="15273B"/>
+                </a:solidFill>
+                <a:latin typeface="Aptos"/>
+              </a:rPr>
+              <a:t> de </a:t>
+            </a:r>
+            <a:r>
+              <a:rPr sz="2000" b="0" dirty="0" err="1">
+                <a:solidFill>
+                  <a:srgbClr val="15273B"/>
+                </a:solidFill>
+                <a:latin typeface="Aptos"/>
+              </a:rPr>
+              <a:t>busca</a:t>
+            </a:r>
+            <a:r>
+              <a:rPr sz="2000" b="0" dirty="0">
+                <a:solidFill>
+                  <a:srgbClr val="15273B"/>
+                </a:solidFill>
+                <a:latin typeface="Aptos"/>
+              </a:rPr>
+              <a:t>, a </a:t>
+            </a:r>
+            <a:r>
+              <a:rPr sz="2000" b="0" dirty="0" err="1">
+                <a:solidFill>
+                  <a:srgbClr val="15273B"/>
+                </a:solidFill>
+                <a:latin typeface="Aptos"/>
+              </a:rPr>
+              <a:t>mesma</a:t>
+            </a:r>
+            <a:r>
+              <a:rPr sz="2000" b="0" dirty="0">
+                <a:solidFill>
+                  <a:srgbClr val="15273B"/>
+                </a:solidFill>
+                <a:latin typeface="Aptos"/>
+              </a:rPr>
+              <a:t> </a:t>
+            </a:r>
+            <a:r>
+              <a:rPr sz="2000" b="0" dirty="0" err="1">
+                <a:solidFill>
+                  <a:srgbClr val="15273B"/>
+                </a:solidFill>
+                <a:latin typeface="Aptos"/>
+              </a:rPr>
+              <a:t>amostra</a:t>
+            </a:r>
+            <a:r>
+              <a:rPr sz="2000" b="0" dirty="0">
+                <a:solidFill>
+                  <a:srgbClr val="15273B"/>
+                </a:solidFill>
+                <a:latin typeface="Aptos"/>
+              </a:rPr>
+              <a:t> e o </a:t>
+            </a:r>
+            <a:r>
+              <a:rPr sz="2000" b="0" dirty="0" err="1">
+                <a:solidFill>
+                  <a:srgbClr val="15273B"/>
+                </a:solidFill>
+                <a:latin typeface="Aptos"/>
+              </a:rPr>
+              <a:t>mesmo</a:t>
+            </a:r>
+            <a:r>
+              <a:rPr sz="2000" b="0" dirty="0">
+                <a:solidFill>
+                  <a:srgbClr val="15273B"/>
+                </a:solidFill>
+                <a:latin typeface="Aptos"/>
+              </a:rPr>
+              <a:t> </a:t>
+            </a:r>
+            <a:r>
+              <a:rPr sz="2000" b="0" dirty="0" err="1">
+                <a:solidFill>
+                  <a:srgbClr val="15273B"/>
+                </a:solidFill>
+                <a:latin typeface="Aptos"/>
+              </a:rPr>
+              <a:t>critério</a:t>
+            </a:r>
+            <a:r>
+              <a:rPr sz="2000" b="0" dirty="0">
+                <a:solidFill>
+                  <a:srgbClr val="15273B"/>
+                </a:solidFill>
+                <a:latin typeface="Aptos"/>
+              </a:rPr>
+              <a:t>: MAE </a:t>
+            </a:r>
+            <a:r>
+              <a:rPr sz="2000" b="0" dirty="0" err="1">
+                <a:solidFill>
+                  <a:srgbClr val="15273B"/>
+                </a:solidFill>
+                <a:latin typeface="Aptos"/>
+              </a:rPr>
+              <a:t>médio</a:t>
+            </a:r>
+            <a:r>
+              <a:rPr sz="2000" b="0" dirty="0">
+                <a:solidFill>
+                  <a:srgbClr val="15273B"/>
+                </a:solidFill>
+                <a:latin typeface="Aptos"/>
+              </a:rPr>
+              <a:t>.</a:t>
             </a:r>
           </a:p>
         </p:txBody>
@@ -19438,6 +20505,7 @@
           <a:lstStyle/>
           <a:p>
             <a:pPr algn="ctr"/>
+            <a:endParaRPr/>
           </a:p>
         </p:txBody>
       </p:sp>
@@ -19481,6 +20549,7 @@
           <a:lstStyle/>
           <a:p>
             <a:pPr algn="ctr"/>
+            <a:endParaRPr/>
           </a:p>
         </p:txBody>
       </p:sp>
@@ -19501,7 +20570,7 @@
           <a:noFill/>
         </p:spPr>
         <p:txBody>
-          <a:bodyPr wrap="square" lIns="0" rIns="0" tIns="0" bIns="0" anchor="ctr">
+          <a:bodyPr wrap="square" lIns="0" tIns="0" rIns="0" bIns="0" anchor="ctr">
             <a:spAutoFit/>
           </a:bodyPr>
           <a:lstStyle/>
@@ -19536,7 +20605,7 @@
           <a:noFill/>
         </p:spPr>
         <p:txBody>
-          <a:bodyPr wrap="square" lIns="0" rIns="0" tIns="0" bIns="0" anchor="ctr">
+          <a:bodyPr wrap="square" lIns="0" tIns="0" rIns="0" bIns="0" anchor="ctr">
             <a:spAutoFit/>
           </a:bodyPr>
           <a:lstStyle/>
